--- a/Obsidian_教學簡報.pptx
+++ b/Obsidian_教學簡報.pptx
@@ -3108,7 +3108,7 @@
     <p:bg>
       <p:bgPr>
         <a:solidFill>
-          <a:srgbClr val="1E1E24"/>
+          <a:srgbClr val="F5F5F7"/>
         </a:solidFill>
         <a:effectLst/>
       </p:bgPr>
@@ -3148,7 +3148,7 @@
               </a:spcAft>
               <a:defRPr sz="4400" b="1">
                 <a:solidFill>
-                  <a:srgbClr val="FFFFFF"/>
+                  <a:srgbClr val="1B1B1F"/>
                 </a:solidFill>
                 <a:latin typeface="Microsoft JhengHei"/>
               </a:defRPr>
@@ -3161,7 +3161,7 @@
             <a:pPr>
               <a:defRPr sz="2000">
                 <a:solidFill>
-                  <a:srgbClr val="00E5FF"/>
+                  <a:srgbClr val="009688"/>
                 </a:solidFill>
                 <a:latin typeface="Microsoft JhengHei"/>
               </a:defRPr>
@@ -3210,7 +3210,7 @@
     <p:bg>
       <p:bgPr>
         <a:solidFill>
-          <a:srgbClr val="1E1E24"/>
+          <a:srgbClr val="F5F5F7"/>
         </a:solidFill>
         <a:effectLst/>
       </p:bgPr>
@@ -3224,59 +3224,25 @@
       <p:grpSpPr/>
       <p:sp>
         <p:nvSpPr>
-          <p:cNvPr id="2" name="TextBox 1"/>
-          <p:cNvSpPr txBox="1"/>
-          <p:nvPr/>
-        </p:nvSpPr>
-        <p:spPr>
-          <a:xfrm>
-            <a:off x="731520" y="365760"/>
-            <a:ext cx="10725912" cy="731520"/>
-          </a:xfrm>
-          <a:prstGeom prst="rect">
-            <a:avLst/>
-          </a:prstGeom>
-          <a:noFill/>
-        </p:spPr>
-        <p:txBody>
-          <a:bodyPr wrap="square" lIns="0" tIns="0" rIns="0" bIns="0">
-            <a:spAutoFit/>
-          </a:bodyPr>
-          <a:lstStyle/>
-          <a:p>
-            <a:pPr>
-              <a:defRPr sz="3600" b="1">
-                <a:solidFill>
-                  <a:srgbClr val="00E5FF"/>
-                </a:solidFill>
-                <a:latin typeface="Microsoft JhengHei"/>
-              </a:defRPr>
-            </a:pPr>
-            <a:r>
-              <a:t>Markdown 語法：程式碼與表格</a:t>
-            </a:r>
-          </a:p>
-        </p:txBody>
-      </p:sp>
-      <p:sp>
-        <p:nvSpPr>
-          <p:cNvPr id="3" name="Rectangle 2"/>
+          <p:cNvPr id="2" name="Rectangle 1"/>
           <p:cNvSpPr/>
           <p:nvPr/>
         </p:nvSpPr>
         <p:spPr>
           <a:xfrm>
-            <a:off x="731520" y="1371600"/>
-            <a:ext cx="10725912" cy="4754880"/>
+            <a:off x="731520" y="384048"/>
+            <a:ext cx="91440" cy="502920"/>
           </a:xfrm>
           <a:prstGeom prst="rect">
             <a:avLst/>
           </a:prstGeom>
           <a:solidFill>
-            <a:srgbClr val="2D2D35"/>
+            <a:srgbClr val="009688"/>
           </a:solidFill>
           <a:ln>
-            <a:noFill/>
+            <a:solidFill>
+              <a:srgbClr val="009688"/>
+            </a:solidFill>
           </a:ln>
         </p:spPr>
         <p:style>
@@ -3303,14 +3269,14 @@
       </p:sp>
       <p:sp>
         <p:nvSpPr>
-          <p:cNvPr id="4" name="TextBox 3"/>
+          <p:cNvPr id="3" name="TextBox 2"/>
           <p:cNvSpPr txBox="1"/>
           <p:nvPr/>
         </p:nvSpPr>
         <p:spPr>
           <a:xfrm>
-            <a:off x="1097280" y="1645920"/>
-            <a:ext cx="9994392" cy="4206240"/>
+            <a:off x="960120" y="320040"/>
+            <a:ext cx="10497312" cy="731520"/>
           </a:xfrm>
           <a:prstGeom prst="rect">
             <a:avLst/>
@@ -3324,114 +3290,372 @@
           <a:lstStyle/>
           <a:p>
             <a:pPr>
-              <a:spcAft>
-                <a:spcPts val="1000"/>
-              </a:spcAft>
-              <a:defRPr sz="2000">
-                <a:solidFill>
-                  <a:srgbClr val="FFFFFF"/>
-                </a:solidFill>
-                <a:latin typeface="Microsoft JhengHei"/>
-              </a:defRPr>
-            </a:pPr>
-            <a:r>
-              <a:t>**行內程式碼**：使用單個反引號包裹，如 `ipconfig`</a:t>
-            </a:r>
-          </a:p>
+              <a:defRPr sz="3600" b="1">
+                <a:solidFill>
+                  <a:srgbClr val="009688"/>
+                </a:solidFill>
+                <a:latin typeface="Microsoft JhengHei"/>
+              </a:defRPr>
+            </a:pPr>
+            <a:r>
+              <a:t>Markdown 語法：程式碼與表格</a:t>
+            </a:r>
+          </a:p>
+        </p:txBody>
+      </p:sp>
+      <p:sp>
+        <p:nvSpPr>
+          <p:cNvPr id="4" name="Rectangle 3"/>
+          <p:cNvSpPr/>
+          <p:nvPr/>
+        </p:nvSpPr>
+        <p:spPr>
+          <a:xfrm>
+            <a:off x="731520" y="1371600"/>
+            <a:ext cx="10725912" cy="4754880"/>
+          </a:xfrm>
+          <a:prstGeom prst="rect">
+            <a:avLst/>
+          </a:prstGeom>
+          <a:solidFill>
+            <a:srgbClr val="FFFFFF"/>
+          </a:solidFill>
+          <a:ln w="19050">
+            <a:solidFill>
+              <a:srgbClr val="DADEE5"/>
+            </a:solidFill>
+          </a:ln>
+        </p:spPr>
+        <p:style>
+          <a:lnRef idx="1">
+            <a:schemeClr val="accent1"/>
+          </a:lnRef>
+          <a:fillRef idx="3">
+            <a:schemeClr val="accent1"/>
+          </a:fillRef>
+          <a:effectRef idx="2">
+            <a:schemeClr val="accent1"/>
+          </a:effectRef>
+          <a:fontRef idx="minor">
+            <a:schemeClr val="lt1"/>
+          </a:fontRef>
+        </p:style>
+        <p:txBody>
+          <a:bodyPr rtlCol="0" anchor="ctr"/>
+          <a:lstStyle/>
+          <a:p>
+            <a:pPr algn="ctr"/>
+          </a:p>
+        </p:txBody>
+      </p:sp>
+      <p:sp>
+        <p:nvSpPr>
+          <p:cNvPr id="5" name="TextBox 4"/>
+          <p:cNvSpPr txBox="1"/>
+          <p:nvPr/>
+        </p:nvSpPr>
+        <p:spPr>
+          <a:xfrm>
+            <a:off x="1097280" y="1645920"/>
+            <a:ext cx="9994392" cy="4206240"/>
+          </a:xfrm>
+          <a:prstGeom prst="rect">
+            <a:avLst/>
+          </a:prstGeom>
+          <a:noFill/>
+        </p:spPr>
+        <p:txBody>
+          <a:bodyPr wrap="square" lIns="228600" rIns="228600" tIns="228600" bIns="228600">
+            <a:spAutoFit/>
+          </a:bodyPr>
+          <a:lstStyle/>
           <a:p>
             <a:pPr>
-              <a:spcAft>
-                <a:spcPts val="1000"/>
-              </a:spcAft>
-              <a:defRPr sz="2000">
-                <a:solidFill>
-                  <a:srgbClr val="FFFFFF"/>
-                </a:solidFill>
-                <a:latin typeface="Microsoft JhengHei"/>
-              </a:defRPr>
-            </a:pPr>
-            <a:r>
-              <a:t>**多行程式碼區塊**：使用三個反引號包裹，並在開頭標註程式語言：</a:t>
+              <a:lnSpc>
+                <a:spcPct val="125000"/>
+              </a:lnSpc>
+              <a:spcAft>
+                <a:spcPts val="600"/>
+              </a:spcAft>
+              <a:defRPr>
+                <a:latin typeface="Microsoft JhengHei"/>
+              </a:defRPr>
+            </a:pPr>
+            <a:r>
+              <a:rPr sz="2000" b="1">
+                <a:solidFill>
+                  <a:srgbClr val="1B1B1F"/>
+                </a:solidFill>
+                <a:latin typeface="Microsoft JhengHei"/>
+              </a:rPr>
+              <a:t>行內程式碼</a:t>
+            </a:r>
+            <a:r>
+              <a:rPr sz="2000">
+                <a:solidFill>
+                  <a:srgbClr val="1B1B1F"/>
+                </a:solidFill>
+                <a:latin typeface="Microsoft JhengHei"/>
+              </a:rPr>
+              <a:t>：使用單個反引號包裹，如 </a:t>
+            </a:r>
+            <a:r>
+              <a:rPr sz="2000" b="1">
+                <a:solidFill>
+                  <a:srgbClr val="673AB7"/>
+                </a:solidFill>
+                <a:latin typeface="Consolas"/>
+              </a:rPr>
+              <a:t>ipconfig</a:t>
+            </a:r>
+          </a:p>
+          <a:p>
+            <a:pPr>
+              <a:lnSpc>
+                <a:spcPct val="125000"/>
+              </a:lnSpc>
+              <a:spcAft>
+                <a:spcPts val="600"/>
+              </a:spcAft>
+              <a:defRPr>
+                <a:latin typeface="Microsoft JhengHei"/>
+              </a:defRPr>
+            </a:pPr>
+            <a:r>
+              <a:rPr sz="2000" b="1">
+                <a:solidFill>
+                  <a:srgbClr val="1B1B1F"/>
+                </a:solidFill>
+                <a:latin typeface="Microsoft JhengHei"/>
+              </a:rPr>
+              <a:t>多行程式碼區塊</a:t>
+            </a:r>
+            <a:r>
+              <a:rPr sz="2000">
+                <a:solidFill>
+                  <a:srgbClr val="1B1B1F"/>
+                </a:solidFill>
+                <a:latin typeface="Microsoft JhengHei"/>
+              </a:rPr>
+              <a:t>：使用三個反引號包裹，並在開頭標註程式語言：</a:t>
             </a:r>
           </a:p>
           <a:p>
             <a:pPr lvl="1">
-              <a:spcAft>
-                <a:spcPts val="1000"/>
-              </a:spcAft>
-              <a:defRPr sz="1800">
-                <a:solidFill>
-                  <a:srgbClr val="FFFFFF"/>
-                </a:solidFill>
-                <a:latin typeface="Microsoft JhengHei"/>
-              </a:defRPr>
-            </a:pPr>
-            <a:r>
-              <a:t>例如寫 ```python ... ``` 會自動開啟 Python 的語法高亮 (彩色字)</a:t>
+              <a:lnSpc>
+                <a:spcPct val="125000"/>
+              </a:lnSpc>
+              <a:spcAft>
+                <a:spcPts val="600"/>
+              </a:spcAft>
+              <a:defRPr>
+                <a:latin typeface="Microsoft JhengHei"/>
+              </a:defRPr>
+            </a:pPr>
+            <a:r>
+              <a:rPr sz="1800">
+                <a:solidFill>
+                  <a:srgbClr val="1B1B1F"/>
+                </a:solidFill>
+                <a:latin typeface="Microsoft JhengHei"/>
+              </a:rPr>
+              <a:t>例如寫 </a:t>
+            </a:r>
+            <a:r>
+              <a:rPr sz="1800" b="1">
+                <a:solidFill>
+                  <a:srgbClr val="673AB7"/>
+                </a:solidFill>
+                <a:latin typeface="Consolas"/>
+              </a:rPr>
+              <a:t/>
+            </a:r>
+            <a:r>
+              <a:rPr sz="1800" b="1">
+                <a:solidFill>
+                  <a:srgbClr val="673AB7"/>
+                </a:solidFill>
+                <a:latin typeface="Consolas"/>
+              </a:rPr>
+              <a:t>python ... </a:t>
+            </a:r>
+            <a:r>
+              <a:rPr sz="1800" b="1">
+                <a:solidFill>
+                  <a:srgbClr val="673AB7"/>
+                </a:solidFill>
+                <a:latin typeface="Consolas"/>
+              </a:rPr>
+              <a:t/>
+            </a:r>
+            <a:r>
+              <a:rPr sz="1800">
+                <a:solidFill>
+                  <a:srgbClr val="1B1B1F"/>
+                </a:solidFill>
+                <a:latin typeface="Microsoft JhengHei"/>
+              </a:rPr>
+              <a:t> 會自動開啟 Python 的語法高亮 (彩色字)</a:t>
             </a:r>
           </a:p>
           <a:p>
             <a:pPr>
-              <a:spcAft>
-                <a:spcPts val="1000"/>
-              </a:spcAft>
-              <a:defRPr sz="2000">
-                <a:solidFill>
-                  <a:srgbClr val="FFFFFF"/>
-                </a:solidFill>
-                <a:latin typeface="Microsoft JhengHei"/>
-              </a:defRPr>
-            </a:pPr>
-            <a:r>
-              <a:t>**表格整理**：</a:t>
+              <a:lnSpc>
+                <a:spcPct val="125000"/>
+              </a:lnSpc>
+              <a:spcAft>
+                <a:spcPts val="600"/>
+              </a:spcAft>
+              <a:defRPr>
+                <a:latin typeface="Microsoft JhengHei"/>
+              </a:defRPr>
+            </a:pPr>
+            <a:r>
+              <a:rPr sz="2000" b="1">
+                <a:solidFill>
+                  <a:srgbClr val="1B1B1F"/>
+                </a:solidFill>
+                <a:latin typeface="Microsoft JhengHei"/>
+              </a:rPr>
+              <a:t>表格整理</a:t>
+            </a:r>
+            <a:r>
+              <a:rPr sz="2000">
+                <a:solidFill>
+                  <a:srgbClr val="1B1B1F"/>
+                </a:solidFill>
+                <a:latin typeface="Microsoft JhengHei"/>
+              </a:rPr>
+              <a:t>：</a:t>
             </a:r>
           </a:p>
           <a:p>
             <a:pPr lvl="1">
-              <a:spcAft>
-                <a:spcPts val="1000"/>
-              </a:spcAft>
-              <a:defRPr sz="1800">
-                <a:solidFill>
-                  <a:srgbClr val="FFFFFF"/>
-                </a:solidFill>
-                <a:latin typeface="Microsoft JhengHei"/>
-              </a:defRPr>
-            </a:pPr>
-            <a:r>
-              <a:t>用 `|` 區隔直欄，第二行使用 `|---|---|` 來定義表格頭</a:t>
+              <a:lnSpc>
+                <a:spcPct val="125000"/>
+              </a:lnSpc>
+              <a:spcAft>
+                <a:spcPts val="600"/>
+              </a:spcAft>
+              <a:defRPr>
+                <a:latin typeface="Microsoft JhengHei"/>
+              </a:defRPr>
+            </a:pPr>
+            <a:r>
+              <a:rPr sz="1800">
+                <a:solidFill>
+                  <a:srgbClr val="1B1B1F"/>
+                </a:solidFill>
+                <a:latin typeface="Microsoft JhengHei"/>
+              </a:rPr>
+              <a:t>用 </a:t>
+            </a:r>
+            <a:r>
+              <a:rPr sz="1800" b="1">
+                <a:solidFill>
+                  <a:srgbClr val="673AB7"/>
+                </a:solidFill>
+                <a:latin typeface="Consolas"/>
+              </a:rPr>
+              <a:t>|</a:t>
+            </a:r>
+            <a:r>
+              <a:rPr sz="1800">
+                <a:solidFill>
+                  <a:srgbClr val="1B1B1F"/>
+                </a:solidFill>
+                <a:latin typeface="Microsoft JhengHei"/>
+              </a:rPr>
+              <a:t> 區隔直欄，第二行使用 </a:t>
+            </a:r>
+            <a:r>
+              <a:rPr sz="1800" b="1">
+                <a:solidFill>
+                  <a:srgbClr val="673AB7"/>
+                </a:solidFill>
+                <a:latin typeface="Consolas"/>
+              </a:rPr>
+              <a:t>|---|---|</a:t>
+            </a:r>
+            <a:r>
+              <a:rPr sz="1800">
+                <a:solidFill>
+                  <a:srgbClr val="1B1B1F"/>
+                </a:solidFill>
+                <a:latin typeface="Microsoft JhengHei"/>
+              </a:rPr>
+              <a:t> 來定義表格頭</a:t>
             </a:r>
           </a:p>
           <a:p>
             <a:pPr lvl="1">
-              <a:spcAft>
-                <a:spcPts val="1000"/>
-              </a:spcAft>
-              <a:defRPr sz="1800">
-                <a:solidFill>
-                  <a:srgbClr val="FFFFFF"/>
-                </a:solidFill>
-                <a:latin typeface="Microsoft JhengHei"/>
-              </a:defRPr>
-            </a:pPr>
-            <a:r>
-              <a:t>例如：`| 姓名 | 科目 | 分數 |`</a:t>
+              <a:lnSpc>
+                <a:spcPct val="125000"/>
+              </a:lnSpc>
+              <a:spcAft>
+                <a:spcPts val="600"/>
+              </a:spcAft>
+              <a:defRPr>
+                <a:latin typeface="Microsoft JhengHei"/>
+              </a:defRPr>
+            </a:pPr>
+            <a:r>
+              <a:rPr sz="1800">
+                <a:solidFill>
+                  <a:srgbClr val="1B1B1F"/>
+                </a:solidFill>
+                <a:latin typeface="Microsoft JhengHei"/>
+              </a:rPr>
+              <a:t>例如：</a:t>
+            </a:r>
+            <a:r>
+              <a:rPr sz="1800" b="1">
+                <a:solidFill>
+                  <a:srgbClr val="673AB7"/>
+                </a:solidFill>
+                <a:latin typeface="Consolas"/>
+              </a:rPr>
+              <a:t>| 姓名 | 科目 | 分數 |</a:t>
             </a:r>
           </a:p>
           <a:p>
             <a:pPr lvl="1">
-              <a:spcAft>
-                <a:spcPts val="1000"/>
-              </a:spcAft>
-              <a:defRPr sz="1800">
-                <a:solidFill>
-                  <a:srgbClr val="FFFFFF"/>
-                </a:solidFill>
-                <a:latin typeface="Microsoft JhengHei"/>
-              </a:defRPr>
-            </a:pPr>
-            <a:r>
-              <a:t>編輯時按 `Tab` 會自動建立並跳到下一格，非常便利</a:t>
+              <a:lnSpc>
+                <a:spcPct val="125000"/>
+              </a:lnSpc>
+              <a:spcAft>
+                <a:spcPts val="600"/>
+              </a:spcAft>
+              <a:defRPr>
+                <a:latin typeface="Microsoft JhengHei"/>
+              </a:defRPr>
+            </a:pPr>
+            <a:r>
+              <a:rPr sz="1800">
+                <a:solidFill>
+                  <a:srgbClr val="1B1B1F"/>
+                </a:solidFill>
+                <a:latin typeface="Microsoft JhengHei"/>
+              </a:rPr>
+              <a:t>編輯時按 </a:t>
+            </a:r>
+            <a:r>
+              <a:rPr sz="1800" b="1">
+                <a:solidFill>
+                  <a:srgbClr val="673AB7"/>
+                </a:solidFill>
+                <a:latin typeface="Consolas"/>
+              </a:rPr>
+              <a:t>Tab</a:t>
+            </a:r>
+            <a:r>
+              <a:rPr sz="1800">
+                <a:solidFill>
+                  <a:srgbClr val="1B1B1F"/>
+                </a:solidFill>
+                <a:latin typeface="Microsoft JhengHei"/>
+              </a:rPr>
+              <a:t> 會自動建立並跳到下一格，非常便利</a:t>
             </a:r>
           </a:p>
         </p:txBody>
@@ -3450,7 +3674,7 @@
     <p:bg>
       <p:bgPr>
         <a:solidFill>
-          <a:srgbClr val="7C4DFF"/>
+          <a:srgbClr val="673AB7"/>
         </a:solidFill>
         <a:effectLst/>
       </p:bgPr>
@@ -3490,7 +3714,7 @@
               </a:spcAft>
               <a:defRPr sz="4800" b="1">
                 <a:solidFill>
-                  <a:srgbClr val="FFFFFF"/>
+                  <a:srgbClr val="1B1B1F"/>
                 </a:solidFill>
                 <a:latin typeface="Microsoft JhengHei"/>
               </a:defRPr>
@@ -3503,7 +3727,7 @@
             <a:pPr algn="ctr">
               <a:defRPr sz="2000">
                 <a:solidFill>
-                  <a:srgbClr val="D1C4E9"/>
+                  <a:srgbClr val="656575"/>
                 </a:solidFill>
                 <a:latin typeface="Microsoft JhengHei"/>
               </a:defRPr>
@@ -3528,7 +3752,7 @@
     <p:bg>
       <p:bgPr>
         <a:solidFill>
-          <a:srgbClr val="1E1E24"/>
+          <a:srgbClr val="F5F5F7"/>
         </a:solidFill>
         <a:effectLst/>
       </p:bgPr>
@@ -3542,59 +3766,25 @@
       <p:grpSpPr/>
       <p:sp>
         <p:nvSpPr>
-          <p:cNvPr id="2" name="TextBox 1"/>
-          <p:cNvSpPr txBox="1"/>
-          <p:nvPr/>
-        </p:nvSpPr>
-        <p:spPr>
-          <a:xfrm>
-            <a:off x="731520" y="365760"/>
-            <a:ext cx="10725912" cy="731520"/>
-          </a:xfrm>
-          <a:prstGeom prst="rect">
-            <a:avLst/>
-          </a:prstGeom>
-          <a:noFill/>
-        </p:spPr>
-        <p:txBody>
-          <a:bodyPr wrap="square" lIns="0" tIns="0" rIns="0" bIns="0">
-            <a:spAutoFit/>
-          </a:bodyPr>
-          <a:lstStyle/>
-          <a:p>
-            <a:pPr>
-              <a:defRPr sz="3600" b="1">
-                <a:solidFill>
-                  <a:srgbClr val="00E5FF"/>
-                </a:solidFill>
-                <a:latin typeface="Microsoft JhengHei"/>
-              </a:defRPr>
-            </a:pPr>
-            <a:r>
-              <a:t>卡片盒筆記法：三大黃金原則</a:t>
-            </a:r>
-          </a:p>
-        </p:txBody>
-      </p:sp>
-      <p:sp>
-        <p:nvSpPr>
-          <p:cNvPr id="3" name="Rectangle 2"/>
+          <p:cNvPr id="2" name="Rectangle 1"/>
           <p:cNvSpPr/>
           <p:nvPr/>
         </p:nvSpPr>
         <p:spPr>
           <a:xfrm>
-            <a:off x="731520" y="1371600"/>
-            <a:ext cx="5486400" cy="4754880"/>
+            <a:off x="731520" y="384048"/>
+            <a:ext cx="91440" cy="502920"/>
           </a:xfrm>
           <a:prstGeom prst="rect">
             <a:avLst/>
           </a:prstGeom>
           <a:solidFill>
-            <a:srgbClr val="2D2D35"/>
+            <a:srgbClr val="009688"/>
           </a:solidFill>
           <a:ln>
-            <a:noFill/>
+            <a:solidFill>
+              <a:srgbClr val="009688"/>
+            </a:solidFill>
           </a:ln>
         </p:spPr>
         <p:style>
@@ -3621,14 +3811,14 @@
       </p:sp>
       <p:sp>
         <p:nvSpPr>
-          <p:cNvPr id="4" name="TextBox 3"/>
+          <p:cNvPr id="3" name="TextBox 2"/>
           <p:cNvSpPr txBox="1"/>
           <p:nvPr/>
         </p:nvSpPr>
         <p:spPr>
           <a:xfrm>
-            <a:off x="1005840" y="1645920"/>
-            <a:ext cx="4937760" cy="4206240"/>
+            <a:off x="960120" y="320040"/>
+            <a:ext cx="10497312" cy="731520"/>
           </a:xfrm>
           <a:prstGeom prst="rect">
             <a:avLst/>
@@ -3642,97 +3832,214 @@
           <a:lstStyle/>
           <a:p>
             <a:pPr>
-              <a:spcAft>
-                <a:spcPts val="1000"/>
-              </a:spcAft>
-              <a:defRPr sz="1800">
-                <a:solidFill>
-                  <a:srgbClr val="FFFFFF"/>
-                </a:solidFill>
-                <a:latin typeface="Microsoft JhengHei"/>
-              </a:defRPr>
-            </a:pPr>
-            <a:r>
-              <a:t>**1. 原子化原則 (Atomicity)**</a:t>
+              <a:defRPr sz="3600" b="1">
+                <a:solidFill>
+                  <a:srgbClr val="009688"/>
+                </a:solidFill>
+                <a:latin typeface="Microsoft JhengHei"/>
+              </a:defRPr>
+            </a:pPr>
+            <a:r>
+              <a:t>卡片盒筆記法：三大黃金原則</a:t>
+            </a:r>
+          </a:p>
+        </p:txBody>
+      </p:sp>
+      <p:sp>
+        <p:nvSpPr>
+          <p:cNvPr id="4" name="Rectangle 3"/>
+          <p:cNvSpPr/>
+          <p:nvPr/>
+        </p:nvSpPr>
+        <p:spPr>
+          <a:xfrm>
+            <a:off x="731520" y="1371600"/>
+            <a:ext cx="5486400" cy="4754880"/>
+          </a:xfrm>
+          <a:prstGeom prst="rect">
+            <a:avLst/>
+          </a:prstGeom>
+          <a:solidFill>
+            <a:srgbClr val="FFFFFF"/>
+          </a:solidFill>
+          <a:ln w="19050">
+            <a:solidFill>
+              <a:srgbClr val="DADEE5"/>
+            </a:solidFill>
+          </a:ln>
+        </p:spPr>
+        <p:style>
+          <a:lnRef idx="1">
+            <a:schemeClr val="accent1"/>
+          </a:lnRef>
+          <a:fillRef idx="3">
+            <a:schemeClr val="accent1"/>
+          </a:fillRef>
+          <a:effectRef idx="2">
+            <a:schemeClr val="accent1"/>
+          </a:effectRef>
+          <a:fontRef idx="minor">
+            <a:schemeClr val="lt1"/>
+          </a:fontRef>
+        </p:style>
+        <p:txBody>
+          <a:bodyPr rtlCol="0" anchor="ctr"/>
+          <a:lstStyle/>
+          <a:p>
+            <a:pPr algn="ctr"/>
+          </a:p>
+        </p:txBody>
+      </p:sp>
+      <p:sp>
+        <p:nvSpPr>
+          <p:cNvPr id="5" name="TextBox 4"/>
+          <p:cNvSpPr txBox="1"/>
+          <p:nvPr/>
+        </p:nvSpPr>
+        <p:spPr>
+          <a:xfrm>
+            <a:off x="1005840" y="1645920"/>
+            <a:ext cx="4937760" cy="4206240"/>
+          </a:xfrm>
+          <a:prstGeom prst="rect">
+            <a:avLst/>
+          </a:prstGeom>
+          <a:noFill/>
+        </p:spPr>
+        <p:txBody>
+          <a:bodyPr wrap="square" lIns="228600" rIns="228600" tIns="228600" bIns="228600">
+            <a:spAutoFit/>
+          </a:bodyPr>
+          <a:lstStyle/>
+          <a:p>
+            <a:pPr>
+              <a:lnSpc>
+                <a:spcPct val="125000"/>
+              </a:lnSpc>
+              <a:spcAft>
+                <a:spcPts val="600"/>
+              </a:spcAft>
+              <a:defRPr>
+                <a:latin typeface="Microsoft JhengHei"/>
+              </a:defRPr>
+            </a:pPr>
+            <a:r>
+              <a:rPr sz="1800" b="1">
+                <a:solidFill>
+                  <a:srgbClr val="1B1B1F"/>
+                </a:solidFill>
+                <a:latin typeface="Microsoft JhengHei"/>
+              </a:rPr>
+              <a:t>1. 原子化原則 (Atomicity)</a:t>
             </a:r>
           </a:p>
           <a:p>
             <a:pPr lvl="1">
-              <a:spcAft>
-                <a:spcPts val="1000"/>
-              </a:spcAft>
-              <a:defRPr sz="1600">
-                <a:solidFill>
-                  <a:srgbClr val="FFFFFF"/>
-                </a:solidFill>
-                <a:latin typeface="Microsoft JhengHei"/>
-              </a:defRPr>
-            </a:pPr>
-            <a:r>
+              <a:lnSpc>
+                <a:spcPct val="125000"/>
+              </a:lnSpc>
+              <a:spcAft>
+                <a:spcPts val="600"/>
+              </a:spcAft>
+              <a:defRPr>
+                <a:latin typeface="Microsoft JhengHei"/>
+              </a:defRPr>
+            </a:pPr>
+            <a:r>
+              <a:rPr sz="1600">
+                <a:solidFill>
+                  <a:srgbClr val="1B1B1F"/>
+                </a:solidFill>
+                <a:latin typeface="Microsoft JhengHei"/>
+              </a:rPr>
               <a:t>一張卡片只記錄一個概念，拆得夠小才能靈活連結與組合</a:t>
             </a:r>
           </a:p>
           <a:p>
             <a:pPr>
-              <a:spcAft>
-                <a:spcPts val="1000"/>
-              </a:spcAft>
-              <a:defRPr sz="1800">
-                <a:solidFill>
-                  <a:srgbClr val="FFFFFF"/>
-                </a:solidFill>
-                <a:latin typeface="Microsoft JhengHei"/>
-              </a:defRPr>
-            </a:pPr>
-            <a:r>
-              <a:t>**2. 用自己的話重寫**</a:t>
+              <a:lnSpc>
+                <a:spcPct val="125000"/>
+              </a:lnSpc>
+              <a:spcAft>
+                <a:spcPts val="600"/>
+              </a:spcAft>
+              <a:defRPr>
+                <a:latin typeface="Microsoft JhengHei"/>
+              </a:defRPr>
+            </a:pPr>
+            <a:r>
+              <a:rPr sz="1800" b="1">
+                <a:solidFill>
+                  <a:srgbClr val="1B1B1F"/>
+                </a:solidFill>
+                <a:latin typeface="Microsoft JhengHei"/>
+              </a:rPr>
+              <a:t>2. 用自己的話重寫</a:t>
             </a:r>
           </a:p>
           <a:p>
             <a:pPr lvl="1">
-              <a:spcAft>
-                <a:spcPts val="1000"/>
-              </a:spcAft>
-              <a:defRPr sz="1600">
-                <a:solidFill>
-                  <a:srgbClr val="FFFFFF"/>
-                </a:solidFill>
-                <a:latin typeface="Microsoft JhengHei"/>
-              </a:defRPr>
-            </a:pPr>
-            <a:r>
+              <a:lnSpc>
+                <a:spcPct val="125000"/>
+              </a:lnSpc>
+              <a:spcAft>
+                <a:spcPts val="600"/>
+              </a:spcAft>
+              <a:defRPr>
+                <a:latin typeface="Microsoft JhengHei"/>
+              </a:defRPr>
+            </a:pPr>
+            <a:r>
+              <a:rPr sz="1600">
+                <a:solidFill>
+                  <a:srgbClr val="1B1B1F"/>
+                </a:solidFill>
+                <a:latin typeface="Microsoft JhengHei"/>
+              </a:rPr>
               <a:t>拒絕直接複製貼上課本內容，用自己的話寫下理解，才能真正吸收</a:t>
             </a:r>
           </a:p>
           <a:p>
             <a:pPr>
-              <a:spcAft>
-                <a:spcPts val="1000"/>
-              </a:spcAft>
-              <a:defRPr sz="1800">
-                <a:solidFill>
-                  <a:srgbClr val="FFFFFF"/>
-                </a:solidFill>
-                <a:latin typeface="Microsoft JhengHei"/>
-              </a:defRPr>
-            </a:pPr>
-            <a:r>
-              <a:t>**3. 強制連結**</a:t>
+              <a:lnSpc>
+                <a:spcPct val="125000"/>
+              </a:lnSpc>
+              <a:spcAft>
+                <a:spcPts val="600"/>
+              </a:spcAft>
+              <a:defRPr>
+                <a:latin typeface="Microsoft JhengHei"/>
+              </a:defRPr>
+            </a:pPr>
+            <a:r>
+              <a:rPr sz="1800" b="1">
+                <a:solidFill>
+                  <a:srgbClr val="1B1B1F"/>
+                </a:solidFill>
+                <a:latin typeface="Microsoft JhengHei"/>
+              </a:rPr>
+              <a:t>3. 強制連結</a:t>
             </a:r>
           </a:p>
           <a:p>
             <a:pPr lvl="1">
-              <a:spcAft>
-                <a:spcPts val="1000"/>
-              </a:spcAft>
-              <a:defRPr sz="1600">
-                <a:solidFill>
-                  <a:srgbClr val="FFFFFF"/>
-                </a:solidFill>
-                <a:latin typeface="Microsoft JhengHei"/>
-              </a:defRPr>
-            </a:pPr>
-            <a:r>
+              <a:lnSpc>
+                <a:spcPct val="125000"/>
+              </a:lnSpc>
+              <a:spcAft>
+                <a:spcPts val="600"/>
+              </a:spcAft>
+              <a:defRPr>
+                <a:latin typeface="Microsoft JhengHei"/>
+              </a:defRPr>
+            </a:pPr>
+            <a:r>
+              <a:rPr sz="1600">
+                <a:solidFill>
+                  <a:srgbClr val="1B1B1F"/>
+                </a:solidFill>
+                <a:latin typeface="Microsoft JhengHei"/>
+              </a:rPr>
               <a:t>每張卡片都必須與其他卡片產生連結，沒有連結的卡片就像孤島</a:t>
             </a:r>
           </a:p>
@@ -3740,7 +4047,7 @@
       </p:sp>
       <p:pic>
         <p:nvPicPr>
-          <p:cNvPr id="5" name="Picture 4" descr="obsidian_zettelkasten.png"/>
+          <p:cNvPr id="6" name="Picture 5" descr="obsidian_zettelkasten.png"/>
           <p:cNvPicPr>
             <a:picLocks noChangeAspect="1"/>
           </p:cNvPicPr>
@@ -3776,7 +4083,7 @@
     <p:bg>
       <p:bgPr>
         <a:solidFill>
-          <a:srgbClr val="1E1E24"/>
+          <a:srgbClr val="F5F5F7"/>
         </a:solidFill>
         <a:effectLst/>
       </p:bgPr>
@@ -3790,59 +4097,25 @@
       <p:grpSpPr/>
       <p:sp>
         <p:nvSpPr>
-          <p:cNvPr id="2" name="TextBox 1"/>
-          <p:cNvSpPr txBox="1"/>
-          <p:nvPr/>
-        </p:nvSpPr>
-        <p:spPr>
-          <a:xfrm>
-            <a:off x="731520" y="365760"/>
-            <a:ext cx="10725912" cy="731520"/>
-          </a:xfrm>
-          <a:prstGeom prst="rect">
-            <a:avLst/>
-          </a:prstGeom>
-          <a:noFill/>
-        </p:spPr>
-        <p:txBody>
-          <a:bodyPr wrap="square" lIns="0" tIns="0" rIns="0" bIns="0">
-            <a:spAutoFit/>
-          </a:bodyPr>
-          <a:lstStyle/>
-          <a:p>
-            <a:pPr>
-              <a:defRPr sz="3600" b="1">
-                <a:solidFill>
-                  <a:srgbClr val="00E5FF"/>
-                </a:solidFill>
-                <a:latin typeface="Microsoft JhengHei"/>
-              </a:defRPr>
-            </a:pPr>
-            <a:r>
-              <a:t>雙向連結：先連結，後補內容</a:t>
-            </a:r>
-          </a:p>
-        </p:txBody>
-      </p:sp>
-      <p:sp>
-        <p:nvSpPr>
-          <p:cNvPr id="3" name="Rectangle 2"/>
+          <p:cNvPr id="2" name="Rectangle 1"/>
           <p:cNvSpPr/>
           <p:nvPr/>
         </p:nvSpPr>
         <p:spPr>
           <a:xfrm>
-            <a:off x="731520" y="1371600"/>
-            <a:ext cx="10725912" cy="4754880"/>
+            <a:off x="731520" y="384048"/>
+            <a:ext cx="91440" cy="502920"/>
           </a:xfrm>
           <a:prstGeom prst="rect">
             <a:avLst/>
           </a:prstGeom>
           <a:solidFill>
-            <a:srgbClr val="2D2D35"/>
+            <a:srgbClr val="009688"/>
           </a:solidFill>
           <a:ln>
-            <a:noFill/>
+            <a:solidFill>
+              <a:srgbClr val="009688"/>
+            </a:solidFill>
           </a:ln>
         </p:spPr>
         <p:style>
@@ -3869,14 +4142,14 @@
       </p:sp>
       <p:sp>
         <p:nvSpPr>
-          <p:cNvPr id="4" name="TextBox 3"/>
+          <p:cNvPr id="3" name="TextBox 2"/>
           <p:cNvSpPr txBox="1"/>
           <p:nvPr/>
         </p:nvSpPr>
         <p:spPr>
           <a:xfrm>
-            <a:off x="1097280" y="1645920"/>
-            <a:ext cx="9994392" cy="4206240"/>
+            <a:off x="960120" y="320040"/>
+            <a:ext cx="10497312" cy="731520"/>
           </a:xfrm>
           <a:prstGeom prst="rect">
             <a:avLst/>
@@ -3890,114 +4163,291 @@
           <a:lstStyle/>
           <a:p>
             <a:pPr>
-              <a:spcAft>
-                <a:spcPts val="1000"/>
-              </a:spcAft>
-              <a:defRPr sz="2000">
-                <a:solidFill>
-                  <a:srgbClr val="FFFFFF"/>
-                </a:solidFill>
-                <a:latin typeface="Microsoft JhengHei"/>
-              </a:defRPr>
-            </a:pPr>
-            <a:r>
-              <a:t>**什麼是雙向連結？**</a:t>
+              <a:defRPr sz="3600" b="1">
+                <a:solidFill>
+                  <a:srgbClr val="009688"/>
+                </a:solidFill>
+                <a:latin typeface="Microsoft JhengHei"/>
+              </a:defRPr>
+            </a:pPr>
+            <a:r>
+              <a:t>雙向連結：先連結，後補內容</a:t>
+            </a:r>
+          </a:p>
+        </p:txBody>
+      </p:sp>
+      <p:sp>
+        <p:nvSpPr>
+          <p:cNvPr id="4" name="Rectangle 3"/>
+          <p:cNvSpPr/>
+          <p:nvPr/>
+        </p:nvSpPr>
+        <p:spPr>
+          <a:xfrm>
+            <a:off x="731520" y="1371600"/>
+            <a:ext cx="10725912" cy="4754880"/>
+          </a:xfrm>
+          <a:prstGeom prst="rect">
+            <a:avLst/>
+          </a:prstGeom>
+          <a:solidFill>
+            <a:srgbClr val="FFFFFF"/>
+          </a:solidFill>
+          <a:ln w="19050">
+            <a:solidFill>
+              <a:srgbClr val="DADEE5"/>
+            </a:solidFill>
+          </a:ln>
+        </p:spPr>
+        <p:style>
+          <a:lnRef idx="1">
+            <a:schemeClr val="accent1"/>
+          </a:lnRef>
+          <a:fillRef idx="3">
+            <a:schemeClr val="accent1"/>
+          </a:fillRef>
+          <a:effectRef idx="2">
+            <a:schemeClr val="accent1"/>
+          </a:effectRef>
+          <a:fontRef idx="minor">
+            <a:schemeClr val="lt1"/>
+          </a:fontRef>
+        </p:style>
+        <p:txBody>
+          <a:bodyPr rtlCol="0" anchor="ctr"/>
+          <a:lstStyle/>
+          <a:p>
+            <a:pPr algn="ctr"/>
+          </a:p>
+        </p:txBody>
+      </p:sp>
+      <p:sp>
+        <p:nvSpPr>
+          <p:cNvPr id="5" name="TextBox 4"/>
+          <p:cNvSpPr txBox="1"/>
+          <p:nvPr/>
+        </p:nvSpPr>
+        <p:spPr>
+          <a:xfrm>
+            <a:off x="1097280" y="1645920"/>
+            <a:ext cx="9994392" cy="4206240"/>
+          </a:xfrm>
+          <a:prstGeom prst="rect">
+            <a:avLst/>
+          </a:prstGeom>
+          <a:noFill/>
+        </p:spPr>
+        <p:txBody>
+          <a:bodyPr wrap="square" lIns="228600" rIns="228600" tIns="228600" bIns="228600">
+            <a:spAutoFit/>
+          </a:bodyPr>
+          <a:lstStyle/>
+          <a:p>
+            <a:pPr>
+              <a:lnSpc>
+                <a:spcPct val="125000"/>
+              </a:lnSpc>
+              <a:spcAft>
+                <a:spcPts val="600"/>
+              </a:spcAft>
+              <a:defRPr>
+                <a:latin typeface="Microsoft JhengHei"/>
+              </a:defRPr>
+            </a:pPr>
+            <a:r>
+              <a:rPr sz="2000" b="1">
+                <a:solidFill>
+                  <a:srgbClr val="1B1B1F"/>
+                </a:solidFill>
+                <a:latin typeface="Microsoft JhengHei"/>
+              </a:rPr>
+              <a:t>什麼是雙向連結？</a:t>
             </a:r>
           </a:p>
           <a:p>
             <a:pPr lvl="1">
-              <a:spcAft>
-                <a:spcPts val="1000"/>
-              </a:spcAft>
-              <a:defRPr sz="1800">
-                <a:solidFill>
-                  <a:srgbClr val="FFFFFF"/>
-                </a:solidFill>
-                <a:latin typeface="Microsoft JhengHei"/>
-              </a:defRPr>
-            </a:pPr>
-            <a:r>
-              <a:t>在 Obsidian 中使用 `[[連結目標]]` 建立關係</a:t>
+              <a:lnSpc>
+                <a:spcPct val="125000"/>
+              </a:lnSpc>
+              <a:spcAft>
+                <a:spcPts val="600"/>
+              </a:spcAft>
+              <a:defRPr>
+                <a:latin typeface="Microsoft JhengHei"/>
+              </a:defRPr>
+            </a:pPr>
+            <a:r>
+              <a:rPr sz="1800">
+                <a:solidFill>
+                  <a:srgbClr val="1B1B1F"/>
+                </a:solidFill>
+                <a:latin typeface="Microsoft JhengHei"/>
+              </a:rPr>
+              <a:t>在 Obsidian 中使用 </a:t>
+            </a:r>
+            <a:r>
+              <a:rPr sz="1800" b="1">
+                <a:solidFill>
+                  <a:srgbClr val="673AB7"/>
+                </a:solidFill>
+                <a:latin typeface="Consolas"/>
+              </a:rPr>
+              <a:t>[[連結目標]]</a:t>
+            </a:r>
+            <a:r>
+              <a:rPr sz="1800">
+                <a:solidFill>
+                  <a:srgbClr val="1B1B1F"/>
+                </a:solidFill>
+                <a:latin typeface="Microsoft JhengHei"/>
+              </a:rPr>
+              <a:t> 建立關係</a:t>
             </a:r>
           </a:p>
           <a:p>
             <a:pPr lvl="1">
-              <a:spcAft>
-                <a:spcPts val="1000"/>
-              </a:spcAft>
-              <a:defRPr sz="1800">
-                <a:solidFill>
-                  <a:srgbClr val="FFFFFF"/>
-                </a:solidFill>
-                <a:latin typeface="Microsoft JhengHei"/>
-              </a:defRPr>
-            </a:pPr>
-            <a:r>
+              <a:lnSpc>
+                <a:spcPct val="125000"/>
+              </a:lnSpc>
+              <a:spcAft>
+                <a:spcPts val="600"/>
+              </a:spcAft>
+              <a:defRPr>
+                <a:latin typeface="Microsoft JhengHei"/>
+              </a:defRPr>
+            </a:pPr>
+            <a:r>
+              <a:rPr sz="1800">
+                <a:solidFill>
+                  <a:srgbClr val="1B1B1F"/>
+                </a:solidFill>
+                <a:latin typeface="Microsoft JhengHei"/>
+              </a:rPr>
               <a:t>A 連結到 B 時，B 的反向連結 (Backlinks) 會自動提示 A 引用了它</a:t>
             </a:r>
           </a:p>
           <a:p>
             <a:pPr>
-              <a:spcAft>
-                <a:spcPts val="1000"/>
-              </a:spcAft>
-              <a:defRPr sz="2000">
-                <a:solidFill>
-                  <a:srgbClr val="FFFFFF"/>
-                </a:solidFill>
-                <a:latin typeface="Microsoft JhengHei"/>
-              </a:defRPr>
-            </a:pPr>
-            <a:r>
-              <a:t>**先連結，後補內容 (Placeholder Links)**：</a:t>
+              <a:lnSpc>
+                <a:spcPct val="125000"/>
+              </a:lnSpc>
+              <a:spcAft>
+                <a:spcPts val="600"/>
+              </a:spcAft>
+              <a:defRPr>
+                <a:latin typeface="Microsoft JhengHei"/>
+              </a:defRPr>
+            </a:pPr>
+            <a:r>
+              <a:rPr sz="2000" b="1">
+                <a:solidFill>
+                  <a:srgbClr val="1B1B1F"/>
+                </a:solidFill>
+                <a:latin typeface="Microsoft JhengHei"/>
+              </a:rPr>
+              <a:t>先連結，後補內容 (Placeholder Links)</a:t>
+            </a:r>
+            <a:r>
+              <a:rPr sz="2000">
+                <a:solidFill>
+                  <a:srgbClr val="1B1B1F"/>
+                </a:solidFill>
+                <a:latin typeface="Microsoft JhengHei"/>
+              </a:rPr>
+              <a:t>：</a:t>
             </a:r>
           </a:p>
           <a:p>
             <a:pPr lvl="1">
-              <a:spcAft>
-                <a:spcPts val="1000"/>
-              </a:spcAft>
-              <a:defRPr sz="1800">
-                <a:solidFill>
-                  <a:srgbClr val="FFFFFF"/>
-                </a:solidFill>
-                <a:latin typeface="Microsoft JhengHei"/>
-              </a:defRPr>
-            </a:pPr>
-            <a:r>
-              <a:t>當你寫筆記想到新概念但尚未建立該筆記時，先打 `[[新概念]]`</a:t>
+              <a:lnSpc>
+                <a:spcPct val="125000"/>
+              </a:lnSpc>
+              <a:spcAft>
+                <a:spcPts val="600"/>
+              </a:spcAft>
+              <a:defRPr>
+                <a:latin typeface="Microsoft JhengHei"/>
+              </a:defRPr>
+            </a:pPr>
+            <a:r>
+              <a:rPr sz="1800">
+                <a:solidFill>
+                  <a:srgbClr val="1B1B1F"/>
+                </a:solidFill>
+                <a:latin typeface="Microsoft JhengHei"/>
+              </a:rPr>
+              <a:t>當你寫筆記想到新概念但尚未建立該筆記時，先打 </a:t>
+            </a:r>
+            <a:r>
+              <a:rPr sz="1800" b="1">
+                <a:solidFill>
+                  <a:srgbClr val="673AB7"/>
+                </a:solidFill>
+                <a:latin typeface="Consolas"/>
+              </a:rPr>
+              <a:t>[[新概念]]</a:t>
             </a:r>
           </a:p>
           <a:p>
             <a:pPr lvl="1">
-              <a:spcAft>
-                <a:spcPts val="1000"/>
-              </a:spcAft>
-              <a:defRPr sz="1800">
-                <a:solidFill>
-                  <a:srgbClr val="FFFFFF"/>
-                </a:solidFill>
-                <a:latin typeface="Microsoft JhengHei"/>
-              </a:defRPr>
-            </a:pPr>
-            <a:r>
+              <a:lnSpc>
+                <a:spcPct val="125000"/>
+              </a:lnSpc>
+              <a:spcAft>
+                <a:spcPts val="600"/>
+              </a:spcAft>
+              <a:defRPr>
+                <a:latin typeface="Microsoft JhengHei"/>
+              </a:defRPr>
+            </a:pPr>
+            <a:r>
+              <a:rPr sz="1800">
+                <a:solidFill>
+                  <a:srgbClr val="1B1B1F"/>
+                </a:solidFill>
+                <a:latin typeface="Microsoft JhengHei"/>
+              </a:rPr>
               <a:t>系統會呈現虛線連結，讓你不打斷手上的寫作思緒</a:t>
             </a:r>
           </a:p>
           <a:p>
             <a:pPr lvl="1">
-              <a:spcAft>
-                <a:spcPts val="1000"/>
-              </a:spcAft>
-              <a:defRPr sz="1800">
-                <a:solidFill>
-                  <a:srgbClr val="FFFFFF"/>
-                </a:solidFill>
-                <a:latin typeface="Microsoft JhengHei"/>
-              </a:defRPr>
-            </a:pPr>
-            <a:r>
-              <a:t>事後按住 `Ctrl` 點擊虛線，即可瞬間開啟該新筆記補齊內容</a:t>
+              <a:lnSpc>
+                <a:spcPct val="125000"/>
+              </a:lnSpc>
+              <a:spcAft>
+                <a:spcPts val="600"/>
+              </a:spcAft>
+              <a:defRPr>
+                <a:latin typeface="Microsoft JhengHei"/>
+              </a:defRPr>
+            </a:pPr>
+            <a:r>
+              <a:rPr sz="1800">
+                <a:solidFill>
+                  <a:srgbClr val="1B1B1F"/>
+                </a:solidFill>
+                <a:latin typeface="Microsoft JhengHei"/>
+              </a:rPr>
+              <a:t>事後按住 </a:t>
+            </a:r>
+            <a:r>
+              <a:rPr sz="1800" b="1">
+                <a:solidFill>
+                  <a:srgbClr val="673AB7"/>
+                </a:solidFill>
+                <a:latin typeface="Consolas"/>
+              </a:rPr>
+              <a:t>Ctrl</a:t>
+            </a:r>
+            <a:r>
+              <a:rPr sz="1800">
+                <a:solidFill>
+                  <a:srgbClr val="1B1B1F"/>
+                </a:solidFill>
+                <a:latin typeface="Microsoft JhengHei"/>
+              </a:rPr>
+              <a:t> 點擊虛線，即可瞬間開啟該新筆記補齊內容</a:t>
             </a:r>
           </a:p>
         </p:txBody>
@@ -4016,7 +4466,7 @@
     <p:bg>
       <p:bgPr>
         <a:solidFill>
-          <a:srgbClr val="1E1E24"/>
+          <a:srgbClr val="F5F5F7"/>
         </a:solidFill>
         <a:effectLst/>
       </p:bgPr>
@@ -4030,59 +4480,25 @@
       <p:grpSpPr/>
       <p:sp>
         <p:nvSpPr>
-          <p:cNvPr id="2" name="TextBox 1"/>
-          <p:cNvSpPr txBox="1"/>
-          <p:nvPr/>
-        </p:nvSpPr>
-        <p:spPr>
-          <a:xfrm>
-            <a:off x="731520" y="365760"/>
-            <a:ext cx="10725912" cy="731520"/>
-          </a:xfrm>
-          <a:prstGeom prst="rect">
-            <a:avLst/>
-          </a:prstGeom>
-          <a:noFill/>
-        </p:spPr>
-        <p:txBody>
-          <a:bodyPr wrap="square" lIns="0" tIns="0" rIns="0" bIns="0">
-            <a:spAutoFit/>
-          </a:bodyPr>
-          <a:lstStyle/>
-          <a:p>
-            <a:pPr>
-              <a:defRPr sz="3600" b="1">
-                <a:solidFill>
-                  <a:srgbClr val="00E5FF"/>
-                </a:solidFill>
-                <a:latin typeface="Microsoft JhengHei"/>
-              </a:defRPr>
-            </a:pPr>
-            <a:r>
-              <a:t>Zettelkasten 三種卡片類型</a:t>
-            </a:r>
-          </a:p>
-        </p:txBody>
-      </p:sp>
-      <p:sp>
-        <p:nvSpPr>
-          <p:cNvPr id="3" name="Rectangle 2"/>
+          <p:cNvPr id="2" name="Rectangle 1"/>
           <p:cNvSpPr/>
           <p:nvPr/>
         </p:nvSpPr>
         <p:spPr>
           <a:xfrm>
-            <a:off x="731520" y="1371600"/>
-            <a:ext cx="5120640" cy="4754880"/>
+            <a:off x="731520" y="384048"/>
+            <a:ext cx="91440" cy="502920"/>
           </a:xfrm>
           <a:prstGeom prst="rect">
             <a:avLst/>
           </a:prstGeom>
           <a:solidFill>
-            <a:srgbClr val="2D2D35"/>
+            <a:srgbClr val="009688"/>
           </a:solidFill>
           <a:ln>
-            <a:noFill/>
+            <a:solidFill>
+              <a:srgbClr val="009688"/>
+            </a:solidFill>
           </a:ln>
         </p:spPr>
         <p:style>
@@ -4109,14 +4525,14 @@
       </p:sp>
       <p:sp>
         <p:nvSpPr>
-          <p:cNvPr id="4" name="TextBox 3"/>
+          <p:cNvPr id="3" name="TextBox 2"/>
           <p:cNvSpPr txBox="1"/>
           <p:nvPr/>
         </p:nvSpPr>
         <p:spPr>
           <a:xfrm>
-            <a:off x="1005840" y="1554480"/>
-            <a:ext cx="4572000" cy="548640"/>
+            <a:off x="960120" y="320040"/>
+            <a:ext cx="10497312" cy="731520"/>
           </a:xfrm>
           <a:prstGeom prst="rect">
             <a:avLst/>
@@ -4124,163 +4540,46 @@
           <a:noFill/>
         </p:spPr>
         <p:txBody>
-          <a:bodyPr wrap="none">
-            <a:spAutoFit/>
-          </a:bodyPr>
-          <a:lstStyle/>
-          <a:p>
-            <a:pPr>
-              <a:defRPr sz="2200" b="1">
-                <a:solidFill>
-                  <a:srgbClr val="7C4DFF"/>
-                </a:solidFill>
-                <a:latin typeface="Microsoft JhengHei"/>
-              </a:defRPr>
-            </a:pPr>
-            <a:r>
-              <a:t>隨手卡 &amp; 文獻卡</a:t>
-            </a:r>
-          </a:p>
-        </p:txBody>
-      </p:sp>
-      <p:sp>
-        <p:nvSpPr>
-          <p:cNvPr id="5" name="TextBox 4"/>
-          <p:cNvSpPr txBox="1"/>
-          <p:nvPr/>
-        </p:nvSpPr>
-        <p:spPr>
-          <a:xfrm>
-            <a:off x="1005840" y="2194560"/>
-            <a:ext cx="4572000" cy="3657600"/>
-          </a:xfrm>
-          <a:prstGeom prst="rect">
-            <a:avLst/>
-          </a:prstGeom>
-          <a:noFill/>
-        </p:spPr>
-        <p:txBody>
           <a:bodyPr wrap="square" lIns="0" tIns="0" rIns="0" bIns="0">
             <a:spAutoFit/>
           </a:bodyPr>
           <a:lstStyle/>
           <a:p>
             <a:pPr>
-              <a:spcAft>
-                <a:spcPts val="1000"/>
-              </a:spcAft>
-              <a:defRPr sz="1600">
-                <a:solidFill>
-                  <a:srgbClr val="FFFFFF"/>
-                </a:solidFill>
-                <a:latin typeface="Microsoft JhengHei"/>
-              </a:defRPr>
-            </a:pPr>
-            <a:r>
-              <a:t>**靈感卡 (Fleeting Notes)**:</a:t>
-            </a:r>
-          </a:p>
-          <a:p>
-            <a:pPr lvl="1">
-              <a:spcAft>
-                <a:spcPts val="1000"/>
-              </a:spcAft>
-              <a:defRPr sz="1400">
-                <a:solidFill>
-                  <a:srgbClr val="FFFFFF"/>
-                </a:solidFill>
-                <a:latin typeface="Microsoft JhengHei"/>
-              </a:defRPr>
-            </a:pPr>
-            <a:r>
-              <a:t>隨手記下的點子、課堂靈感</a:t>
-            </a:r>
-          </a:p>
-          <a:p>
-            <a:pPr lvl="1">
-              <a:spcAft>
-                <a:spcPts val="1000"/>
-              </a:spcAft>
-              <a:defRPr sz="1400">
-                <a:solidFill>
-                  <a:srgbClr val="FFFFFF"/>
-                </a:solidFill>
-                <a:latin typeface="Microsoft JhengHei"/>
-              </a:defRPr>
-            </a:pPr>
-            <a:r>
-              <a:t>壽命只有 24 小時，必須定期清空或整理</a:t>
-            </a:r>
-          </a:p>
-          <a:p>
-            <a:pPr>
-              <a:spcAft>
-                <a:spcPts val="1000"/>
-              </a:spcAft>
-              <a:defRPr sz="1600">
-                <a:solidFill>
-                  <a:srgbClr val="FFFFFF"/>
-                </a:solidFill>
-                <a:latin typeface="Microsoft JhengHei"/>
-              </a:defRPr>
-            </a:pPr>
-            <a:r>
-              <a:t>**文獻卡 (Literature Notes)**:</a:t>
-            </a:r>
-          </a:p>
-          <a:p>
-            <a:pPr lvl="1">
-              <a:spcAft>
-                <a:spcPts val="1000"/>
-              </a:spcAft>
-              <a:defRPr sz="1400">
-                <a:solidFill>
-                  <a:srgbClr val="FFFFFF"/>
-                </a:solidFill>
-                <a:latin typeface="Microsoft JhengHei"/>
-              </a:defRPr>
-            </a:pPr>
-            <a:r>
-              <a:t>閱讀課本、文章或聽講的摘要</a:t>
-            </a:r>
-          </a:p>
-          <a:p>
-            <a:pPr lvl="1">
-              <a:spcAft>
-                <a:spcPts val="1000"/>
-              </a:spcAft>
-              <a:defRPr sz="1400">
-                <a:solidFill>
-                  <a:srgbClr val="FFFFFF"/>
-                </a:solidFill>
-                <a:latin typeface="Microsoft JhengHei"/>
-              </a:defRPr>
-            </a:pPr>
-            <a:r>
-              <a:t>用自己的話記錄大意，並標明出處來源</a:t>
-            </a:r>
-          </a:p>
-        </p:txBody>
-      </p:sp>
-      <p:sp>
-        <p:nvSpPr>
-          <p:cNvPr id="6" name="Rectangle 5"/>
+              <a:defRPr sz="3600" b="1">
+                <a:solidFill>
+                  <a:srgbClr val="009688"/>
+                </a:solidFill>
+                <a:latin typeface="Microsoft JhengHei"/>
+              </a:defRPr>
+            </a:pPr>
+            <a:r>
+              <a:t>Zettelkasten 三種卡片類型</a:t>
+            </a:r>
+          </a:p>
+        </p:txBody>
+      </p:sp>
+      <p:sp>
+        <p:nvSpPr>
+          <p:cNvPr id="4" name="Rectangle 3"/>
           <p:cNvSpPr/>
           <p:nvPr/>
         </p:nvSpPr>
         <p:spPr>
           <a:xfrm>
-            <a:off x="6217920" y="1371600"/>
-            <a:ext cx="5212080" cy="4754880"/>
+            <a:off x="731520" y="1371600"/>
+            <a:ext cx="5120640" cy="4754880"/>
           </a:xfrm>
           <a:prstGeom prst="rect">
             <a:avLst/>
           </a:prstGeom>
           <a:solidFill>
-            <a:srgbClr val="2D2D35"/>
+            <a:srgbClr val="FFFFFF"/>
           </a:solidFill>
-          <a:ln>
-            <a:noFill/>
+          <a:ln w="19050">
+            <a:solidFill>
+              <a:srgbClr val="DADEE5"/>
+            </a:solidFill>
           </a:ln>
         </p:spPr>
         <p:style>
@@ -4307,14 +4606,14 @@
       </p:sp>
       <p:sp>
         <p:nvSpPr>
-          <p:cNvPr id="7" name="TextBox 6"/>
+          <p:cNvPr id="5" name="TextBox 4"/>
           <p:cNvSpPr txBox="1"/>
           <p:nvPr/>
         </p:nvSpPr>
         <p:spPr>
           <a:xfrm>
-            <a:off x="6492240" y="1554480"/>
-            <a:ext cx="4663440" cy="548640"/>
+            <a:off x="1005840" y="1554480"/>
+            <a:ext cx="4572000" cy="548640"/>
           </a:xfrm>
           <a:prstGeom prst="rect">
             <a:avLst/>
@@ -4330,27 +4629,27 @@
             <a:pPr>
               <a:defRPr sz="2200" b="1">
                 <a:solidFill>
-                  <a:srgbClr val="D1C4E9"/>
-                </a:solidFill>
-                <a:latin typeface="Microsoft JhengHei"/>
-              </a:defRPr>
-            </a:pPr>
-            <a:r>
-              <a:t>永久卡 (Permanent Notes)</a:t>
-            </a:r>
-          </a:p>
-        </p:txBody>
-      </p:sp>
-      <p:sp>
-        <p:nvSpPr>
-          <p:cNvPr id="8" name="TextBox 7"/>
+                  <a:srgbClr val="673AB7"/>
+                </a:solidFill>
+                <a:latin typeface="Microsoft JhengHei"/>
+              </a:defRPr>
+            </a:pPr>
+            <a:r>
+              <a:t>隨手卡 &amp; 文獻卡</a:t>
+            </a:r>
+          </a:p>
+        </p:txBody>
+      </p:sp>
+      <p:sp>
+        <p:nvSpPr>
+          <p:cNvPr id="6" name="TextBox 5"/>
           <p:cNvSpPr txBox="1"/>
           <p:nvPr/>
         </p:nvSpPr>
         <p:spPr>
           <a:xfrm>
-            <a:off x="6492240" y="2194560"/>
-            <a:ext cx="4663440" cy="3657600"/>
+            <a:off x="1005840" y="2194560"/>
+            <a:ext cx="4572000" cy="3657600"/>
           </a:xfrm>
           <a:prstGeom prst="rect">
             <a:avLst/>
@@ -4358,87 +4657,398 @@
           <a:noFill/>
         </p:spPr>
         <p:txBody>
-          <a:bodyPr wrap="square" lIns="0" tIns="0" rIns="0" bIns="0">
+          <a:bodyPr wrap="square" lIns="228600" rIns="228600" tIns="228600" bIns="228600">
             <a:spAutoFit/>
           </a:bodyPr>
           <a:lstStyle/>
           <a:p>
             <a:pPr>
-              <a:spcAft>
-                <a:spcPts val="1000"/>
-              </a:spcAft>
-              <a:defRPr sz="1600">
-                <a:solidFill>
-                  <a:srgbClr val="FFFFFF"/>
-                </a:solidFill>
-                <a:latin typeface="Microsoft JhengHei"/>
-              </a:defRPr>
-            </a:pPr>
-            <a:r>
-              <a:t>**永久卡 (Permanent Notes)**:</a:t>
+              <a:lnSpc>
+                <a:spcPct val="125000"/>
+              </a:lnSpc>
+              <a:spcAft>
+                <a:spcPts val="600"/>
+              </a:spcAft>
+              <a:defRPr>
+                <a:latin typeface="Microsoft JhengHei"/>
+              </a:defRPr>
+            </a:pPr>
+            <a:r>
+              <a:rPr sz="1600" b="1">
+                <a:solidFill>
+                  <a:srgbClr val="1B1B1F"/>
+                </a:solidFill>
+                <a:latin typeface="Microsoft JhengHei"/>
+              </a:rPr>
+              <a:t>靈感卡 (Fleeting Notes)</a:t>
+            </a:r>
+            <a:r>
+              <a:rPr sz="1600">
+                <a:solidFill>
+                  <a:srgbClr val="1B1B1F"/>
+                </a:solidFill>
+                <a:latin typeface="Microsoft JhengHei"/>
+              </a:rPr>
+              <a:t>:</a:t>
             </a:r>
           </a:p>
           <a:p>
             <a:pPr lvl="1">
-              <a:spcAft>
-                <a:spcPts val="1000"/>
-              </a:spcAft>
-              <a:defRPr sz="1400">
-                <a:solidFill>
-                  <a:srgbClr val="FFFFFF"/>
-                </a:solidFill>
-                <a:latin typeface="Microsoft JhengHei"/>
-              </a:defRPr>
-            </a:pPr>
-            <a:r>
+              <a:lnSpc>
+                <a:spcPct val="125000"/>
+              </a:lnSpc>
+              <a:spcAft>
+                <a:spcPts val="600"/>
+              </a:spcAft>
+              <a:defRPr>
+                <a:latin typeface="Microsoft JhengHei"/>
+              </a:defRPr>
+            </a:pPr>
+            <a:r>
+              <a:rPr sz="1400">
+                <a:solidFill>
+                  <a:srgbClr val="1B1B1F"/>
+                </a:solidFill>
+                <a:latin typeface="Microsoft JhengHei"/>
+              </a:rPr>
+              <a:t>隨手記下的點子、課堂靈感</a:t>
+            </a:r>
+          </a:p>
+          <a:p>
+            <a:pPr lvl="1">
+              <a:lnSpc>
+                <a:spcPct val="125000"/>
+              </a:lnSpc>
+              <a:spcAft>
+                <a:spcPts val="600"/>
+              </a:spcAft>
+              <a:defRPr>
+                <a:latin typeface="Microsoft JhengHei"/>
+              </a:defRPr>
+            </a:pPr>
+            <a:r>
+              <a:rPr sz="1400">
+                <a:solidFill>
+                  <a:srgbClr val="1B1B1F"/>
+                </a:solidFill>
+                <a:latin typeface="Microsoft JhengHei"/>
+              </a:rPr>
+              <a:t>壽命只有 24 小時，必須定期清空或整理</a:t>
+            </a:r>
+          </a:p>
+          <a:p>
+            <a:pPr>
+              <a:lnSpc>
+                <a:spcPct val="125000"/>
+              </a:lnSpc>
+              <a:spcAft>
+                <a:spcPts val="600"/>
+              </a:spcAft>
+              <a:defRPr>
+                <a:latin typeface="Microsoft JhengHei"/>
+              </a:defRPr>
+            </a:pPr>
+            <a:r>
+              <a:rPr sz="1600" b="1">
+                <a:solidFill>
+                  <a:srgbClr val="1B1B1F"/>
+                </a:solidFill>
+                <a:latin typeface="Microsoft JhengHei"/>
+              </a:rPr>
+              <a:t>文獻卡 (Literature Notes)</a:t>
+            </a:r>
+            <a:r>
+              <a:rPr sz="1600">
+                <a:solidFill>
+                  <a:srgbClr val="1B1B1F"/>
+                </a:solidFill>
+                <a:latin typeface="Microsoft JhengHei"/>
+              </a:rPr>
+              <a:t>:</a:t>
+            </a:r>
+          </a:p>
+          <a:p>
+            <a:pPr lvl="1">
+              <a:lnSpc>
+                <a:spcPct val="125000"/>
+              </a:lnSpc>
+              <a:spcAft>
+                <a:spcPts val="600"/>
+              </a:spcAft>
+              <a:defRPr>
+                <a:latin typeface="Microsoft JhengHei"/>
+              </a:defRPr>
+            </a:pPr>
+            <a:r>
+              <a:rPr sz="1400">
+                <a:solidFill>
+                  <a:srgbClr val="1B1B1F"/>
+                </a:solidFill>
+                <a:latin typeface="Microsoft JhengHei"/>
+              </a:rPr>
+              <a:t>閱讀課本、文章或聽講的摘要</a:t>
+            </a:r>
+          </a:p>
+          <a:p>
+            <a:pPr lvl="1">
+              <a:lnSpc>
+                <a:spcPct val="125000"/>
+              </a:lnSpc>
+              <a:spcAft>
+                <a:spcPts val="600"/>
+              </a:spcAft>
+              <a:defRPr>
+                <a:latin typeface="Microsoft JhengHei"/>
+              </a:defRPr>
+            </a:pPr>
+            <a:r>
+              <a:rPr sz="1400">
+                <a:solidFill>
+                  <a:srgbClr val="1B1B1F"/>
+                </a:solidFill>
+                <a:latin typeface="Microsoft JhengHei"/>
+              </a:rPr>
+              <a:t>用自己的話記錄大意，並標明出處來源</a:t>
+            </a:r>
+          </a:p>
+        </p:txBody>
+      </p:sp>
+      <p:sp>
+        <p:nvSpPr>
+          <p:cNvPr id="7" name="Rectangle 6"/>
+          <p:cNvSpPr/>
+          <p:nvPr/>
+        </p:nvSpPr>
+        <p:spPr>
+          <a:xfrm>
+            <a:off x="6217920" y="1371600"/>
+            <a:ext cx="5212080" cy="4754880"/>
+          </a:xfrm>
+          <a:prstGeom prst="rect">
+            <a:avLst/>
+          </a:prstGeom>
+          <a:solidFill>
+            <a:srgbClr val="FFFFFF"/>
+          </a:solidFill>
+          <a:ln w="19050">
+            <a:solidFill>
+              <a:srgbClr val="DADEE5"/>
+            </a:solidFill>
+          </a:ln>
+        </p:spPr>
+        <p:style>
+          <a:lnRef idx="1">
+            <a:schemeClr val="accent1"/>
+          </a:lnRef>
+          <a:fillRef idx="3">
+            <a:schemeClr val="accent1"/>
+          </a:fillRef>
+          <a:effectRef idx="2">
+            <a:schemeClr val="accent1"/>
+          </a:effectRef>
+          <a:fontRef idx="minor">
+            <a:schemeClr val="lt1"/>
+          </a:fontRef>
+        </p:style>
+        <p:txBody>
+          <a:bodyPr rtlCol="0" anchor="ctr"/>
+          <a:lstStyle/>
+          <a:p>
+            <a:pPr algn="ctr"/>
+          </a:p>
+        </p:txBody>
+      </p:sp>
+      <p:sp>
+        <p:nvSpPr>
+          <p:cNvPr id="8" name="TextBox 7"/>
+          <p:cNvSpPr txBox="1"/>
+          <p:nvPr/>
+        </p:nvSpPr>
+        <p:spPr>
+          <a:xfrm>
+            <a:off x="6492240" y="1554480"/>
+            <a:ext cx="4663440" cy="548640"/>
+          </a:xfrm>
+          <a:prstGeom prst="rect">
+            <a:avLst/>
+          </a:prstGeom>
+          <a:noFill/>
+        </p:spPr>
+        <p:txBody>
+          <a:bodyPr wrap="none">
+            <a:spAutoFit/>
+          </a:bodyPr>
+          <a:lstStyle/>
+          <a:p>
+            <a:pPr>
+              <a:defRPr sz="2200" b="1">
+                <a:solidFill>
+                  <a:srgbClr val="656575"/>
+                </a:solidFill>
+                <a:latin typeface="Microsoft JhengHei"/>
+              </a:defRPr>
+            </a:pPr>
+            <a:r>
+              <a:t>永久卡 (Permanent Notes)</a:t>
+            </a:r>
+          </a:p>
+        </p:txBody>
+      </p:sp>
+      <p:sp>
+        <p:nvSpPr>
+          <p:cNvPr id="9" name="TextBox 8"/>
+          <p:cNvSpPr txBox="1"/>
+          <p:nvPr/>
+        </p:nvSpPr>
+        <p:spPr>
+          <a:xfrm>
+            <a:off x="6492240" y="2194560"/>
+            <a:ext cx="4663440" cy="3657600"/>
+          </a:xfrm>
+          <a:prstGeom prst="rect">
+            <a:avLst/>
+          </a:prstGeom>
+          <a:noFill/>
+        </p:spPr>
+        <p:txBody>
+          <a:bodyPr wrap="square" lIns="228600" rIns="228600" tIns="228600" bIns="228600">
+            <a:spAutoFit/>
+          </a:bodyPr>
+          <a:lstStyle/>
+          <a:p>
+            <a:pPr>
+              <a:lnSpc>
+                <a:spcPct val="125000"/>
+              </a:lnSpc>
+              <a:spcAft>
+                <a:spcPts val="600"/>
+              </a:spcAft>
+              <a:defRPr>
+                <a:latin typeface="Microsoft JhengHei"/>
+              </a:defRPr>
+            </a:pPr>
+            <a:r>
+              <a:rPr sz="1600" b="1">
+                <a:solidFill>
+                  <a:srgbClr val="1B1B1F"/>
+                </a:solidFill>
+                <a:latin typeface="Microsoft JhengHei"/>
+              </a:rPr>
+              <a:t>永久卡 (Permanent Notes)</a:t>
+            </a:r>
+            <a:r>
+              <a:rPr sz="1600">
+                <a:solidFill>
+                  <a:srgbClr val="1B1B1F"/>
+                </a:solidFill>
+                <a:latin typeface="Microsoft JhengHei"/>
+              </a:rPr>
+              <a:t>:</a:t>
+            </a:r>
+          </a:p>
+          <a:p>
+            <a:pPr lvl="1">
+              <a:lnSpc>
+                <a:spcPct val="125000"/>
+              </a:lnSpc>
+              <a:spcAft>
+                <a:spcPts val="600"/>
+              </a:spcAft>
+              <a:defRPr>
+                <a:latin typeface="Microsoft JhengHei"/>
+              </a:defRPr>
+            </a:pPr>
+            <a:r>
+              <a:rPr sz="1400">
+                <a:solidFill>
+                  <a:srgbClr val="1B1B1F"/>
+                </a:solidFill>
+                <a:latin typeface="Microsoft JhengHei"/>
+              </a:rPr>
               <a:t>經過整理思考後形成的完整觀點</a:t>
             </a:r>
           </a:p>
           <a:p>
             <a:pPr lvl="1">
-              <a:spcAft>
-                <a:spcPts val="1000"/>
-              </a:spcAft>
-              <a:defRPr sz="1400">
-                <a:solidFill>
-                  <a:srgbClr val="FFFFFF"/>
-                </a:solidFill>
-                <a:latin typeface="Microsoft JhengHei"/>
-              </a:defRPr>
-            </a:pPr>
-            <a:r>
+              <a:lnSpc>
+                <a:spcPct val="125000"/>
+              </a:lnSpc>
+              <a:spcAft>
+                <a:spcPts val="600"/>
+              </a:spcAft>
+              <a:defRPr>
+                <a:latin typeface="Microsoft JhengHei"/>
+              </a:defRPr>
+            </a:pPr>
+            <a:r>
+              <a:rPr sz="1400">
+                <a:solidFill>
+                  <a:srgbClr val="1B1B1F"/>
+                </a:solidFill>
+                <a:latin typeface="Microsoft JhengHei"/>
+              </a:rPr>
               <a:t>可以獨立存在，不需依附其他背景資料</a:t>
             </a:r>
           </a:p>
           <a:p>
             <a:pPr lvl="1">
-              <a:spcAft>
-                <a:spcPts val="1000"/>
-              </a:spcAft>
-              <a:defRPr sz="1400">
-                <a:solidFill>
-                  <a:srgbClr val="FFFFFF"/>
-                </a:solidFill>
-                <a:latin typeface="Microsoft JhengHei"/>
-              </a:defRPr>
-            </a:pPr>
-            <a:r>
-              <a:t>內含 `[[雙向連結]]` 與明確的個人思維</a:t>
+              <a:lnSpc>
+                <a:spcPct val="125000"/>
+              </a:lnSpc>
+              <a:spcAft>
+                <a:spcPts val="600"/>
+              </a:spcAft>
+              <a:defRPr>
+                <a:latin typeface="Microsoft JhengHei"/>
+              </a:defRPr>
+            </a:pPr>
+            <a:r>
+              <a:rPr sz="1400">
+                <a:solidFill>
+                  <a:srgbClr val="1B1B1F"/>
+                </a:solidFill>
+                <a:latin typeface="Microsoft JhengHei"/>
+              </a:rPr>
+              <a:t>內含 </a:t>
+            </a:r>
+            <a:r>
+              <a:rPr sz="1400" b="1">
+                <a:solidFill>
+                  <a:srgbClr val="673AB7"/>
+                </a:solidFill>
+                <a:latin typeface="Consolas"/>
+              </a:rPr>
+              <a:t>[[雙向連結]]</a:t>
+            </a:r>
+            <a:r>
+              <a:rPr sz="1400">
+                <a:solidFill>
+                  <a:srgbClr val="1B1B1F"/>
+                </a:solidFill>
+                <a:latin typeface="Microsoft JhengHei"/>
+              </a:rPr>
+              <a:t> 與明確的個人思維</a:t>
             </a:r>
           </a:p>
           <a:p>
             <a:pPr lvl="1">
-              <a:spcAft>
-                <a:spcPts val="1000"/>
-              </a:spcAft>
-              <a:defRPr sz="1400">
-                <a:solidFill>
-                  <a:srgbClr val="FFFFFF"/>
-                </a:solidFill>
-                <a:latin typeface="Microsoft JhengHei"/>
-              </a:defRPr>
-            </a:pPr>
-            <a:r>
+              <a:lnSpc>
+                <a:spcPct val="125000"/>
+              </a:lnSpc>
+              <a:spcAft>
+                <a:spcPts val="600"/>
+              </a:spcAft>
+              <a:defRPr>
+                <a:latin typeface="Microsoft JhengHei"/>
+              </a:defRPr>
+            </a:pPr>
+            <a:r>
+              <a:rPr sz="1400">
+                <a:solidFill>
+                  <a:srgbClr val="1B1B1F"/>
+                </a:solidFill>
+                <a:latin typeface="Microsoft JhengHei"/>
+              </a:rPr>
               <a:t>是您第二大腦知識體系的核心磚瓦</a:t>
             </a:r>
           </a:p>
@@ -4458,7 +5068,7 @@
     <p:bg>
       <p:bgPr>
         <a:solidFill>
-          <a:srgbClr val="7C4DFF"/>
+          <a:srgbClr val="673AB7"/>
         </a:solidFill>
         <a:effectLst/>
       </p:bgPr>
@@ -4498,7 +5108,7 @@
               </a:spcAft>
               <a:defRPr sz="4800" b="1">
                 <a:solidFill>
-                  <a:srgbClr val="FFFFFF"/>
+                  <a:srgbClr val="1B1B1F"/>
                 </a:solidFill>
                 <a:latin typeface="Microsoft JhengHei"/>
               </a:defRPr>
@@ -4511,7 +5121,7 @@
             <a:pPr algn="ctr">
               <a:defRPr sz="2000">
                 <a:solidFill>
-                  <a:srgbClr val="D1C4E9"/>
+                  <a:srgbClr val="656575"/>
                 </a:solidFill>
                 <a:latin typeface="Microsoft JhengHei"/>
               </a:defRPr>
@@ -4536,7 +5146,7 @@
     <p:bg>
       <p:bgPr>
         <a:solidFill>
-          <a:srgbClr val="1E1E24"/>
+          <a:srgbClr val="F5F5F7"/>
         </a:solidFill>
         <a:effectLst/>
       </p:bgPr>
@@ -4550,59 +5160,25 @@
       <p:grpSpPr/>
       <p:sp>
         <p:nvSpPr>
-          <p:cNvPr id="2" name="TextBox 1"/>
-          <p:cNvSpPr txBox="1"/>
-          <p:nvPr/>
-        </p:nvSpPr>
-        <p:spPr>
-          <a:xfrm>
-            <a:off x="731520" y="365760"/>
-            <a:ext cx="10725912" cy="731520"/>
-          </a:xfrm>
-          <a:prstGeom prst="rect">
-            <a:avLst/>
-          </a:prstGeom>
-          <a:noFill/>
-        </p:spPr>
-        <p:txBody>
-          <a:bodyPr wrap="square" lIns="0" tIns="0" rIns="0" bIns="0">
-            <a:spAutoFit/>
-          </a:bodyPr>
-          <a:lstStyle/>
-          <a:p>
-            <a:pPr>
-              <a:defRPr sz="3600" b="1">
-                <a:solidFill>
-                  <a:srgbClr val="00E5FF"/>
-                </a:solidFill>
-                <a:latin typeface="Microsoft JhengHei"/>
-              </a:defRPr>
-            </a:pPr>
-            <a:r>
-              <a:t>P (Projects) 專案與 A (Areas) 領域</a:t>
-            </a:r>
-          </a:p>
-        </p:txBody>
-      </p:sp>
-      <p:sp>
-        <p:nvSpPr>
-          <p:cNvPr id="3" name="Rectangle 2"/>
+          <p:cNvPr id="2" name="Rectangle 1"/>
           <p:cNvSpPr/>
           <p:nvPr/>
         </p:nvSpPr>
         <p:spPr>
           <a:xfrm>
-            <a:off x="731520" y="1371600"/>
-            <a:ext cx="5486400" cy="4754880"/>
+            <a:off x="731520" y="384048"/>
+            <a:ext cx="91440" cy="502920"/>
           </a:xfrm>
           <a:prstGeom prst="rect">
             <a:avLst/>
           </a:prstGeom>
           <a:solidFill>
-            <a:srgbClr val="2D2D35"/>
+            <a:srgbClr val="009688"/>
           </a:solidFill>
           <a:ln>
-            <a:noFill/>
+            <a:solidFill>
+              <a:srgbClr val="009688"/>
+            </a:solidFill>
           </a:ln>
         </p:spPr>
         <p:style>
@@ -4629,14 +5205,14 @@
       </p:sp>
       <p:sp>
         <p:nvSpPr>
-          <p:cNvPr id="4" name="TextBox 3"/>
+          <p:cNvPr id="3" name="TextBox 2"/>
           <p:cNvSpPr txBox="1"/>
           <p:nvPr/>
         </p:nvSpPr>
         <p:spPr>
           <a:xfrm>
-            <a:off x="1005840" y="1645920"/>
-            <a:ext cx="4937760" cy="4206240"/>
+            <a:off x="960120" y="320040"/>
+            <a:ext cx="10497312" cy="731520"/>
           </a:xfrm>
           <a:prstGeom prst="rect">
             <a:avLst/>
@@ -4650,97 +5226,214 @@
           <a:lstStyle/>
           <a:p>
             <a:pPr>
-              <a:spcAft>
-                <a:spcPts val="1000"/>
-              </a:spcAft>
-              <a:defRPr sz="1800">
-                <a:solidFill>
-                  <a:srgbClr val="FFFFFF"/>
-                </a:solidFill>
-                <a:latin typeface="Microsoft JhengHei"/>
-              </a:defRPr>
-            </a:pPr>
-            <a:r>
-              <a:t>**P: Projects (專案)**</a:t>
+              <a:defRPr sz="3600" b="1">
+                <a:solidFill>
+                  <a:srgbClr val="009688"/>
+                </a:solidFill>
+                <a:latin typeface="Microsoft JhengHei"/>
+              </a:defRPr>
+            </a:pPr>
+            <a:r>
+              <a:t>P (Projects) 專案與 A (Areas) 領域</a:t>
+            </a:r>
+          </a:p>
+        </p:txBody>
+      </p:sp>
+      <p:sp>
+        <p:nvSpPr>
+          <p:cNvPr id="4" name="Rectangle 3"/>
+          <p:cNvSpPr/>
+          <p:nvPr/>
+        </p:nvSpPr>
+        <p:spPr>
+          <a:xfrm>
+            <a:off x="731520" y="1371600"/>
+            <a:ext cx="5486400" cy="4754880"/>
+          </a:xfrm>
+          <a:prstGeom prst="rect">
+            <a:avLst/>
+          </a:prstGeom>
+          <a:solidFill>
+            <a:srgbClr val="FFFFFF"/>
+          </a:solidFill>
+          <a:ln w="19050">
+            <a:solidFill>
+              <a:srgbClr val="DADEE5"/>
+            </a:solidFill>
+          </a:ln>
+        </p:spPr>
+        <p:style>
+          <a:lnRef idx="1">
+            <a:schemeClr val="accent1"/>
+          </a:lnRef>
+          <a:fillRef idx="3">
+            <a:schemeClr val="accent1"/>
+          </a:fillRef>
+          <a:effectRef idx="2">
+            <a:schemeClr val="accent1"/>
+          </a:effectRef>
+          <a:fontRef idx="minor">
+            <a:schemeClr val="lt1"/>
+          </a:fontRef>
+        </p:style>
+        <p:txBody>
+          <a:bodyPr rtlCol="0" anchor="ctr"/>
+          <a:lstStyle/>
+          <a:p>
+            <a:pPr algn="ctr"/>
+          </a:p>
+        </p:txBody>
+      </p:sp>
+      <p:sp>
+        <p:nvSpPr>
+          <p:cNvPr id="5" name="TextBox 4"/>
+          <p:cNvSpPr txBox="1"/>
+          <p:nvPr/>
+        </p:nvSpPr>
+        <p:spPr>
+          <a:xfrm>
+            <a:off x="1005840" y="1645920"/>
+            <a:ext cx="4937760" cy="4206240"/>
+          </a:xfrm>
+          <a:prstGeom prst="rect">
+            <a:avLst/>
+          </a:prstGeom>
+          <a:noFill/>
+        </p:spPr>
+        <p:txBody>
+          <a:bodyPr wrap="square" lIns="228600" rIns="228600" tIns="228600" bIns="228600">
+            <a:spAutoFit/>
+          </a:bodyPr>
+          <a:lstStyle/>
+          <a:p>
+            <a:pPr>
+              <a:lnSpc>
+                <a:spcPct val="125000"/>
+              </a:lnSpc>
+              <a:spcAft>
+                <a:spcPts val="600"/>
+              </a:spcAft>
+              <a:defRPr>
+                <a:latin typeface="Microsoft JhengHei"/>
+              </a:defRPr>
+            </a:pPr>
+            <a:r>
+              <a:rPr sz="1800" b="1">
+                <a:solidFill>
+                  <a:srgbClr val="1B1B1F"/>
+                </a:solidFill>
+                <a:latin typeface="Microsoft JhengHei"/>
+              </a:rPr>
+              <a:t>P: Projects (專案)</a:t>
             </a:r>
           </a:p>
           <a:p>
             <a:pPr lvl="1">
-              <a:spcAft>
-                <a:spcPts val="1000"/>
-              </a:spcAft>
-              <a:defRPr sz="1600">
-                <a:solidFill>
-                  <a:srgbClr val="FFFFFF"/>
-                </a:solidFill>
-                <a:latin typeface="Microsoft JhengHei"/>
-              </a:defRPr>
-            </a:pPr>
-            <a:r>
+              <a:lnSpc>
+                <a:spcPct val="125000"/>
+              </a:lnSpc>
+              <a:spcAft>
+                <a:spcPts val="600"/>
+              </a:spcAft>
+              <a:defRPr>
+                <a:latin typeface="Microsoft JhengHei"/>
+              </a:defRPr>
+            </a:pPr>
+            <a:r>
+              <a:rPr sz="1600">
+                <a:solidFill>
+                  <a:srgbClr val="1B1B1F"/>
+                </a:solidFill>
+                <a:latin typeface="Microsoft JhengHei"/>
+              </a:rPr>
               <a:t>有明確目標、具體成果且有截止日期的任務</a:t>
             </a:r>
           </a:p>
           <a:p>
             <a:pPr lvl="1">
-              <a:spcAft>
-                <a:spcPts val="1000"/>
-              </a:spcAft>
-              <a:defRPr sz="1600">
-                <a:solidFill>
-                  <a:srgbClr val="FFFFFF"/>
-                </a:solidFill>
-                <a:latin typeface="Microsoft JhengHei"/>
-              </a:defRPr>
-            </a:pPr>
-            <a:r>
+              <a:lnSpc>
+                <a:spcPct val="125000"/>
+              </a:lnSpc>
+              <a:spcAft>
+                <a:spcPts val="600"/>
+              </a:spcAft>
+              <a:defRPr>
+                <a:latin typeface="Microsoft JhengHei"/>
+              </a:defRPr>
+            </a:pPr>
+            <a:r>
+              <a:rPr sz="1600">
+                <a:solidFill>
+                  <a:srgbClr val="1B1B1F"/>
+                </a:solidFill>
+                <a:latin typeface="Microsoft JhengHei"/>
+              </a:rPr>
               <a:t>學生範例：🎒 歷史期末報告 (12/25交)、學測數學複習進度</a:t>
             </a:r>
           </a:p>
           <a:p>
             <a:pPr>
-              <a:spcAft>
-                <a:spcPts val="1000"/>
-              </a:spcAft>
-              <a:defRPr sz="1800">
-                <a:solidFill>
-                  <a:srgbClr val="FFFFFF"/>
-                </a:solidFill>
-                <a:latin typeface="Microsoft JhengHei"/>
-              </a:defRPr>
-            </a:pPr>
-            <a:r>
-              <a:t>**A: Areas (領域)**</a:t>
+              <a:lnSpc>
+                <a:spcPct val="125000"/>
+              </a:lnSpc>
+              <a:spcAft>
+                <a:spcPts val="600"/>
+              </a:spcAft>
+              <a:defRPr>
+                <a:latin typeface="Microsoft JhengHei"/>
+              </a:defRPr>
+            </a:pPr>
+            <a:r>
+              <a:rPr sz="1800" b="1">
+                <a:solidFill>
+                  <a:srgbClr val="1B1B1F"/>
+                </a:solidFill>
+                <a:latin typeface="Microsoft JhengHei"/>
+              </a:rPr>
+              <a:t>A: Areas (領域)</a:t>
             </a:r>
           </a:p>
           <a:p>
             <a:pPr lvl="1">
-              <a:spcAft>
-                <a:spcPts val="1000"/>
-              </a:spcAft>
-              <a:defRPr sz="1600">
-                <a:solidFill>
-                  <a:srgbClr val="FFFFFF"/>
-                </a:solidFill>
-                <a:latin typeface="Microsoft JhengHei"/>
-              </a:defRPr>
-            </a:pPr>
-            <a:r>
+              <a:lnSpc>
+                <a:spcPct val="125000"/>
+              </a:lnSpc>
+              <a:spcAft>
+                <a:spcPts val="600"/>
+              </a:spcAft>
+              <a:defRPr>
+                <a:latin typeface="Microsoft JhengHei"/>
+              </a:defRPr>
+            </a:pPr>
+            <a:r>
+              <a:rPr sz="1600">
+                <a:solidFill>
+                  <a:srgbClr val="1B1B1F"/>
+                </a:solidFill>
+                <a:latin typeface="Microsoft JhengHei"/>
+              </a:rPr>
               <a:t>需要長期維持、沒有明確截止日期的日常生活領域</a:t>
             </a:r>
           </a:p>
           <a:p>
             <a:pPr lvl="1">
-              <a:spcAft>
-                <a:spcPts val="1000"/>
-              </a:spcAft>
-              <a:defRPr sz="1600">
-                <a:solidFill>
-                  <a:srgbClr val="FFFFFF"/>
-                </a:solidFill>
-                <a:latin typeface="Microsoft JhengHei"/>
-              </a:defRPr>
-            </a:pPr>
-            <a:r>
+              <a:lnSpc>
+                <a:spcPct val="125000"/>
+              </a:lnSpc>
+              <a:spcAft>
+                <a:spcPts val="600"/>
+              </a:spcAft>
+              <a:defRPr>
+                <a:latin typeface="Microsoft JhengHei"/>
+              </a:defRPr>
+            </a:pPr>
+            <a:r>
+              <a:rPr sz="1600">
+                <a:solidFill>
+                  <a:srgbClr val="1B1B1F"/>
+                </a:solidFill>
+                <a:latin typeface="Microsoft JhengHei"/>
+              </a:rPr>
               <a:t>學生範例：📚 數學科學習、🏀 籃球社訓練、❤️ 個人健康</a:t>
             </a:r>
           </a:p>
@@ -4748,7 +5441,7 @@
       </p:sp>
       <p:pic>
         <p:nvPicPr>
-          <p:cNvPr id="5" name="Picture 4" descr="obsidian_para.png"/>
+          <p:cNvPr id="6" name="Picture 5" descr="obsidian_para.png"/>
           <p:cNvPicPr>
             <a:picLocks noChangeAspect="1"/>
           </p:cNvPicPr>
@@ -4784,7 +5477,7 @@
     <p:bg>
       <p:bgPr>
         <a:solidFill>
-          <a:srgbClr val="1E1E24"/>
+          <a:srgbClr val="F5F5F7"/>
         </a:solidFill>
         <a:effectLst/>
       </p:bgPr>
@@ -4798,59 +5491,25 @@
       <p:grpSpPr/>
       <p:sp>
         <p:nvSpPr>
-          <p:cNvPr id="2" name="TextBox 1"/>
-          <p:cNvSpPr txBox="1"/>
-          <p:nvPr/>
-        </p:nvSpPr>
-        <p:spPr>
-          <a:xfrm>
-            <a:off x="731520" y="365760"/>
-            <a:ext cx="10725912" cy="731520"/>
-          </a:xfrm>
-          <a:prstGeom prst="rect">
-            <a:avLst/>
-          </a:prstGeom>
-          <a:noFill/>
-        </p:spPr>
-        <p:txBody>
-          <a:bodyPr wrap="square" lIns="0" tIns="0" rIns="0" bIns="0">
-            <a:spAutoFit/>
-          </a:bodyPr>
-          <a:lstStyle/>
-          <a:p>
-            <a:pPr>
-              <a:defRPr sz="3600" b="1">
-                <a:solidFill>
-                  <a:srgbClr val="00E5FF"/>
-                </a:solidFill>
-                <a:latin typeface="Microsoft JhengHei"/>
-              </a:defRPr>
-            </a:pPr>
-            <a:r>
-              <a:t>R (Resources) 資源與 A (Archives) 封存</a:t>
-            </a:r>
-          </a:p>
-        </p:txBody>
-      </p:sp>
-      <p:sp>
-        <p:nvSpPr>
-          <p:cNvPr id="3" name="Rectangle 2"/>
+          <p:cNvPr id="2" name="Rectangle 1"/>
           <p:cNvSpPr/>
           <p:nvPr/>
         </p:nvSpPr>
         <p:spPr>
           <a:xfrm>
-            <a:off x="731520" y="1371600"/>
-            <a:ext cx="5120640" cy="4754880"/>
+            <a:off x="731520" y="384048"/>
+            <a:ext cx="91440" cy="502920"/>
           </a:xfrm>
           <a:prstGeom prst="rect">
             <a:avLst/>
           </a:prstGeom>
           <a:solidFill>
-            <a:srgbClr val="2D2D35"/>
+            <a:srgbClr val="009688"/>
           </a:solidFill>
           <a:ln>
-            <a:noFill/>
+            <a:solidFill>
+              <a:srgbClr val="009688"/>
+            </a:solidFill>
           </a:ln>
         </p:spPr>
         <p:style>
@@ -4877,14 +5536,14 @@
       </p:sp>
       <p:sp>
         <p:nvSpPr>
-          <p:cNvPr id="4" name="TextBox 3"/>
+          <p:cNvPr id="3" name="TextBox 2"/>
           <p:cNvSpPr txBox="1"/>
           <p:nvPr/>
         </p:nvSpPr>
         <p:spPr>
           <a:xfrm>
-            <a:off x="1005840" y="1554480"/>
-            <a:ext cx="4572000" cy="548640"/>
+            <a:off x="960120" y="320040"/>
+            <a:ext cx="10497312" cy="731520"/>
           </a:xfrm>
           <a:prstGeom prst="rect">
             <a:avLst/>
@@ -4892,163 +5551,46 @@
           <a:noFill/>
         </p:spPr>
         <p:txBody>
-          <a:bodyPr wrap="none">
-            <a:spAutoFit/>
-          </a:bodyPr>
-          <a:lstStyle/>
-          <a:p>
-            <a:pPr>
-              <a:defRPr sz="2200" b="1">
-                <a:solidFill>
-                  <a:srgbClr val="7C4DFF"/>
-                </a:solidFill>
-                <a:latin typeface="Microsoft JhengHei"/>
-              </a:defRPr>
-            </a:pPr>
-            <a:r>
-              <a:t>R: Resources (資源)</a:t>
-            </a:r>
-          </a:p>
-        </p:txBody>
-      </p:sp>
-      <p:sp>
-        <p:nvSpPr>
-          <p:cNvPr id="5" name="TextBox 4"/>
-          <p:cNvSpPr txBox="1"/>
-          <p:nvPr/>
-        </p:nvSpPr>
-        <p:spPr>
-          <a:xfrm>
-            <a:off x="1005840" y="2194560"/>
-            <a:ext cx="4572000" cy="3657600"/>
-          </a:xfrm>
-          <a:prstGeom prst="rect">
-            <a:avLst/>
-          </a:prstGeom>
-          <a:noFill/>
-        </p:spPr>
-        <p:txBody>
           <a:bodyPr wrap="square" lIns="0" tIns="0" rIns="0" bIns="0">
             <a:spAutoFit/>
           </a:bodyPr>
           <a:lstStyle/>
           <a:p>
             <a:pPr>
-              <a:spcAft>
-                <a:spcPts val="1000"/>
-              </a:spcAft>
-              <a:defRPr sz="1600">
-                <a:solidFill>
-                  <a:srgbClr val="FFFFFF"/>
-                </a:solidFill>
-                <a:latin typeface="Microsoft JhengHei"/>
-              </a:defRPr>
-            </a:pPr>
-            <a:r>
-              <a:t>你感興趣、未來可能派上用場的資訊主題</a:t>
-            </a:r>
-          </a:p>
-          <a:p>
-            <a:pPr>
-              <a:spcAft>
-                <a:spcPts val="1000"/>
-              </a:spcAft>
-              <a:defRPr sz="1600">
-                <a:solidFill>
-                  <a:srgbClr val="FFFFFF"/>
-                </a:solidFill>
-                <a:latin typeface="Microsoft JhengHei"/>
-              </a:defRPr>
-            </a:pPr>
-            <a:r>
-              <a:t>沒有時間壓力，是個人專屬的素材資源庫</a:t>
-            </a:r>
-          </a:p>
-          <a:p>
-            <a:pPr>
-              <a:spcAft>
-                <a:spcPts val="1000"/>
-              </a:spcAft>
-              <a:defRPr sz="1600">
-                <a:solidFill>
-                  <a:srgbClr val="FFFFFF"/>
-                </a:solidFill>
-                <a:latin typeface="Microsoft JhengHei"/>
-              </a:defRPr>
-            </a:pPr>
-            <a:r>
-              <a:t>學生範例：</a:t>
-            </a:r>
-          </a:p>
-          <a:p>
-            <a:pPr lvl="1">
-              <a:spcAft>
-                <a:spcPts val="1000"/>
-              </a:spcAft>
-              <a:defRPr sz="1400">
-                <a:solidFill>
-                  <a:srgbClr val="FFFFFF"/>
-                </a:solidFill>
-                <a:latin typeface="Microsoft JhengHei"/>
-              </a:defRPr>
-            </a:pPr>
-            <a:r>
-              <a:t>🎮 遊戲設計學習資料</a:t>
-            </a:r>
-          </a:p>
-          <a:p>
-            <a:pPr lvl="1">
-              <a:spcAft>
-                <a:spcPts val="1000"/>
-              </a:spcAft>
-              <a:defRPr sz="1400">
-                <a:solidFill>
-                  <a:srgbClr val="FFFFFF"/>
-                </a:solidFill>
-                <a:latin typeface="Microsoft JhengHei"/>
-              </a:defRPr>
-            </a:pPr>
-            <a:r>
-              <a:t>🌌 業餘天文學新知</a:t>
-            </a:r>
-          </a:p>
-          <a:p>
-            <a:pPr lvl="1">
-              <a:spcAft>
-                <a:spcPts val="1000"/>
-              </a:spcAft>
-              <a:defRPr sz="1400">
-                <a:solidFill>
-                  <a:srgbClr val="FFFFFF"/>
-                </a:solidFill>
-                <a:latin typeface="Microsoft JhengHei"/>
-              </a:defRPr>
-            </a:pPr>
-            <a:r>
-              <a:t>🎬 推薦閱讀書單與電影清單</a:t>
-            </a:r>
-          </a:p>
-        </p:txBody>
-      </p:sp>
-      <p:sp>
-        <p:nvSpPr>
-          <p:cNvPr id="6" name="Rectangle 5"/>
+              <a:defRPr sz="3600" b="1">
+                <a:solidFill>
+                  <a:srgbClr val="009688"/>
+                </a:solidFill>
+                <a:latin typeface="Microsoft JhengHei"/>
+              </a:defRPr>
+            </a:pPr>
+            <a:r>
+              <a:t>R (Resources) 資源與 A (Archives) 封存</a:t>
+            </a:r>
+          </a:p>
+        </p:txBody>
+      </p:sp>
+      <p:sp>
+        <p:nvSpPr>
+          <p:cNvPr id="4" name="Rectangle 3"/>
           <p:cNvSpPr/>
           <p:nvPr/>
         </p:nvSpPr>
         <p:spPr>
           <a:xfrm>
-            <a:off x="6217920" y="1371600"/>
-            <a:ext cx="5212080" cy="4754880"/>
+            <a:off x="731520" y="1371600"/>
+            <a:ext cx="5120640" cy="4754880"/>
           </a:xfrm>
           <a:prstGeom prst="rect">
             <a:avLst/>
           </a:prstGeom>
           <a:solidFill>
-            <a:srgbClr val="2D2D35"/>
+            <a:srgbClr val="FFFFFF"/>
           </a:solidFill>
-          <a:ln>
-            <a:noFill/>
+          <a:ln w="19050">
+            <a:solidFill>
+              <a:srgbClr val="DADEE5"/>
+            </a:solidFill>
           </a:ln>
         </p:spPr>
         <p:style>
@@ -5075,14 +5617,14 @@
       </p:sp>
       <p:sp>
         <p:nvSpPr>
-          <p:cNvPr id="7" name="TextBox 6"/>
+          <p:cNvPr id="5" name="TextBox 4"/>
           <p:cNvSpPr txBox="1"/>
           <p:nvPr/>
         </p:nvSpPr>
         <p:spPr>
           <a:xfrm>
-            <a:off x="6492240" y="1554480"/>
-            <a:ext cx="4663440" cy="548640"/>
+            <a:off x="1005840" y="1554480"/>
+            <a:ext cx="4572000" cy="548640"/>
           </a:xfrm>
           <a:prstGeom prst="rect">
             <a:avLst/>
@@ -5098,27 +5640,27 @@
             <a:pPr>
               <a:defRPr sz="2200" b="1">
                 <a:solidFill>
-                  <a:srgbClr val="D1C4E9"/>
-                </a:solidFill>
-                <a:latin typeface="Microsoft JhengHei"/>
-              </a:defRPr>
-            </a:pPr>
-            <a:r>
-              <a:t>A: Archives (封存)</a:t>
-            </a:r>
-          </a:p>
-        </p:txBody>
-      </p:sp>
-      <p:sp>
-        <p:nvSpPr>
-          <p:cNvPr id="8" name="TextBox 7"/>
+                  <a:srgbClr val="673AB7"/>
+                </a:solidFill>
+                <a:latin typeface="Microsoft JhengHei"/>
+              </a:defRPr>
+            </a:pPr>
+            <a:r>
+              <a:t>R: Resources (資源)</a:t>
+            </a:r>
+          </a:p>
+        </p:txBody>
+      </p:sp>
+      <p:sp>
+        <p:nvSpPr>
+          <p:cNvPr id="6" name="TextBox 5"/>
           <p:cNvSpPr txBox="1"/>
           <p:nvPr/>
         </p:nvSpPr>
         <p:spPr>
           <a:xfrm>
-            <a:off x="6492240" y="2194560"/>
-            <a:ext cx="4663440" cy="3657600"/>
+            <a:off x="1005840" y="2194560"/>
+            <a:ext cx="4572000" cy="3657600"/>
           </a:xfrm>
           <a:prstGeom prst="rect">
             <a:avLst/>
@@ -5126,103 +5668,375 @@
           <a:noFill/>
         </p:spPr>
         <p:txBody>
-          <a:bodyPr wrap="square" lIns="0" tIns="0" rIns="0" bIns="0">
+          <a:bodyPr wrap="square" lIns="228600" rIns="228600" tIns="228600" bIns="228600">
             <a:spAutoFit/>
           </a:bodyPr>
           <a:lstStyle/>
           <a:p>
             <a:pPr>
-              <a:spcAft>
-                <a:spcPts val="1000"/>
-              </a:spcAft>
-              <a:defRPr sz="1600">
-                <a:solidFill>
-                  <a:srgbClr val="FFFFFF"/>
-                </a:solidFill>
-                <a:latin typeface="Microsoft JhengHei"/>
-              </a:defRPr>
-            </a:pPr>
-            <a:r>
+              <a:lnSpc>
+                <a:spcPct val="125000"/>
+              </a:lnSpc>
+              <a:spcAft>
+                <a:spcPts val="600"/>
+              </a:spcAft>
+              <a:defRPr>
+                <a:latin typeface="Microsoft JhengHei"/>
+              </a:defRPr>
+            </a:pPr>
+            <a:r>
+              <a:rPr sz="1600">
+                <a:solidFill>
+                  <a:srgbClr val="1B1B1F"/>
+                </a:solidFill>
+                <a:latin typeface="Microsoft JhengHei"/>
+              </a:rPr>
+              <a:t>你感興趣、未來可能派上用場的資訊主題</a:t>
+            </a:r>
+          </a:p>
+          <a:p>
+            <a:pPr>
+              <a:lnSpc>
+                <a:spcPct val="125000"/>
+              </a:lnSpc>
+              <a:spcAft>
+                <a:spcPts val="600"/>
+              </a:spcAft>
+              <a:defRPr>
+                <a:latin typeface="Microsoft JhengHei"/>
+              </a:defRPr>
+            </a:pPr>
+            <a:r>
+              <a:rPr sz="1600">
+                <a:solidFill>
+                  <a:srgbClr val="1B1B1F"/>
+                </a:solidFill>
+                <a:latin typeface="Microsoft JhengHei"/>
+              </a:rPr>
+              <a:t>沒有時間壓力，是個人專屬的素材資源庫</a:t>
+            </a:r>
+          </a:p>
+          <a:p>
+            <a:pPr>
+              <a:lnSpc>
+                <a:spcPct val="125000"/>
+              </a:lnSpc>
+              <a:spcAft>
+                <a:spcPts val="600"/>
+              </a:spcAft>
+              <a:defRPr>
+                <a:latin typeface="Microsoft JhengHei"/>
+              </a:defRPr>
+            </a:pPr>
+            <a:r>
+              <a:rPr sz="1600">
+                <a:solidFill>
+                  <a:srgbClr val="1B1B1F"/>
+                </a:solidFill>
+                <a:latin typeface="Microsoft JhengHei"/>
+              </a:rPr>
+              <a:t>學生範例：</a:t>
+            </a:r>
+          </a:p>
+          <a:p>
+            <a:pPr lvl="1">
+              <a:lnSpc>
+                <a:spcPct val="125000"/>
+              </a:lnSpc>
+              <a:spcAft>
+                <a:spcPts val="600"/>
+              </a:spcAft>
+              <a:defRPr>
+                <a:latin typeface="Microsoft JhengHei"/>
+              </a:defRPr>
+            </a:pPr>
+            <a:r>
+              <a:rPr sz="1400">
+                <a:solidFill>
+                  <a:srgbClr val="1B1B1F"/>
+                </a:solidFill>
+                <a:latin typeface="Microsoft JhengHei"/>
+              </a:rPr>
+              <a:t>🎮 遊戲設計學習資料</a:t>
+            </a:r>
+          </a:p>
+          <a:p>
+            <a:pPr lvl="1">
+              <a:lnSpc>
+                <a:spcPct val="125000"/>
+              </a:lnSpc>
+              <a:spcAft>
+                <a:spcPts val="600"/>
+              </a:spcAft>
+              <a:defRPr>
+                <a:latin typeface="Microsoft JhengHei"/>
+              </a:defRPr>
+            </a:pPr>
+            <a:r>
+              <a:rPr sz="1400">
+                <a:solidFill>
+                  <a:srgbClr val="1B1B1F"/>
+                </a:solidFill>
+                <a:latin typeface="Microsoft JhengHei"/>
+              </a:rPr>
+              <a:t>🌌 業餘天文學新知</a:t>
+            </a:r>
+          </a:p>
+          <a:p>
+            <a:pPr lvl="1">
+              <a:lnSpc>
+                <a:spcPct val="125000"/>
+              </a:lnSpc>
+              <a:spcAft>
+                <a:spcPts val="600"/>
+              </a:spcAft>
+              <a:defRPr>
+                <a:latin typeface="Microsoft JhengHei"/>
+              </a:defRPr>
+            </a:pPr>
+            <a:r>
+              <a:rPr sz="1400">
+                <a:solidFill>
+                  <a:srgbClr val="1B1B1F"/>
+                </a:solidFill>
+                <a:latin typeface="Microsoft JhengHei"/>
+              </a:rPr>
+              <a:t>🎬 推薦閱讀書單與電影清單</a:t>
+            </a:r>
+          </a:p>
+        </p:txBody>
+      </p:sp>
+      <p:sp>
+        <p:nvSpPr>
+          <p:cNvPr id="7" name="Rectangle 6"/>
+          <p:cNvSpPr/>
+          <p:nvPr/>
+        </p:nvSpPr>
+        <p:spPr>
+          <a:xfrm>
+            <a:off x="6217920" y="1371600"/>
+            <a:ext cx="5212080" cy="4754880"/>
+          </a:xfrm>
+          <a:prstGeom prst="rect">
+            <a:avLst/>
+          </a:prstGeom>
+          <a:solidFill>
+            <a:srgbClr val="FFFFFF"/>
+          </a:solidFill>
+          <a:ln w="19050">
+            <a:solidFill>
+              <a:srgbClr val="DADEE5"/>
+            </a:solidFill>
+          </a:ln>
+        </p:spPr>
+        <p:style>
+          <a:lnRef idx="1">
+            <a:schemeClr val="accent1"/>
+          </a:lnRef>
+          <a:fillRef idx="3">
+            <a:schemeClr val="accent1"/>
+          </a:fillRef>
+          <a:effectRef idx="2">
+            <a:schemeClr val="accent1"/>
+          </a:effectRef>
+          <a:fontRef idx="minor">
+            <a:schemeClr val="lt1"/>
+          </a:fontRef>
+        </p:style>
+        <p:txBody>
+          <a:bodyPr rtlCol="0" anchor="ctr"/>
+          <a:lstStyle/>
+          <a:p>
+            <a:pPr algn="ctr"/>
+          </a:p>
+        </p:txBody>
+      </p:sp>
+      <p:sp>
+        <p:nvSpPr>
+          <p:cNvPr id="8" name="TextBox 7"/>
+          <p:cNvSpPr txBox="1"/>
+          <p:nvPr/>
+        </p:nvSpPr>
+        <p:spPr>
+          <a:xfrm>
+            <a:off x="6492240" y="1554480"/>
+            <a:ext cx="4663440" cy="548640"/>
+          </a:xfrm>
+          <a:prstGeom prst="rect">
+            <a:avLst/>
+          </a:prstGeom>
+          <a:noFill/>
+        </p:spPr>
+        <p:txBody>
+          <a:bodyPr wrap="none">
+            <a:spAutoFit/>
+          </a:bodyPr>
+          <a:lstStyle/>
+          <a:p>
+            <a:pPr>
+              <a:defRPr sz="2200" b="1">
+                <a:solidFill>
+                  <a:srgbClr val="656575"/>
+                </a:solidFill>
+                <a:latin typeface="Microsoft JhengHei"/>
+              </a:defRPr>
+            </a:pPr>
+            <a:r>
+              <a:t>A: Archives (封存)</a:t>
+            </a:r>
+          </a:p>
+        </p:txBody>
+      </p:sp>
+      <p:sp>
+        <p:nvSpPr>
+          <p:cNvPr id="9" name="TextBox 8"/>
+          <p:cNvSpPr txBox="1"/>
+          <p:nvPr/>
+        </p:nvSpPr>
+        <p:spPr>
+          <a:xfrm>
+            <a:off x="6492240" y="2194560"/>
+            <a:ext cx="4663440" cy="3657600"/>
+          </a:xfrm>
+          <a:prstGeom prst="rect">
+            <a:avLst/>
+          </a:prstGeom>
+          <a:noFill/>
+        </p:spPr>
+        <p:txBody>
+          <a:bodyPr wrap="square" lIns="228600" rIns="228600" tIns="228600" bIns="228600">
+            <a:spAutoFit/>
+          </a:bodyPr>
+          <a:lstStyle/>
+          <a:p>
+            <a:pPr>
+              <a:lnSpc>
+                <a:spcPct val="125000"/>
+              </a:lnSpc>
+              <a:spcAft>
+                <a:spcPts val="600"/>
+              </a:spcAft>
+              <a:defRPr>
+                <a:latin typeface="Microsoft JhengHei"/>
+              </a:defRPr>
+            </a:pPr>
+            <a:r>
+              <a:rPr sz="1600">
+                <a:solidFill>
+                  <a:srgbClr val="1B1B1F"/>
+                </a:solidFill>
+                <a:latin typeface="Microsoft JhengHei"/>
+              </a:rPr>
               <a:t>已經完成、暫停或不再使用但不能刪除的檔案</a:t>
             </a:r>
           </a:p>
           <a:p>
             <a:pPr>
-              <a:spcAft>
-                <a:spcPts val="1000"/>
-              </a:spcAft>
-              <a:defRPr sz="1600">
-                <a:solidFill>
-                  <a:srgbClr val="FFFFFF"/>
-                </a:solidFill>
-                <a:latin typeface="Microsoft JhengHei"/>
-              </a:defRPr>
-            </a:pPr>
-            <a:r>
+              <a:lnSpc>
+                <a:spcPct val="125000"/>
+              </a:lnSpc>
+              <a:spcAft>
+                <a:spcPts val="600"/>
+              </a:spcAft>
+              <a:defRPr>
+                <a:latin typeface="Microsoft JhengHei"/>
+              </a:defRPr>
+            </a:pPr>
+            <a:r>
+              <a:rPr sz="1600">
+                <a:solidFill>
+                  <a:srgbClr val="1B1B1F"/>
+                </a:solidFill>
+                <a:latin typeface="Microsoft JhengHei"/>
+              </a:rPr>
               <a:t>封存是為了保持工作環境的清爽，不代表刪除</a:t>
             </a:r>
           </a:p>
           <a:p>
             <a:pPr>
-              <a:spcAft>
-                <a:spcPts val="1000"/>
-              </a:spcAft>
-              <a:defRPr sz="1600">
-                <a:solidFill>
-                  <a:srgbClr val="FFFFFF"/>
-                </a:solidFill>
-                <a:latin typeface="Microsoft JhengHei"/>
-              </a:defRPr>
-            </a:pPr>
-            <a:r>
+              <a:lnSpc>
+                <a:spcPct val="125000"/>
+              </a:lnSpc>
+              <a:spcAft>
+                <a:spcPts val="600"/>
+              </a:spcAft>
+              <a:defRPr>
+                <a:latin typeface="Microsoft JhengHei"/>
+              </a:defRPr>
+            </a:pPr>
+            <a:r>
+              <a:rPr sz="1600">
+                <a:solidFill>
+                  <a:srgbClr val="1B1B1F"/>
+                </a:solidFill>
+                <a:latin typeface="Microsoft JhengHei"/>
+              </a:rPr>
               <a:t>學生範例：</a:t>
             </a:r>
           </a:p>
           <a:p>
             <a:pPr lvl="1">
-              <a:spcAft>
-                <a:spcPts val="1000"/>
-              </a:spcAft>
-              <a:defRPr sz="1400">
-                <a:solidFill>
-                  <a:srgbClr val="FFFFFF"/>
-                </a:solidFill>
-                <a:latin typeface="Microsoft JhengHei"/>
-              </a:defRPr>
-            </a:pPr>
-            <a:r>
+              <a:lnSpc>
+                <a:spcPct val="125000"/>
+              </a:lnSpc>
+              <a:spcAft>
+                <a:spcPts val="600"/>
+              </a:spcAft>
+              <a:defRPr>
+                <a:latin typeface="Microsoft JhengHei"/>
+              </a:defRPr>
+            </a:pPr>
+            <a:r>
+              <a:rPr sz="1400">
+                <a:solidFill>
+                  <a:srgbClr val="1B1B1F"/>
+                </a:solidFill>
+                <a:latin typeface="Microsoft JhengHei"/>
+              </a:rPr>
               <a:t>✅ 八年級國文科筆記 (已考完)</a:t>
             </a:r>
           </a:p>
           <a:p>
             <a:pPr lvl="1">
-              <a:spcAft>
-                <a:spcPts val="1000"/>
-              </a:spcAft>
-              <a:defRPr sz="1400">
-                <a:solidFill>
-                  <a:srgbClr val="FFFFFF"/>
-                </a:solidFill>
-                <a:latin typeface="Microsoft JhengHei"/>
-              </a:defRPr>
-            </a:pPr>
-            <a:r>
+              <a:lnSpc>
+                <a:spcPct val="125000"/>
+              </a:lnSpc>
+              <a:spcAft>
+                <a:spcPts val="600"/>
+              </a:spcAft>
+              <a:defRPr>
+                <a:latin typeface="Microsoft JhengHei"/>
+              </a:defRPr>
+            </a:pPr>
+            <a:r>
+              <a:rPr sz="1400">
+                <a:solidFill>
+                  <a:srgbClr val="1B1B1F"/>
+                </a:solidFill>
+                <a:latin typeface="Microsoft JhengHei"/>
+              </a:rPr>
               <a:t>⏸️ 暫時中止的社團活動企劃</a:t>
             </a:r>
           </a:p>
           <a:p>
             <a:pPr lvl="1">
-              <a:spcAft>
-                <a:spcPts val="1000"/>
-              </a:spcAft>
-              <a:defRPr sz="1400">
-                <a:solidFill>
-                  <a:srgbClr val="FFFFFF"/>
-                </a:solidFill>
-                <a:latin typeface="Microsoft JhengHei"/>
-              </a:defRPr>
-            </a:pPr>
-            <a:r>
+              <a:lnSpc>
+                <a:spcPct val="125000"/>
+              </a:lnSpc>
+              <a:spcAft>
+                <a:spcPts val="600"/>
+              </a:spcAft>
+              <a:defRPr>
+                <a:latin typeface="Microsoft JhengHei"/>
+              </a:defRPr>
+            </a:pPr>
+            <a:r>
+              <a:rPr sz="1400">
+                <a:solidFill>
+                  <a:srgbClr val="1B1B1F"/>
+                </a:solidFill>
+                <a:latin typeface="Microsoft JhengHei"/>
+              </a:rPr>
               <a:t>📦 過去做完的段考考卷掃描檔</a:t>
             </a:r>
           </a:p>
@@ -5242,7 +6056,7 @@
     <p:bg>
       <p:bgPr>
         <a:solidFill>
-          <a:srgbClr val="7C4DFF"/>
+          <a:srgbClr val="673AB7"/>
         </a:solidFill>
         <a:effectLst/>
       </p:bgPr>
@@ -5282,7 +6096,7 @@
               </a:spcAft>
               <a:defRPr sz="4800" b="1">
                 <a:solidFill>
-                  <a:srgbClr val="FFFFFF"/>
+                  <a:srgbClr val="1B1B1F"/>
                 </a:solidFill>
                 <a:latin typeface="Microsoft JhengHei"/>
               </a:defRPr>
@@ -5295,7 +6109,7 @@
             <a:pPr algn="ctr">
               <a:defRPr sz="2000">
                 <a:solidFill>
-                  <a:srgbClr val="D1C4E9"/>
+                  <a:srgbClr val="656575"/>
                 </a:solidFill>
                 <a:latin typeface="Microsoft JhengHei"/>
               </a:defRPr>
@@ -5320,7 +6134,7 @@
     <p:bg>
       <p:bgPr>
         <a:solidFill>
-          <a:srgbClr val="1E1E24"/>
+          <a:srgbClr val="F5F5F7"/>
         </a:solidFill>
         <a:effectLst/>
       </p:bgPr>
@@ -5334,59 +6148,25 @@
       <p:grpSpPr/>
       <p:sp>
         <p:nvSpPr>
-          <p:cNvPr id="2" name="TextBox 1"/>
-          <p:cNvSpPr txBox="1"/>
-          <p:nvPr/>
-        </p:nvSpPr>
-        <p:spPr>
-          <a:xfrm>
-            <a:off x="731520" y="365760"/>
-            <a:ext cx="10725912" cy="731520"/>
-          </a:xfrm>
-          <a:prstGeom prst="rect">
-            <a:avLst/>
-          </a:prstGeom>
-          <a:noFill/>
-        </p:spPr>
-        <p:txBody>
-          <a:bodyPr wrap="square" lIns="0" tIns="0" rIns="0" bIns="0">
-            <a:spAutoFit/>
-          </a:bodyPr>
-          <a:lstStyle/>
-          <a:p>
-            <a:pPr>
-              <a:defRPr sz="3600" b="1">
-                <a:solidFill>
-                  <a:srgbClr val="00E5FF"/>
-                </a:solidFill>
-                <a:latin typeface="Microsoft JhengHei"/>
-              </a:defRPr>
-            </a:pPr>
-            <a:r>
-              <a:t>MOC：解決蜘蛛網混亂的地圖</a:t>
-            </a:r>
-          </a:p>
-        </p:txBody>
-      </p:sp>
-      <p:sp>
-        <p:nvSpPr>
-          <p:cNvPr id="3" name="Rectangle 2"/>
+          <p:cNvPr id="2" name="Rectangle 1"/>
           <p:cNvSpPr/>
           <p:nvPr/>
         </p:nvSpPr>
         <p:spPr>
           <a:xfrm>
-            <a:off x="731520" y="1371600"/>
-            <a:ext cx="5486400" cy="4754880"/>
+            <a:off x="731520" y="384048"/>
+            <a:ext cx="91440" cy="502920"/>
           </a:xfrm>
           <a:prstGeom prst="rect">
             <a:avLst/>
           </a:prstGeom>
           <a:solidFill>
-            <a:srgbClr val="2D2D35"/>
+            <a:srgbClr val="009688"/>
           </a:solidFill>
           <a:ln>
-            <a:noFill/>
+            <a:solidFill>
+              <a:srgbClr val="009688"/>
+            </a:solidFill>
           </a:ln>
         </p:spPr>
         <p:style>
@@ -5413,14 +6193,14 @@
       </p:sp>
       <p:sp>
         <p:nvSpPr>
-          <p:cNvPr id="4" name="TextBox 3"/>
+          <p:cNvPr id="3" name="TextBox 2"/>
           <p:cNvSpPr txBox="1"/>
           <p:nvPr/>
         </p:nvSpPr>
         <p:spPr>
           <a:xfrm>
-            <a:off x="1005840" y="1645920"/>
-            <a:ext cx="4937760" cy="4206240"/>
+            <a:off x="960120" y="320040"/>
+            <a:ext cx="10497312" cy="731520"/>
           </a:xfrm>
           <a:prstGeom prst="rect">
             <a:avLst/>
@@ -5434,81 +6214,192 @@
           <a:lstStyle/>
           <a:p>
             <a:pPr>
-              <a:spcAft>
-                <a:spcPts val="1000"/>
-              </a:spcAft>
-              <a:defRPr sz="1800">
-                <a:solidFill>
-                  <a:srgbClr val="FFFFFF"/>
-                </a:solidFill>
-                <a:latin typeface="Microsoft JhengHei"/>
-              </a:defRPr>
-            </a:pPr>
-            <a:r>
-              <a:t>**什麼是 MOC (Map of Content)？**</a:t>
+              <a:defRPr sz="3600" b="1">
+                <a:solidFill>
+                  <a:srgbClr val="009688"/>
+                </a:solidFill>
+                <a:latin typeface="Microsoft JhengHei"/>
+              </a:defRPr>
+            </a:pPr>
+            <a:r>
+              <a:t>MOC：解決蜘蛛網混亂的地圖</a:t>
+            </a:r>
+          </a:p>
+        </p:txBody>
+      </p:sp>
+      <p:sp>
+        <p:nvSpPr>
+          <p:cNvPr id="4" name="Rectangle 3"/>
+          <p:cNvSpPr/>
+          <p:nvPr/>
+        </p:nvSpPr>
+        <p:spPr>
+          <a:xfrm>
+            <a:off x="731520" y="1371600"/>
+            <a:ext cx="5486400" cy="4754880"/>
+          </a:xfrm>
+          <a:prstGeom prst="rect">
+            <a:avLst/>
+          </a:prstGeom>
+          <a:solidFill>
+            <a:srgbClr val="FFFFFF"/>
+          </a:solidFill>
+          <a:ln w="19050">
+            <a:solidFill>
+              <a:srgbClr val="DADEE5"/>
+            </a:solidFill>
+          </a:ln>
+        </p:spPr>
+        <p:style>
+          <a:lnRef idx="1">
+            <a:schemeClr val="accent1"/>
+          </a:lnRef>
+          <a:fillRef idx="3">
+            <a:schemeClr val="accent1"/>
+          </a:fillRef>
+          <a:effectRef idx="2">
+            <a:schemeClr val="accent1"/>
+          </a:effectRef>
+          <a:fontRef idx="minor">
+            <a:schemeClr val="lt1"/>
+          </a:fontRef>
+        </p:style>
+        <p:txBody>
+          <a:bodyPr rtlCol="0" anchor="ctr"/>
+          <a:lstStyle/>
+          <a:p>
+            <a:pPr algn="ctr"/>
+          </a:p>
+        </p:txBody>
+      </p:sp>
+      <p:sp>
+        <p:nvSpPr>
+          <p:cNvPr id="5" name="TextBox 4"/>
+          <p:cNvSpPr txBox="1"/>
+          <p:nvPr/>
+        </p:nvSpPr>
+        <p:spPr>
+          <a:xfrm>
+            <a:off x="1005840" y="1645920"/>
+            <a:ext cx="4937760" cy="4206240"/>
+          </a:xfrm>
+          <a:prstGeom prst="rect">
+            <a:avLst/>
+          </a:prstGeom>
+          <a:noFill/>
+        </p:spPr>
+        <p:txBody>
+          <a:bodyPr wrap="square" lIns="228600" rIns="228600" tIns="228600" bIns="228600">
+            <a:spAutoFit/>
+          </a:bodyPr>
+          <a:lstStyle/>
+          <a:p>
+            <a:pPr>
+              <a:lnSpc>
+                <a:spcPct val="125000"/>
+              </a:lnSpc>
+              <a:spcAft>
+                <a:spcPts val="600"/>
+              </a:spcAft>
+              <a:defRPr>
+                <a:latin typeface="Microsoft JhengHei"/>
+              </a:defRPr>
+            </a:pPr>
+            <a:r>
+              <a:rPr sz="1800" b="1">
+                <a:solidFill>
+                  <a:srgbClr val="1B1B1F"/>
+                </a:solidFill>
+                <a:latin typeface="Microsoft JhengHei"/>
+              </a:rPr>
+              <a:t>什麼是 MOC (Map of Content)？</a:t>
             </a:r>
           </a:p>
           <a:p>
             <a:pPr lvl="1">
-              <a:spcAft>
-                <a:spcPts val="1000"/>
-              </a:spcAft>
-              <a:defRPr sz="1600">
-                <a:solidFill>
-                  <a:srgbClr val="FFFFFF"/>
-                </a:solidFill>
-                <a:latin typeface="Microsoft JhengHei"/>
-              </a:defRPr>
-            </a:pPr>
-            <a:r>
+              <a:lnSpc>
+                <a:spcPct val="125000"/>
+              </a:lnSpc>
+              <a:spcAft>
+                <a:spcPts val="600"/>
+              </a:spcAft>
+              <a:defRPr>
+                <a:latin typeface="Microsoft JhengHei"/>
+              </a:defRPr>
+            </a:pPr>
+            <a:r>
+              <a:rPr sz="1600">
+                <a:solidFill>
+                  <a:srgbClr val="1B1B1F"/>
+                </a:solidFill>
+                <a:latin typeface="Microsoft JhengHei"/>
+              </a:rPr>
               <a:t>當筆記累積到 200 篇以上，關係圖 (Graph) 會變成混亂的蜘蛛網</a:t>
             </a:r>
           </a:p>
           <a:p>
             <a:pPr lvl="1">
-              <a:spcAft>
-                <a:spcPts val="1000"/>
-              </a:spcAft>
-              <a:defRPr sz="1600">
-                <a:solidFill>
-                  <a:srgbClr val="FFFFFF"/>
-                </a:solidFill>
-                <a:latin typeface="Microsoft JhengHei"/>
-              </a:defRPr>
-            </a:pPr>
-            <a:r>
+              <a:lnSpc>
+                <a:spcPct val="125000"/>
+              </a:lnSpc>
+              <a:spcAft>
+                <a:spcPts val="600"/>
+              </a:spcAft>
+              <a:defRPr>
+                <a:latin typeface="Microsoft JhengHei"/>
+              </a:defRPr>
+            </a:pPr>
+            <a:r>
+              <a:rPr sz="1600">
+                <a:solidFill>
+                  <a:srgbClr val="1B1B1F"/>
+                </a:solidFill>
+                <a:latin typeface="Microsoft JhengHei"/>
+              </a:rPr>
               <a:t>MOC 是一張「地圖筆記」，專門用來整理、導覽某個主題的相關連結</a:t>
             </a:r>
           </a:p>
           <a:p>
             <a:pPr lvl="1">
-              <a:spcAft>
-                <a:spcPts val="1000"/>
-              </a:spcAft>
-              <a:defRPr sz="1600">
-                <a:solidFill>
-                  <a:srgbClr val="FFFFFF"/>
-                </a:solidFill>
-                <a:latin typeface="Microsoft JhengHei"/>
-              </a:defRPr>
-            </a:pPr>
-            <a:r>
+              <a:lnSpc>
+                <a:spcPct val="125000"/>
+              </a:lnSpc>
+              <a:spcAft>
+                <a:spcPts val="600"/>
+              </a:spcAft>
+              <a:defRPr>
+                <a:latin typeface="Microsoft JhengHei"/>
+              </a:defRPr>
+            </a:pPr>
+            <a:r>
+              <a:rPr sz="1600">
+                <a:solidFill>
+                  <a:srgbClr val="1B1B1F"/>
+                </a:solidFill>
+                <a:latin typeface="Microsoft JhengHei"/>
+              </a:rPr>
               <a:t>就像一本書的「目錄」，能幫助你重新整理知識結構</a:t>
             </a:r>
           </a:p>
           <a:p>
             <a:pPr lvl="1">
-              <a:spcAft>
-                <a:spcPts val="1000"/>
-              </a:spcAft>
-              <a:defRPr sz="1600">
-                <a:solidFill>
-                  <a:srgbClr val="FFFFFF"/>
-                </a:solidFill>
-                <a:latin typeface="Microsoft JhengHei"/>
-              </a:defRPr>
-            </a:pPr>
-            <a:r>
+              <a:lnSpc>
+                <a:spcPct val="125000"/>
+              </a:lnSpc>
+              <a:spcAft>
+                <a:spcPts val="600"/>
+              </a:spcAft>
+              <a:defRPr>
+                <a:latin typeface="Microsoft JhengHei"/>
+              </a:defRPr>
+            </a:pPr>
+            <a:r>
+              <a:rPr sz="1600">
+                <a:solidFill>
+                  <a:srgbClr val="1B1B1F"/>
+                </a:solidFill>
+                <a:latin typeface="Microsoft JhengHei"/>
+              </a:rPr>
               <a:t>例如建立「數學 MOC」，內含「代數」、「幾何」等子筆記連結</a:t>
             </a:r>
           </a:p>
@@ -5516,7 +6407,7 @@
       </p:sp>
       <p:pic>
         <p:nvPicPr>
-          <p:cNvPr id="5" name="Picture 4" descr="obsidian_moc.png"/>
+          <p:cNvPr id="6" name="Picture 5" descr="obsidian_moc.png"/>
           <p:cNvPicPr>
             <a:picLocks noChangeAspect="1"/>
           </p:cNvPicPr>
@@ -5552,7 +6443,7 @@
     <p:bg>
       <p:bgPr>
         <a:solidFill>
-          <a:srgbClr val="1E1E24"/>
+          <a:srgbClr val="F5F5F7"/>
         </a:solidFill>
         <a:effectLst/>
       </p:bgPr>
@@ -5566,59 +6457,25 @@
       <p:grpSpPr/>
       <p:sp>
         <p:nvSpPr>
-          <p:cNvPr id="2" name="TextBox 1"/>
-          <p:cNvSpPr txBox="1"/>
-          <p:nvPr/>
-        </p:nvSpPr>
-        <p:spPr>
-          <a:xfrm>
-            <a:off x="731520" y="365760"/>
-            <a:ext cx="10725912" cy="731520"/>
-          </a:xfrm>
-          <a:prstGeom prst="rect">
-            <a:avLst/>
-          </a:prstGeom>
-          <a:noFill/>
-        </p:spPr>
-        <p:txBody>
-          <a:bodyPr wrap="square" lIns="0" tIns="0" rIns="0" bIns="0">
-            <a:spAutoFit/>
-          </a:bodyPr>
-          <a:lstStyle/>
-          <a:p>
-            <a:pPr>
-              <a:defRPr sz="3600" b="1">
-                <a:solidFill>
-                  <a:srgbClr val="00E5FF"/>
-                </a:solidFill>
-                <a:latin typeface="Microsoft JhengHei"/>
-              </a:defRPr>
-            </a:pPr>
-            <a:r>
-              <a:t>你的大腦不是硬碟</a:t>
-            </a:r>
-          </a:p>
-        </p:txBody>
-      </p:sp>
-      <p:sp>
-        <p:nvSpPr>
-          <p:cNvPr id="3" name="Rectangle 2"/>
+          <p:cNvPr id="2" name="Rectangle 1"/>
           <p:cNvSpPr/>
           <p:nvPr/>
         </p:nvSpPr>
         <p:spPr>
           <a:xfrm>
-            <a:off x="731520" y="1371600"/>
-            <a:ext cx="10725912" cy="4754880"/>
+            <a:off x="731520" y="384048"/>
+            <a:ext cx="91440" cy="502920"/>
           </a:xfrm>
           <a:prstGeom prst="rect">
             <a:avLst/>
           </a:prstGeom>
           <a:solidFill>
-            <a:srgbClr val="2D2D35"/>
+            <a:srgbClr val="009688"/>
           </a:solidFill>
           <a:ln>
-            <a:noFill/>
+            <a:solidFill>
+              <a:srgbClr val="009688"/>
+            </a:solidFill>
           </a:ln>
         </p:spPr>
         <p:style>
@@ -5645,14 +6502,14 @@
       </p:sp>
       <p:sp>
         <p:nvSpPr>
-          <p:cNvPr id="4" name="TextBox 3"/>
+          <p:cNvPr id="3" name="TextBox 2"/>
           <p:cNvSpPr txBox="1"/>
           <p:nvPr/>
         </p:nvSpPr>
         <p:spPr>
           <a:xfrm>
-            <a:off x="1097280" y="1645920"/>
-            <a:ext cx="9994392" cy="4206240"/>
+            <a:off x="960120" y="320040"/>
+            <a:ext cx="10497312" cy="731520"/>
           </a:xfrm>
           <a:prstGeom prst="rect">
             <a:avLst/>
@@ -5666,65 +6523,170 @@
           <a:lstStyle/>
           <a:p>
             <a:pPr>
-              <a:spcAft>
-                <a:spcPts val="1000"/>
-              </a:spcAft>
-              <a:defRPr sz="2000">
-                <a:solidFill>
-                  <a:srgbClr val="FFFFFF"/>
-                </a:solidFill>
-                <a:latin typeface="Microsoft JhengHei"/>
-              </a:defRPr>
-            </a:pPr>
-            <a:r>
+              <a:defRPr sz="3600" b="1">
+                <a:solidFill>
+                  <a:srgbClr val="009688"/>
+                </a:solidFill>
+                <a:latin typeface="Microsoft JhengHei"/>
+              </a:defRPr>
+            </a:pPr>
+            <a:r>
+              <a:t>你的大腦不是硬碟</a:t>
+            </a:r>
+          </a:p>
+        </p:txBody>
+      </p:sp>
+      <p:sp>
+        <p:nvSpPr>
+          <p:cNvPr id="4" name="Rectangle 3"/>
+          <p:cNvSpPr/>
+          <p:nvPr/>
+        </p:nvSpPr>
+        <p:spPr>
+          <a:xfrm>
+            <a:off x="731520" y="1371600"/>
+            <a:ext cx="10725912" cy="4754880"/>
+          </a:xfrm>
+          <a:prstGeom prst="rect">
+            <a:avLst/>
+          </a:prstGeom>
+          <a:solidFill>
+            <a:srgbClr val="FFFFFF"/>
+          </a:solidFill>
+          <a:ln w="19050">
+            <a:solidFill>
+              <a:srgbClr val="DADEE5"/>
+            </a:solidFill>
+          </a:ln>
+        </p:spPr>
+        <p:style>
+          <a:lnRef idx="1">
+            <a:schemeClr val="accent1"/>
+          </a:lnRef>
+          <a:fillRef idx="3">
+            <a:schemeClr val="accent1"/>
+          </a:fillRef>
+          <a:effectRef idx="2">
+            <a:schemeClr val="accent1"/>
+          </a:effectRef>
+          <a:fontRef idx="minor">
+            <a:schemeClr val="lt1"/>
+          </a:fontRef>
+        </p:style>
+        <p:txBody>
+          <a:bodyPr rtlCol="0" anchor="ctr"/>
+          <a:lstStyle/>
+          <a:p>
+            <a:pPr algn="ctr"/>
+          </a:p>
+        </p:txBody>
+      </p:sp>
+      <p:sp>
+        <p:nvSpPr>
+          <p:cNvPr id="5" name="TextBox 4"/>
+          <p:cNvSpPr txBox="1"/>
+          <p:nvPr/>
+        </p:nvSpPr>
+        <p:spPr>
+          <a:xfrm>
+            <a:off x="1097280" y="1645920"/>
+            <a:ext cx="9994392" cy="4206240"/>
+          </a:xfrm>
+          <a:prstGeom prst="rect">
+            <a:avLst/>
+          </a:prstGeom>
+          <a:noFill/>
+        </p:spPr>
+        <p:txBody>
+          <a:bodyPr wrap="square" lIns="228600" rIns="228600" tIns="228600" bIns="228600">
+            <a:spAutoFit/>
+          </a:bodyPr>
+          <a:lstStyle/>
+          <a:p>
+            <a:pPr>
+              <a:lnSpc>
+                <a:spcPct val="125000"/>
+              </a:lnSpc>
+              <a:spcAft>
+                <a:spcPts val="600"/>
+              </a:spcAft>
+              <a:defRPr>
+                <a:latin typeface="Microsoft JhengHei"/>
+              </a:defRPr>
+            </a:pPr>
+            <a:r>
+              <a:rPr sz="2000">
+                <a:solidFill>
+                  <a:srgbClr val="1B1B1F"/>
+                </a:solidFill>
+                <a:latin typeface="Microsoft JhengHei"/>
+              </a:rPr>
               <a:t>大腦擅長「思考與聯想」，不擅長「記憶細節」</a:t>
             </a:r>
           </a:p>
           <a:p>
             <a:pPr>
-              <a:spcAft>
-                <a:spcPts val="1000"/>
-              </a:spcAft>
-              <a:defRPr sz="2000">
-                <a:solidFill>
-                  <a:srgbClr val="FFFFFF"/>
-                </a:solidFill>
-                <a:latin typeface="Microsoft JhengHei"/>
-              </a:defRPr>
-            </a:pPr>
-            <a:r>
+              <a:lnSpc>
+                <a:spcPct val="125000"/>
+              </a:lnSpc>
+              <a:spcAft>
+                <a:spcPts val="600"/>
+              </a:spcAft>
+              <a:defRPr>
+                <a:latin typeface="Microsoft JhengHei"/>
+              </a:defRPr>
+            </a:pPr>
+            <a:r>
+              <a:rPr sz="2000">
+                <a:solidFill>
+                  <a:srgbClr val="1B1B1F"/>
+                </a:solidFill>
+                <a:latin typeface="Microsoft JhengHei"/>
+              </a:rPr>
               <a:t>人腦就像記憶體 (RAM) — 容量有限，斷電就忘，且受遺忘曲線影響</a:t>
             </a:r>
           </a:p>
           <a:p>
             <a:pPr>
-              <a:spcAft>
-                <a:spcPts val="1000"/>
-              </a:spcAft>
-              <a:defRPr sz="2000">
-                <a:solidFill>
-                  <a:srgbClr val="FFFFFF"/>
-                </a:solidFill>
-                <a:latin typeface="Microsoft JhengHei"/>
-              </a:defRPr>
-            </a:pPr>
-            <a:r>
+              <a:lnSpc>
+                <a:spcPct val="125000"/>
+              </a:lnSpc>
+              <a:spcAft>
+                <a:spcPts val="600"/>
+              </a:spcAft>
+              <a:defRPr>
+                <a:latin typeface="Microsoft JhengHei"/>
+              </a:defRPr>
+            </a:pPr>
+            <a:r>
+              <a:rPr sz="2000">
+                <a:solidFill>
+                  <a:srgbClr val="1B1B1F"/>
+                </a:solidFill>
+                <a:latin typeface="Microsoft JhengHei"/>
+              </a:rPr>
               <a:t>與其拼命死記硬背，不如建立穩健的「外部系統」</a:t>
             </a:r>
           </a:p>
           <a:p>
             <a:pPr>
-              <a:spcAft>
-                <a:spcPts val="1000"/>
-              </a:spcAft>
-              <a:defRPr sz="2000">
-                <a:solidFill>
-                  <a:srgbClr val="FFFFFF"/>
-                </a:solidFill>
-                <a:latin typeface="Microsoft JhengHei"/>
-              </a:defRPr>
-            </a:pPr>
-            <a:r>
+              <a:lnSpc>
+                <a:spcPct val="125000"/>
+              </a:lnSpc>
+              <a:spcAft>
+                <a:spcPts val="600"/>
+              </a:spcAft>
+              <a:defRPr>
+                <a:latin typeface="Microsoft JhengHei"/>
+              </a:defRPr>
+            </a:pPr>
+            <a:r>
+              <a:rPr sz="2000">
+                <a:solidFill>
+                  <a:srgbClr val="1B1B1F"/>
+                </a:solidFill>
+                <a:latin typeface="Microsoft JhengHei"/>
+              </a:rPr>
               <a:t>建立第二大腦，能有效減輕腦部負擔，釋放深度思考的創造力</a:t>
             </a:r>
           </a:p>
@@ -5744,7 +6706,7 @@
     <p:bg>
       <p:bgPr>
         <a:solidFill>
-          <a:srgbClr val="1E1E24"/>
+          <a:srgbClr val="F5F5F7"/>
         </a:solidFill>
         <a:effectLst/>
       </p:bgPr>
@@ -5758,59 +6720,25 @@
       <p:grpSpPr/>
       <p:sp>
         <p:nvSpPr>
-          <p:cNvPr id="2" name="TextBox 1"/>
-          <p:cNvSpPr txBox="1"/>
-          <p:nvPr/>
-        </p:nvSpPr>
-        <p:spPr>
-          <a:xfrm>
-            <a:off x="731520" y="365760"/>
-            <a:ext cx="10725912" cy="731520"/>
-          </a:xfrm>
-          <a:prstGeom prst="rect">
-            <a:avLst/>
-          </a:prstGeom>
-          <a:noFill/>
-        </p:spPr>
-        <p:txBody>
-          <a:bodyPr wrap="square" lIns="0" tIns="0" rIns="0" bIns="0">
-            <a:spAutoFit/>
-          </a:bodyPr>
-          <a:lstStyle/>
-          <a:p>
-            <a:pPr>
-              <a:defRPr sz="3600" b="1">
-                <a:solidFill>
-                  <a:srgbClr val="00E5FF"/>
-                </a:solidFill>
-                <a:latin typeface="Microsoft JhengHei"/>
-              </a:defRPr>
-            </a:pPr>
-            <a:r>
-              <a:t>實作 MOC 的五個步驟</a:t>
-            </a:r>
-          </a:p>
-        </p:txBody>
-      </p:sp>
-      <p:sp>
-        <p:nvSpPr>
-          <p:cNvPr id="3" name="Rectangle 2"/>
+          <p:cNvPr id="2" name="Rectangle 1"/>
           <p:cNvSpPr/>
           <p:nvPr/>
         </p:nvSpPr>
         <p:spPr>
           <a:xfrm>
-            <a:off x="731520" y="1371600"/>
-            <a:ext cx="10725912" cy="4754880"/>
+            <a:off x="731520" y="384048"/>
+            <a:ext cx="91440" cy="502920"/>
           </a:xfrm>
           <a:prstGeom prst="rect">
             <a:avLst/>
           </a:prstGeom>
           <a:solidFill>
-            <a:srgbClr val="2D2D35"/>
+            <a:srgbClr val="009688"/>
           </a:solidFill>
           <a:ln>
-            <a:noFill/>
+            <a:solidFill>
+              <a:srgbClr val="009688"/>
+            </a:solidFill>
           </a:ln>
         </p:spPr>
         <p:style>
@@ -5837,14 +6765,14 @@
       </p:sp>
       <p:sp>
         <p:nvSpPr>
-          <p:cNvPr id="4" name="TextBox 3"/>
+          <p:cNvPr id="3" name="TextBox 2"/>
           <p:cNvSpPr txBox="1"/>
           <p:nvPr/>
         </p:nvSpPr>
         <p:spPr>
           <a:xfrm>
-            <a:off x="1097280" y="1645920"/>
-            <a:ext cx="9994392" cy="4206240"/>
+            <a:off x="960120" y="320040"/>
+            <a:ext cx="10497312" cy="731520"/>
           </a:xfrm>
           <a:prstGeom prst="rect">
             <a:avLst/>
@@ -5858,98 +6786,314 @@
           <a:lstStyle/>
           <a:p>
             <a:pPr>
-              <a:spcAft>
-                <a:spcPts val="1000"/>
-              </a:spcAft>
-              <a:defRPr sz="2000">
-                <a:solidFill>
-                  <a:srgbClr val="FFFFFF"/>
-                </a:solidFill>
-                <a:latin typeface="Microsoft JhengHei"/>
-              </a:defRPr>
-            </a:pPr>
-            <a:r>
+              <a:defRPr sz="3600" b="1">
+                <a:solidFill>
+                  <a:srgbClr val="009688"/>
+                </a:solidFill>
+                <a:latin typeface="Microsoft JhengHei"/>
+              </a:defRPr>
+            </a:pPr>
+            <a:r>
+              <a:t>實作 MOC 的五個步驟</a:t>
+            </a:r>
+          </a:p>
+        </p:txBody>
+      </p:sp>
+      <p:sp>
+        <p:nvSpPr>
+          <p:cNvPr id="4" name="Rectangle 3"/>
+          <p:cNvSpPr/>
+          <p:nvPr/>
+        </p:nvSpPr>
+        <p:spPr>
+          <a:xfrm>
+            <a:off x="731520" y="1371600"/>
+            <a:ext cx="10725912" cy="4754880"/>
+          </a:xfrm>
+          <a:prstGeom prst="rect">
+            <a:avLst/>
+          </a:prstGeom>
+          <a:solidFill>
+            <a:srgbClr val="FFFFFF"/>
+          </a:solidFill>
+          <a:ln w="19050">
+            <a:solidFill>
+              <a:srgbClr val="DADEE5"/>
+            </a:solidFill>
+          </a:ln>
+        </p:spPr>
+        <p:style>
+          <a:lnRef idx="1">
+            <a:schemeClr val="accent1"/>
+          </a:lnRef>
+          <a:fillRef idx="3">
+            <a:schemeClr val="accent1"/>
+          </a:fillRef>
+          <a:effectRef idx="2">
+            <a:schemeClr val="accent1"/>
+          </a:effectRef>
+          <a:fontRef idx="minor">
+            <a:schemeClr val="lt1"/>
+          </a:fontRef>
+        </p:style>
+        <p:txBody>
+          <a:bodyPr rtlCol="0" anchor="ctr"/>
+          <a:lstStyle/>
+          <a:p>
+            <a:pPr algn="ctr"/>
+          </a:p>
+        </p:txBody>
+      </p:sp>
+      <p:sp>
+        <p:nvSpPr>
+          <p:cNvPr id="5" name="TextBox 4"/>
+          <p:cNvSpPr txBox="1"/>
+          <p:nvPr/>
+        </p:nvSpPr>
+        <p:spPr>
+          <a:xfrm>
+            <a:off x="1097280" y="1645920"/>
+            <a:ext cx="9994392" cy="4206240"/>
+          </a:xfrm>
+          <a:prstGeom prst="rect">
+            <a:avLst/>
+          </a:prstGeom>
+          <a:noFill/>
+        </p:spPr>
+        <p:txBody>
+          <a:bodyPr wrap="square" lIns="228600" rIns="228600" tIns="228600" bIns="228600">
+            <a:spAutoFit/>
+          </a:bodyPr>
+          <a:lstStyle/>
+          <a:p>
+            <a:pPr>
+              <a:lnSpc>
+                <a:spcPct val="125000"/>
+              </a:lnSpc>
+              <a:spcAft>
+                <a:spcPts val="600"/>
+              </a:spcAft>
+              <a:defRPr>
+                <a:latin typeface="Microsoft JhengHei"/>
+              </a:defRPr>
+            </a:pPr>
+            <a:r>
+              <a:rPr sz="2000">
+                <a:solidFill>
+                  <a:srgbClr val="1B1B1F"/>
+                </a:solidFill>
+                <a:latin typeface="Microsoft JhengHei"/>
+              </a:rPr>
               <a:t>當某個主題的筆記數量累積到 5 篇以上時，即可開始建立 MOC：</a:t>
             </a:r>
           </a:p>
           <a:p>
             <a:pPr lvl="1">
-              <a:spcAft>
-                <a:spcPts val="1000"/>
-              </a:spcAft>
-              <a:defRPr sz="1800">
-                <a:solidFill>
-                  <a:srgbClr val="FFFFFF"/>
-                </a:solidFill>
-                <a:latin typeface="Microsoft JhengHei"/>
-              </a:defRPr>
-            </a:pPr>
-            <a:r>
-              <a:t>**步驟 1**：建立一篇新筆記，命名為 `MOC：主題名稱` (如 `MOC：高中物理`)</a:t>
+              <a:lnSpc>
+                <a:spcPct val="125000"/>
+              </a:lnSpc>
+              <a:spcAft>
+                <a:spcPts val="600"/>
+              </a:spcAft>
+              <a:defRPr>
+                <a:latin typeface="Microsoft JhengHei"/>
+              </a:defRPr>
+            </a:pPr>
+            <a:r>
+              <a:rPr sz="1800" b="1">
+                <a:solidFill>
+                  <a:srgbClr val="1B1B1F"/>
+                </a:solidFill>
+                <a:latin typeface="Microsoft JhengHei"/>
+              </a:rPr>
+              <a:t>步驟 1</a:t>
+            </a:r>
+            <a:r>
+              <a:rPr sz="1800">
+                <a:solidFill>
+                  <a:srgbClr val="1B1B1F"/>
+                </a:solidFill>
+                <a:latin typeface="Microsoft JhengHei"/>
+              </a:rPr>
+              <a:t>：建立一篇新筆記，命名為 </a:t>
+            </a:r>
+            <a:r>
+              <a:rPr sz="1800" b="1">
+                <a:solidFill>
+                  <a:srgbClr val="673AB7"/>
+                </a:solidFill>
+                <a:latin typeface="Consolas"/>
+              </a:rPr>
+              <a:t>MOC：主題名稱</a:t>
+            </a:r>
+            <a:r>
+              <a:rPr sz="1800">
+                <a:solidFill>
+                  <a:srgbClr val="1B1B1F"/>
+                </a:solidFill>
+                <a:latin typeface="Microsoft JhengHei"/>
+              </a:rPr>
+              <a:t> (如 </a:t>
+            </a:r>
+            <a:r>
+              <a:rPr sz="1800" b="1">
+                <a:solidFill>
+                  <a:srgbClr val="673AB7"/>
+                </a:solidFill>
+                <a:latin typeface="Consolas"/>
+              </a:rPr>
+              <a:t>MOC：高中物理</a:t>
+            </a:r>
+            <a:r>
+              <a:rPr sz="1800">
+                <a:solidFill>
+                  <a:srgbClr val="1B1B1F"/>
+                </a:solidFill>
+                <a:latin typeface="Microsoft JhengHei"/>
+              </a:rPr>
+              <a:t>)</a:t>
             </a:r>
           </a:p>
           <a:p>
             <a:pPr lvl="1">
-              <a:spcAft>
-                <a:spcPts val="1000"/>
-              </a:spcAft>
-              <a:defRPr sz="1800">
-                <a:solidFill>
-                  <a:srgbClr val="FFFFFF"/>
-                </a:solidFill>
-                <a:latin typeface="Microsoft JhengHei"/>
-              </a:defRPr>
-            </a:pPr>
-            <a:r>
-              <a:t>**步驟 2**：在 MOC 中列出該主題的關鍵概念或章節大綱</a:t>
+              <a:lnSpc>
+                <a:spcPct val="125000"/>
+              </a:lnSpc>
+              <a:spcAft>
+                <a:spcPts val="600"/>
+              </a:spcAft>
+              <a:defRPr>
+                <a:latin typeface="Microsoft JhengHei"/>
+              </a:defRPr>
+            </a:pPr>
+            <a:r>
+              <a:rPr sz="1800" b="1">
+                <a:solidFill>
+                  <a:srgbClr val="1B1B1F"/>
+                </a:solidFill>
+                <a:latin typeface="Microsoft JhengHei"/>
+              </a:rPr>
+              <a:t>步驟 2</a:t>
+            </a:r>
+            <a:r>
+              <a:rPr sz="1800">
+                <a:solidFill>
+                  <a:srgbClr val="1B1B1F"/>
+                </a:solidFill>
+                <a:latin typeface="Microsoft JhengHei"/>
+              </a:rPr>
+              <a:t>：在 MOC 中列出該主題的關鍵概念或章節大綱</a:t>
             </a:r>
           </a:p>
           <a:p>
             <a:pPr lvl="1">
-              <a:spcAft>
-                <a:spcPts val="1000"/>
-              </a:spcAft>
-              <a:defRPr sz="1800">
-                <a:solidFill>
-                  <a:srgbClr val="FFFFFF"/>
-                </a:solidFill>
-                <a:latin typeface="Microsoft JhengHei"/>
-              </a:defRPr>
-            </a:pPr>
-            <a:r>
-              <a:t>**步驟 3**：將大綱中的各概念文字套用 `[[雙向連結]]` 連結至對應筆記</a:t>
+              <a:lnSpc>
+                <a:spcPct val="125000"/>
+              </a:lnSpc>
+              <a:spcAft>
+                <a:spcPts val="600"/>
+              </a:spcAft>
+              <a:defRPr>
+                <a:latin typeface="Microsoft JhengHei"/>
+              </a:defRPr>
+            </a:pPr>
+            <a:r>
+              <a:rPr sz="1800" b="1">
+                <a:solidFill>
+                  <a:srgbClr val="1B1B1F"/>
+                </a:solidFill>
+                <a:latin typeface="Microsoft JhengHei"/>
+              </a:rPr>
+              <a:t>步驟 3</a:t>
+            </a:r>
+            <a:r>
+              <a:rPr sz="1800">
+                <a:solidFill>
+                  <a:srgbClr val="1B1B1F"/>
+                </a:solidFill>
+                <a:latin typeface="Microsoft JhengHei"/>
+              </a:rPr>
+              <a:t>：將大綱中的各概念文字套用 </a:t>
+            </a:r>
+            <a:r>
+              <a:rPr sz="1800" b="1">
+                <a:solidFill>
+                  <a:srgbClr val="673AB7"/>
+                </a:solidFill>
+                <a:latin typeface="Consolas"/>
+              </a:rPr>
+              <a:t>[[雙向連結]]</a:t>
+            </a:r>
+            <a:r>
+              <a:rPr sz="1800">
+                <a:solidFill>
+                  <a:srgbClr val="1B1B1F"/>
+                </a:solidFill>
+                <a:latin typeface="Microsoft JhengHei"/>
+              </a:rPr>
+              <a:t> 連結至對應筆記</a:t>
             </a:r>
           </a:p>
           <a:p>
             <a:pPr lvl="1">
-              <a:spcAft>
-                <a:spcPts val="1000"/>
-              </a:spcAft>
-              <a:defRPr sz="1800">
-                <a:solidFill>
-                  <a:srgbClr val="FFFFFF"/>
-                </a:solidFill>
-                <a:latin typeface="Microsoft JhengHei"/>
-              </a:defRPr>
-            </a:pPr>
-            <a:r>
-              <a:t>**步驟 4**：在每個連結後面補上一句簡短說明，幫助回憶</a:t>
+              <a:lnSpc>
+                <a:spcPct val="125000"/>
+              </a:lnSpc>
+              <a:spcAft>
+                <a:spcPts val="600"/>
+              </a:spcAft>
+              <a:defRPr>
+                <a:latin typeface="Microsoft JhengHei"/>
+              </a:defRPr>
+            </a:pPr>
+            <a:r>
+              <a:rPr sz="1800" b="1">
+                <a:solidFill>
+                  <a:srgbClr val="1B1B1F"/>
+                </a:solidFill>
+                <a:latin typeface="Microsoft JhengHei"/>
+              </a:rPr>
+              <a:t>步驟 4</a:t>
+            </a:r>
+            <a:r>
+              <a:rPr sz="1800">
+                <a:solidFill>
+                  <a:srgbClr val="1B1B1F"/>
+                </a:solidFill>
+                <a:latin typeface="Microsoft JhengHei"/>
+              </a:rPr>
+              <a:t>：在每個連結後面補上一句簡短說明，幫助回憶</a:t>
             </a:r>
           </a:p>
           <a:p>
             <a:pPr lvl="1">
-              <a:spcAft>
-                <a:spcPts val="1000"/>
-              </a:spcAft>
-              <a:defRPr sz="1800">
-                <a:solidFill>
-                  <a:srgbClr val="FFFFFF"/>
-                </a:solidFill>
-                <a:latin typeface="Microsoft JhengHei"/>
-              </a:defRPr>
-            </a:pPr>
-            <a:r>
-              <a:t>**步驟 5**：將這張 MOC 加入「書籤 (Bookmarks)」，以便每天快速查閱</a:t>
+              <a:lnSpc>
+                <a:spcPct val="125000"/>
+              </a:lnSpc>
+              <a:spcAft>
+                <a:spcPts val="600"/>
+              </a:spcAft>
+              <a:defRPr>
+                <a:latin typeface="Microsoft JhengHei"/>
+              </a:defRPr>
+            </a:pPr>
+            <a:r>
+              <a:rPr sz="1800" b="1">
+                <a:solidFill>
+                  <a:srgbClr val="1B1B1F"/>
+                </a:solidFill>
+                <a:latin typeface="Microsoft JhengHei"/>
+              </a:rPr>
+              <a:t>步驟 5</a:t>
+            </a:r>
+            <a:r>
+              <a:rPr sz="1800">
+                <a:solidFill>
+                  <a:srgbClr val="1B1B1F"/>
+                </a:solidFill>
+                <a:latin typeface="Microsoft JhengHei"/>
+              </a:rPr>
+              <a:t>：將這張 MOC 加入「書籤 (Bookmarks)」，以便每天快速查閱</a:t>
             </a:r>
           </a:p>
         </p:txBody>
@@ -5968,7 +7112,7 @@
     <p:bg>
       <p:bgPr>
         <a:solidFill>
-          <a:srgbClr val="1E1E24"/>
+          <a:srgbClr val="F5F5F7"/>
         </a:solidFill>
         <a:effectLst/>
       </p:bgPr>
@@ -5982,59 +7126,25 @@
       <p:grpSpPr/>
       <p:sp>
         <p:nvSpPr>
-          <p:cNvPr id="2" name="TextBox 1"/>
-          <p:cNvSpPr txBox="1"/>
-          <p:nvPr/>
-        </p:nvSpPr>
-        <p:spPr>
-          <a:xfrm>
-            <a:off x="731520" y="365760"/>
-            <a:ext cx="10725912" cy="731520"/>
-          </a:xfrm>
-          <a:prstGeom prst="rect">
-            <a:avLst/>
-          </a:prstGeom>
-          <a:noFill/>
-        </p:spPr>
-        <p:txBody>
-          <a:bodyPr wrap="square" lIns="0" tIns="0" rIns="0" bIns="0">
-            <a:spAutoFit/>
-          </a:bodyPr>
-          <a:lstStyle/>
-          <a:p>
-            <a:pPr>
-              <a:defRPr sz="3600" b="1">
-                <a:solidFill>
-                  <a:srgbClr val="00E5FF"/>
-                </a:solidFill>
-                <a:latin typeface="Microsoft JhengHei"/>
-              </a:defRPr>
-            </a:pPr>
-            <a:r>
-              <a:t>每日筆記：思緒的候車室</a:t>
-            </a:r>
-          </a:p>
-        </p:txBody>
-      </p:sp>
-      <p:sp>
-        <p:nvSpPr>
-          <p:cNvPr id="3" name="Rectangle 2"/>
+          <p:cNvPr id="2" name="Rectangle 1"/>
           <p:cNvSpPr/>
           <p:nvPr/>
         </p:nvSpPr>
         <p:spPr>
           <a:xfrm>
-            <a:off x="731520" y="1371600"/>
-            <a:ext cx="10725912" cy="4754880"/>
+            <a:off x="731520" y="384048"/>
+            <a:ext cx="91440" cy="502920"/>
           </a:xfrm>
           <a:prstGeom prst="rect">
             <a:avLst/>
           </a:prstGeom>
           <a:solidFill>
-            <a:srgbClr val="2D2D35"/>
+            <a:srgbClr val="009688"/>
           </a:solidFill>
           <a:ln>
-            <a:noFill/>
+            <a:solidFill>
+              <a:srgbClr val="009688"/>
+            </a:solidFill>
           </a:ln>
         </p:spPr>
         <p:style>
@@ -6061,14 +7171,14 @@
       </p:sp>
       <p:sp>
         <p:nvSpPr>
-          <p:cNvPr id="4" name="TextBox 3"/>
+          <p:cNvPr id="3" name="TextBox 2"/>
           <p:cNvSpPr txBox="1"/>
           <p:nvPr/>
         </p:nvSpPr>
         <p:spPr>
           <a:xfrm>
-            <a:off x="1097280" y="1645920"/>
-            <a:ext cx="9994392" cy="4206240"/>
+            <a:off x="960120" y="320040"/>
+            <a:ext cx="10497312" cy="731520"/>
           </a:xfrm>
           <a:prstGeom prst="rect">
             <a:avLst/>
@@ -6082,82 +7192,247 @@
           <a:lstStyle/>
           <a:p>
             <a:pPr>
-              <a:spcAft>
-                <a:spcPts val="1000"/>
-              </a:spcAft>
-              <a:defRPr sz="2000">
-                <a:solidFill>
-                  <a:srgbClr val="FFFFFF"/>
-                </a:solidFill>
-                <a:latin typeface="Microsoft JhengHei"/>
-              </a:defRPr>
-            </a:pPr>
-            <a:r>
-              <a:t>**Daily Notes (每日筆記)** 是收集想法的最佳入口：</a:t>
+              <a:defRPr sz="3600" b="1">
+                <a:solidFill>
+                  <a:srgbClr val="009688"/>
+                </a:solidFill>
+                <a:latin typeface="Microsoft JhengHei"/>
+              </a:defRPr>
+            </a:pPr>
+            <a:r>
+              <a:t>每日筆記：思緒的候車室</a:t>
+            </a:r>
+          </a:p>
+        </p:txBody>
+      </p:sp>
+      <p:sp>
+        <p:nvSpPr>
+          <p:cNvPr id="4" name="Rectangle 3"/>
+          <p:cNvSpPr/>
+          <p:nvPr/>
+        </p:nvSpPr>
+        <p:spPr>
+          <a:xfrm>
+            <a:off x="731520" y="1371600"/>
+            <a:ext cx="10725912" cy="4754880"/>
+          </a:xfrm>
+          <a:prstGeom prst="rect">
+            <a:avLst/>
+          </a:prstGeom>
+          <a:solidFill>
+            <a:srgbClr val="FFFFFF"/>
+          </a:solidFill>
+          <a:ln w="19050">
+            <a:solidFill>
+              <a:srgbClr val="DADEE5"/>
+            </a:solidFill>
+          </a:ln>
+        </p:spPr>
+        <p:style>
+          <a:lnRef idx="1">
+            <a:schemeClr val="accent1"/>
+          </a:lnRef>
+          <a:fillRef idx="3">
+            <a:schemeClr val="accent1"/>
+          </a:fillRef>
+          <a:effectRef idx="2">
+            <a:schemeClr val="accent1"/>
+          </a:effectRef>
+          <a:fontRef idx="minor">
+            <a:schemeClr val="lt1"/>
+          </a:fontRef>
+        </p:style>
+        <p:txBody>
+          <a:bodyPr rtlCol="0" anchor="ctr"/>
+          <a:lstStyle/>
+          <a:p>
+            <a:pPr algn="ctr"/>
+          </a:p>
+        </p:txBody>
+      </p:sp>
+      <p:sp>
+        <p:nvSpPr>
+          <p:cNvPr id="5" name="TextBox 4"/>
+          <p:cNvSpPr txBox="1"/>
+          <p:nvPr/>
+        </p:nvSpPr>
+        <p:spPr>
+          <a:xfrm>
+            <a:off x="1097280" y="1645920"/>
+            <a:ext cx="9994392" cy="4206240"/>
+          </a:xfrm>
+          <a:prstGeom prst="rect">
+            <a:avLst/>
+          </a:prstGeom>
+          <a:noFill/>
+        </p:spPr>
+        <p:txBody>
+          <a:bodyPr wrap="square" lIns="228600" rIns="228600" tIns="228600" bIns="228600">
+            <a:spAutoFit/>
+          </a:bodyPr>
+          <a:lstStyle/>
+          <a:p>
+            <a:pPr>
+              <a:lnSpc>
+                <a:spcPct val="125000"/>
+              </a:lnSpc>
+              <a:spcAft>
+                <a:spcPts val="600"/>
+              </a:spcAft>
+              <a:defRPr>
+                <a:latin typeface="Microsoft JhengHei"/>
+              </a:defRPr>
+            </a:pPr>
+            <a:r>
+              <a:rPr sz="2000" b="1">
+                <a:solidFill>
+                  <a:srgbClr val="1B1B1F"/>
+                </a:solidFill>
+                <a:latin typeface="Microsoft JhengHei"/>
+              </a:rPr>
+              <a:t>Daily Notes (每日筆記)</a:t>
+            </a:r>
+            <a:r>
+              <a:rPr sz="2000">
+                <a:solidFill>
+                  <a:srgbClr val="1B1B1F"/>
+                </a:solidFill>
+                <a:latin typeface="Microsoft JhengHei"/>
+              </a:rPr>
+              <a:t> 是收集想法的最佳入口：</a:t>
             </a:r>
           </a:p>
           <a:p>
             <a:pPr lvl="1">
-              <a:spcAft>
-                <a:spcPts val="1000"/>
-              </a:spcAft>
-              <a:defRPr sz="1800">
-                <a:solidFill>
-                  <a:srgbClr val="FFFFFF"/>
-                </a:solidFill>
-                <a:latin typeface="Microsoft JhengHei"/>
-              </a:defRPr>
-            </a:pPr>
-            <a:r>
-              <a:t>啟用核心外掛後，點擊按鈕即可自動建立今天日期的筆記 (如 `2026-06-13.md`)</a:t>
+              <a:lnSpc>
+                <a:spcPct val="125000"/>
+              </a:lnSpc>
+              <a:spcAft>
+                <a:spcPts val="600"/>
+              </a:spcAft>
+              <a:defRPr>
+                <a:latin typeface="Microsoft JhengHei"/>
+              </a:defRPr>
+            </a:pPr>
+            <a:r>
+              <a:rPr sz="1800">
+                <a:solidFill>
+                  <a:srgbClr val="1B1B1F"/>
+                </a:solidFill>
+                <a:latin typeface="Microsoft JhengHei"/>
+              </a:rPr>
+              <a:t>啟用核心外掛後，點擊按鈕即可自動建立今天日期的筆記 (如 </a:t>
+            </a:r>
+            <a:r>
+              <a:rPr sz="1800" b="1">
+                <a:solidFill>
+                  <a:srgbClr val="673AB7"/>
+                </a:solidFill>
+                <a:latin typeface="Consolas"/>
+              </a:rPr>
+              <a:t>2026-06-13.md</a:t>
+            </a:r>
+            <a:r>
+              <a:rPr sz="1800">
+                <a:solidFill>
+                  <a:srgbClr val="1B1B1F"/>
+                </a:solidFill>
+                <a:latin typeface="Microsoft JhengHei"/>
+              </a:rPr>
+              <a:t>)</a:t>
             </a:r>
           </a:p>
           <a:p>
             <a:pPr lvl="1">
-              <a:spcAft>
-                <a:spcPts val="1000"/>
-              </a:spcAft>
-              <a:defRPr sz="1800">
-                <a:solidFill>
-                  <a:srgbClr val="FFFFFF"/>
-                </a:solidFill>
-                <a:latin typeface="Microsoft JhengHei"/>
-              </a:defRPr>
-            </a:pPr>
-            <a:r>
+              <a:lnSpc>
+                <a:spcPct val="125000"/>
+              </a:lnSpc>
+              <a:spcAft>
+                <a:spcPts val="600"/>
+              </a:spcAft>
+              <a:defRPr>
+                <a:latin typeface="Microsoft JhengHei"/>
+              </a:defRPr>
+            </a:pPr>
+            <a:r>
+              <a:rPr sz="1800">
+                <a:solidFill>
+                  <a:srgbClr val="1B1B1F"/>
+                </a:solidFill>
+                <a:latin typeface="Microsoft JhengHei"/>
+              </a:rPr>
               <a:t>每天上課的靈感、隨手記錄的待辦、當天的心情都可以丟在這裡</a:t>
             </a:r>
           </a:p>
           <a:p>
             <a:pPr lvl="1">
-              <a:spcAft>
-                <a:spcPts val="1000"/>
-              </a:spcAft>
-              <a:defRPr sz="1800">
-                <a:solidFill>
-                  <a:srgbClr val="FFFFFF"/>
-                </a:solidFill>
-                <a:latin typeface="Microsoft JhengHei"/>
-              </a:defRPr>
-            </a:pPr>
-            <a:r>
-              <a:t>搭配 **QuickAdd** 可以設定快捷鍵，免開筆記直接往 Daily Note 追加文字</a:t>
+              <a:lnSpc>
+                <a:spcPct val="125000"/>
+              </a:lnSpc>
+              <a:spcAft>
+                <a:spcPts val="600"/>
+              </a:spcAft>
+              <a:defRPr>
+                <a:latin typeface="Microsoft JhengHei"/>
+              </a:defRPr>
+            </a:pPr>
+            <a:r>
+              <a:rPr sz="1800">
+                <a:solidFill>
+                  <a:srgbClr val="1B1B1F"/>
+                </a:solidFill>
+                <a:latin typeface="Microsoft JhengHei"/>
+              </a:rPr>
+              <a:t>搭配 </a:t>
+            </a:r>
+            <a:r>
+              <a:rPr sz="1800" b="1">
+                <a:solidFill>
+                  <a:srgbClr val="1B1B1F"/>
+                </a:solidFill>
+                <a:latin typeface="Microsoft JhengHei"/>
+              </a:rPr>
+              <a:t>QuickAdd</a:t>
+            </a:r>
+            <a:r>
+              <a:rPr sz="1800">
+                <a:solidFill>
+                  <a:srgbClr val="1B1B1F"/>
+                </a:solidFill>
+                <a:latin typeface="Microsoft JhengHei"/>
+              </a:rPr>
+              <a:t> 可以設定快捷鍵，免開筆記直接往 Daily Note 追加文字</a:t>
             </a:r>
           </a:p>
           <a:p>
             <a:pPr lvl="1">
-              <a:spcAft>
-                <a:spcPts val="1000"/>
-              </a:spcAft>
-              <a:defRPr sz="1800">
-                <a:solidFill>
-                  <a:srgbClr val="FFFFFF"/>
-                </a:solidFill>
-                <a:latin typeface="Microsoft JhengHei"/>
-              </a:defRPr>
-            </a:pPr>
-            <a:r>
-              <a:t>**核心觀念**：每日筆記是思緒的「候車室」，不是儲藏室！每天睡前應花 5 分鐘將裡面的資訊歸檔到對的資料夾或整理成永久卡。</a:t>
+              <a:lnSpc>
+                <a:spcPct val="125000"/>
+              </a:lnSpc>
+              <a:spcAft>
+                <a:spcPts val="600"/>
+              </a:spcAft>
+              <a:defRPr>
+                <a:latin typeface="Microsoft JhengHei"/>
+              </a:defRPr>
+            </a:pPr>
+            <a:r>
+              <a:rPr sz="1800" b="1">
+                <a:solidFill>
+                  <a:srgbClr val="1B1B1F"/>
+                </a:solidFill>
+                <a:latin typeface="Microsoft JhengHei"/>
+              </a:rPr>
+              <a:t>核心觀念</a:t>
+            </a:r>
+            <a:r>
+              <a:rPr sz="1800">
+                <a:solidFill>
+                  <a:srgbClr val="1B1B1F"/>
+                </a:solidFill>
+                <a:latin typeface="Microsoft JhengHei"/>
+              </a:rPr>
+              <a:t>：每日筆記是思緒的「候車室」，不是儲藏室！每天睡前應花 5 分鐘將裡面的資訊歸檔到對的資料夾或整理成永久卡。</a:t>
             </a:r>
           </a:p>
         </p:txBody>
@@ -6176,7 +7451,7 @@
     <p:bg>
       <p:bgPr>
         <a:solidFill>
-          <a:srgbClr val="7C4DFF"/>
+          <a:srgbClr val="673AB7"/>
         </a:solidFill>
         <a:effectLst/>
       </p:bgPr>
@@ -6216,7 +7491,7 @@
               </a:spcAft>
               <a:defRPr sz="4800" b="1">
                 <a:solidFill>
-                  <a:srgbClr val="FFFFFF"/>
+                  <a:srgbClr val="1B1B1F"/>
                 </a:solidFill>
                 <a:latin typeface="Microsoft JhengHei"/>
               </a:defRPr>
@@ -6229,7 +7504,7 @@
             <a:pPr algn="ctr">
               <a:defRPr sz="2000">
                 <a:solidFill>
-                  <a:srgbClr val="D1C4E9"/>
+                  <a:srgbClr val="656575"/>
                 </a:solidFill>
                 <a:latin typeface="Microsoft JhengHei"/>
               </a:defRPr>
@@ -6254,7 +7529,7 @@
     <p:bg>
       <p:bgPr>
         <a:solidFill>
-          <a:srgbClr val="1E1E24"/>
+          <a:srgbClr val="F5F5F7"/>
         </a:solidFill>
         <a:effectLst/>
       </p:bgPr>
@@ -6268,59 +7543,25 @@
       <p:grpSpPr/>
       <p:sp>
         <p:nvSpPr>
-          <p:cNvPr id="2" name="TextBox 1"/>
-          <p:cNvSpPr txBox="1"/>
-          <p:nvPr/>
-        </p:nvSpPr>
-        <p:spPr>
-          <a:xfrm>
-            <a:off x="731520" y="365760"/>
-            <a:ext cx="10725912" cy="731520"/>
-          </a:xfrm>
-          <a:prstGeom prst="rect">
-            <a:avLst/>
-          </a:prstGeom>
-          <a:noFill/>
-        </p:spPr>
-        <p:txBody>
-          <a:bodyPr wrap="square" lIns="0" tIns="0" rIns="0" bIns="0">
-            <a:spAutoFit/>
-          </a:bodyPr>
-          <a:lstStyle/>
-          <a:p>
-            <a:pPr>
-              <a:defRPr sz="3600" b="1">
-                <a:solidFill>
-                  <a:srgbClr val="00E5FF"/>
-                </a:solidFill>
-                <a:latin typeface="Microsoft JhengHei"/>
-              </a:defRPr>
-            </a:pPr>
-            <a:r>
-              <a:t>Canvas：無限大的視覺化白板</a:t>
-            </a:r>
-          </a:p>
-        </p:txBody>
-      </p:sp>
-      <p:sp>
-        <p:nvSpPr>
-          <p:cNvPr id="3" name="Rectangle 2"/>
+          <p:cNvPr id="2" name="Rectangle 1"/>
           <p:cNvSpPr/>
           <p:nvPr/>
         </p:nvSpPr>
         <p:spPr>
           <a:xfrm>
-            <a:off x="731520" y="1371600"/>
-            <a:ext cx="5486400" cy="4754880"/>
+            <a:off x="731520" y="384048"/>
+            <a:ext cx="91440" cy="502920"/>
           </a:xfrm>
           <a:prstGeom prst="rect">
             <a:avLst/>
           </a:prstGeom>
           <a:solidFill>
-            <a:srgbClr val="2D2D35"/>
+            <a:srgbClr val="009688"/>
           </a:solidFill>
           <a:ln>
-            <a:noFill/>
+            <a:solidFill>
+              <a:srgbClr val="009688"/>
+            </a:solidFill>
           </a:ln>
         </p:spPr>
         <p:style>
@@ -6347,14 +7588,14 @@
       </p:sp>
       <p:sp>
         <p:nvSpPr>
-          <p:cNvPr id="4" name="TextBox 3"/>
+          <p:cNvPr id="3" name="TextBox 2"/>
           <p:cNvSpPr txBox="1"/>
           <p:nvPr/>
         </p:nvSpPr>
         <p:spPr>
           <a:xfrm>
-            <a:off x="1005840" y="1645920"/>
-            <a:ext cx="4937760" cy="4206240"/>
+            <a:off x="960120" y="320040"/>
+            <a:ext cx="10497312" cy="731520"/>
           </a:xfrm>
           <a:prstGeom prst="rect">
             <a:avLst/>
@@ -6368,81 +7609,201 @@
           <a:lstStyle/>
           <a:p>
             <a:pPr>
-              <a:spcAft>
-                <a:spcPts val="1000"/>
-              </a:spcAft>
-              <a:defRPr sz="1800">
-                <a:solidFill>
-                  <a:srgbClr val="FFFFFF"/>
-                </a:solidFill>
-                <a:latin typeface="Microsoft JhengHei"/>
-              </a:defRPr>
-            </a:pPr>
-            <a:r>
-              <a:t>**Canvas (畫布) 功能**：</a:t>
+              <a:defRPr sz="3600" b="1">
+                <a:solidFill>
+                  <a:srgbClr val="009688"/>
+                </a:solidFill>
+                <a:latin typeface="Microsoft JhengHei"/>
+              </a:defRPr>
+            </a:pPr>
+            <a:r>
+              <a:t>Canvas：無限大的視覺化白板</a:t>
+            </a:r>
+          </a:p>
+        </p:txBody>
+      </p:sp>
+      <p:sp>
+        <p:nvSpPr>
+          <p:cNvPr id="4" name="Rectangle 3"/>
+          <p:cNvSpPr/>
+          <p:nvPr/>
+        </p:nvSpPr>
+        <p:spPr>
+          <a:xfrm>
+            <a:off x="731520" y="1371600"/>
+            <a:ext cx="5486400" cy="4754880"/>
+          </a:xfrm>
+          <a:prstGeom prst="rect">
+            <a:avLst/>
+          </a:prstGeom>
+          <a:solidFill>
+            <a:srgbClr val="FFFFFF"/>
+          </a:solidFill>
+          <a:ln w="19050">
+            <a:solidFill>
+              <a:srgbClr val="DADEE5"/>
+            </a:solidFill>
+          </a:ln>
+        </p:spPr>
+        <p:style>
+          <a:lnRef idx="1">
+            <a:schemeClr val="accent1"/>
+          </a:lnRef>
+          <a:fillRef idx="3">
+            <a:schemeClr val="accent1"/>
+          </a:fillRef>
+          <a:effectRef idx="2">
+            <a:schemeClr val="accent1"/>
+          </a:effectRef>
+          <a:fontRef idx="minor">
+            <a:schemeClr val="lt1"/>
+          </a:fontRef>
+        </p:style>
+        <p:txBody>
+          <a:bodyPr rtlCol="0" anchor="ctr"/>
+          <a:lstStyle/>
+          <a:p>
+            <a:pPr algn="ctr"/>
+          </a:p>
+        </p:txBody>
+      </p:sp>
+      <p:sp>
+        <p:nvSpPr>
+          <p:cNvPr id="5" name="TextBox 4"/>
+          <p:cNvSpPr txBox="1"/>
+          <p:nvPr/>
+        </p:nvSpPr>
+        <p:spPr>
+          <a:xfrm>
+            <a:off x="1005840" y="1645920"/>
+            <a:ext cx="4937760" cy="4206240"/>
+          </a:xfrm>
+          <a:prstGeom prst="rect">
+            <a:avLst/>
+          </a:prstGeom>
+          <a:noFill/>
+        </p:spPr>
+        <p:txBody>
+          <a:bodyPr wrap="square" lIns="228600" rIns="228600" tIns="228600" bIns="228600">
+            <a:spAutoFit/>
+          </a:bodyPr>
+          <a:lstStyle/>
+          <a:p>
+            <a:pPr>
+              <a:lnSpc>
+                <a:spcPct val="125000"/>
+              </a:lnSpc>
+              <a:spcAft>
+                <a:spcPts val="600"/>
+              </a:spcAft>
+              <a:defRPr>
+                <a:latin typeface="Microsoft JhengHei"/>
+              </a:defRPr>
+            </a:pPr>
+            <a:r>
+              <a:rPr sz="1800" b="1">
+                <a:solidFill>
+                  <a:srgbClr val="1B1B1F"/>
+                </a:solidFill>
+                <a:latin typeface="Microsoft JhengHei"/>
+              </a:rPr>
+              <a:t>Canvas (畫布) 功能</a:t>
+            </a:r>
+            <a:r>
+              <a:rPr sz="1800">
+                <a:solidFill>
+                  <a:srgbClr val="1B1B1F"/>
+                </a:solidFill>
+                <a:latin typeface="Microsoft JhengHei"/>
+              </a:rPr>
+              <a:t>：</a:t>
             </a:r>
           </a:p>
           <a:p>
             <a:pPr lvl="1">
-              <a:spcAft>
-                <a:spcPts val="1000"/>
-              </a:spcAft>
-              <a:defRPr sz="1600">
-                <a:solidFill>
-                  <a:srgbClr val="FFFFFF"/>
-                </a:solidFill>
-                <a:latin typeface="Microsoft JhengHei"/>
-              </a:defRPr>
-            </a:pPr>
-            <a:r>
+              <a:lnSpc>
+                <a:spcPct val="125000"/>
+              </a:lnSpc>
+              <a:spcAft>
+                <a:spcPts val="600"/>
+              </a:spcAft>
+              <a:defRPr>
+                <a:latin typeface="Microsoft JhengHei"/>
+              </a:defRPr>
+            </a:pPr>
+            <a:r>
+              <a:rPr sz="1600">
+                <a:solidFill>
+                  <a:srgbClr val="1B1B1F"/>
+                </a:solidFill>
+                <a:latin typeface="Microsoft JhengHei"/>
+              </a:rPr>
               <a:t>Obsidian 內建的無限白板，讓你用視覺化方式整理知識</a:t>
             </a:r>
           </a:p>
           <a:p>
             <a:pPr lvl="1">
-              <a:spcAft>
-                <a:spcPts val="1000"/>
-              </a:spcAft>
-              <a:defRPr sz="1600">
-                <a:solidFill>
-                  <a:srgbClr val="FFFFFF"/>
-                </a:solidFill>
-                <a:latin typeface="Microsoft JhengHei"/>
-              </a:defRPr>
-            </a:pPr>
-            <a:r>
+              <a:lnSpc>
+                <a:spcPct val="125000"/>
+              </a:lnSpc>
+              <a:spcAft>
+                <a:spcPts val="600"/>
+              </a:spcAft>
+              <a:defRPr>
+                <a:latin typeface="Microsoft JhengHei"/>
+              </a:defRPr>
+            </a:pPr>
+            <a:r>
+              <a:rPr sz="1600">
+                <a:solidFill>
+                  <a:srgbClr val="1B1B1F"/>
+                </a:solidFill>
+                <a:latin typeface="Microsoft JhengHei"/>
+              </a:rPr>
               <a:t>可自由將已寫好的筆記卡片、獨立文字框、圖片甚至網址拉入畫布</a:t>
             </a:r>
           </a:p>
           <a:p>
             <a:pPr lvl="1">
-              <a:spcAft>
-                <a:spcPts val="1000"/>
-              </a:spcAft>
-              <a:defRPr sz="1600">
-                <a:solidFill>
-                  <a:srgbClr val="FFFFFF"/>
-                </a:solidFill>
-                <a:latin typeface="Microsoft JhengHei"/>
-              </a:defRPr>
-            </a:pPr>
-            <a:r>
+              <a:lnSpc>
+                <a:spcPct val="125000"/>
+              </a:lnSpc>
+              <a:spcAft>
+                <a:spcPts val="600"/>
+              </a:spcAft>
+              <a:defRPr>
+                <a:latin typeface="Microsoft JhengHei"/>
+              </a:defRPr>
+            </a:pPr>
+            <a:r>
+              <a:rPr sz="1600">
+                <a:solidFill>
+                  <a:srgbClr val="1B1B1F"/>
+                </a:solidFill>
+                <a:latin typeface="Microsoft JhengHei"/>
+              </a:rPr>
               <a:t>使用箭頭連線標示概念之間的因果、邏輯關係</a:t>
             </a:r>
           </a:p>
           <a:p>
             <a:pPr lvl="1">
-              <a:spcAft>
-                <a:spcPts val="1000"/>
-              </a:spcAft>
-              <a:defRPr sz="1600">
-                <a:solidFill>
-                  <a:srgbClr val="FFFFFF"/>
-                </a:solidFill>
-                <a:latin typeface="Microsoft JhengHei"/>
-              </a:defRPr>
-            </a:pPr>
-            <a:r>
+              <a:lnSpc>
+                <a:spcPct val="125000"/>
+              </a:lnSpc>
+              <a:spcAft>
+                <a:spcPts val="600"/>
+              </a:spcAft>
+              <a:defRPr>
+                <a:latin typeface="Microsoft JhengHei"/>
+              </a:defRPr>
+            </a:pPr>
+            <a:r>
+              <a:rPr sz="1600">
+                <a:solidFill>
+                  <a:srgbClr val="1B1B1F"/>
+                </a:solidFill>
+                <a:latin typeface="Microsoft JhengHei"/>
+              </a:rPr>
               <a:t>非常適合用在：歷史事件時間線排列、腦力激盪、考前心智圖複習</a:t>
             </a:r>
           </a:p>
@@ -6450,7 +7811,7 @@
       </p:sp>
       <p:pic>
         <p:nvPicPr>
-          <p:cNvPr id="5" name="Picture 4" descr="obsidian_canvas.png"/>
+          <p:cNvPr id="6" name="Picture 5" descr="obsidian_canvas.png"/>
           <p:cNvPicPr>
             <a:picLocks noChangeAspect="1"/>
           </p:cNvPicPr>
@@ -6486,7 +7847,7 @@
     <p:bg>
       <p:bgPr>
         <a:solidFill>
-          <a:srgbClr val="1E1E24"/>
+          <a:srgbClr val="F5F5F7"/>
         </a:solidFill>
         <a:effectLst/>
       </p:bgPr>
@@ -6500,59 +7861,25 @@
       <p:grpSpPr/>
       <p:sp>
         <p:nvSpPr>
-          <p:cNvPr id="2" name="TextBox 1"/>
-          <p:cNvSpPr txBox="1"/>
-          <p:nvPr/>
-        </p:nvSpPr>
-        <p:spPr>
-          <a:xfrm>
-            <a:off x="731520" y="365760"/>
-            <a:ext cx="10725912" cy="731520"/>
-          </a:xfrm>
-          <a:prstGeom prst="rect">
-            <a:avLst/>
-          </a:prstGeom>
-          <a:noFill/>
-        </p:spPr>
-        <p:txBody>
-          <a:bodyPr wrap="square" lIns="0" tIns="0" rIns="0" bIns="0">
-            <a:spAutoFit/>
-          </a:bodyPr>
-          <a:lstStyle/>
-          <a:p>
-            <a:pPr>
-              <a:defRPr sz="3600" b="1">
-                <a:solidFill>
-                  <a:srgbClr val="00E5FF"/>
-                </a:solidFill>
-                <a:latin typeface="Microsoft JhengHei"/>
-              </a:defRPr>
-            </a:pPr>
-            <a:r>
-              <a:t>學生專屬工作流與備份策略</a:t>
-            </a:r>
-          </a:p>
-        </p:txBody>
-      </p:sp>
-      <p:sp>
-        <p:nvSpPr>
-          <p:cNvPr id="3" name="Rectangle 2"/>
+          <p:cNvPr id="2" name="Rectangle 1"/>
           <p:cNvSpPr/>
           <p:nvPr/>
         </p:nvSpPr>
         <p:spPr>
           <a:xfrm>
-            <a:off x="731520" y="1371600"/>
-            <a:ext cx="10725912" cy="4754880"/>
+            <a:off x="731520" y="384048"/>
+            <a:ext cx="91440" cy="502920"/>
           </a:xfrm>
           <a:prstGeom prst="rect">
             <a:avLst/>
           </a:prstGeom>
           <a:solidFill>
-            <a:srgbClr val="2D2D35"/>
+            <a:srgbClr val="009688"/>
           </a:solidFill>
           <a:ln>
-            <a:noFill/>
+            <a:solidFill>
+              <a:srgbClr val="009688"/>
+            </a:solidFill>
           </a:ln>
         </p:spPr>
         <p:style>
@@ -6579,14 +7906,14 @@
       </p:sp>
       <p:sp>
         <p:nvSpPr>
-          <p:cNvPr id="4" name="TextBox 3"/>
+          <p:cNvPr id="3" name="TextBox 2"/>
           <p:cNvSpPr txBox="1"/>
           <p:nvPr/>
         </p:nvSpPr>
         <p:spPr>
           <a:xfrm>
-            <a:off x="1097280" y="1645920"/>
-            <a:ext cx="9994392" cy="4206240"/>
+            <a:off x="960120" y="320040"/>
+            <a:ext cx="10497312" cy="731520"/>
           </a:xfrm>
           <a:prstGeom prst="rect">
             <a:avLst/>
@@ -6600,98 +7927,287 @@
           <a:lstStyle/>
           <a:p>
             <a:pPr>
-              <a:spcAft>
-                <a:spcPts val="1000"/>
-              </a:spcAft>
-              <a:defRPr sz="2000">
-                <a:solidFill>
-                  <a:srgbClr val="FFFFFF"/>
-                </a:solidFill>
-                <a:latin typeface="Microsoft JhengHei"/>
-              </a:defRPr>
-            </a:pPr>
-            <a:r>
-              <a:t>**每日學習工作流**：</a:t>
+              <a:defRPr sz="3600" b="1">
+                <a:solidFill>
+                  <a:srgbClr val="009688"/>
+                </a:solidFill>
+                <a:latin typeface="Microsoft JhengHei"/>
+              </a:defRPr>
+            </a:pPr>
+            <a:r>
+              <a:t>學生專屬工作流與備份策略</a:t>
+            </a:r>
+          </a:p>
+        </p:txBody>
+      </p:sp>
+      <p:sp>
+        <p:nvSpPr>
+          <p:cNvPr id="4" name="Rectangle 3"/>
+          <p:cNvSpPr/>
+          <p:nvPr/>
+        </p:nvSpPr>
+        <p:spPr>
+          <a:xfrm>
+            <a:off x="731520" y="1371600"/>
+            <a:ext cx="10725912" cy="4754880"/>
+          </a:xfrm>
+          <a:prstGeom prst="rect">
+            <a:avLst/>
+          </a:prstGeom>
+          <a:solidFill>
+            <a:srgbClr val="FFFFFF"/>
+          </a:solidFill>
+          <a:ln w="19050">
+            <a:solidFill>
+              <a:srgbClr val="DADEE5"/>
+            </a:solidFill>
+          </a:ln>
+        </p:spPr>
+        <p:style>
+          <a:lnRef idx="1">
+            <a:schemeClr val="accent1"/>
+          </a:lnRef>
+          <a:fillRef idx="3">
+            <a:schemeClr val="accent1"/>
+          </a:fillRef>
+          <a:effectRef idx="2">
+            <a:schemeClr val="accent1"/>
+          </a:effectRef>
+          <a:fontRef idx="minor">
+            <a:schemeClr val="lt1"/>
+          </a:fontRef>
+        </p:style>
+        <p:txBody>
+          <a:bodyPr rtlCol="0" anchor="ctr"/>
+          <a:lstStyle/>
+          <a:p>
+            <a:pPr algn="ctr"/>
+          </a:p>
+        </p:txBody>
+      </p:sp>
+      <p:sp>
+        <p:nvSpPr>
+          <p:cNvPr id="5" name="TextBox 4"/>
+          <p:cNvSpPr txBox="1"/>
+          <p:nvPr/>
+        </p:nvSpPr>
+        <p:spPr>
+          <a:xfrm>
+            <a:off x="1097280" y="1645920"/>
+            <a:ext cx="9994392" cy="4206240"/>
+          </a:xfrm>
+          <a:prstGeom prst="rect">
+            <a:avLst/>
+          </a:prstGeom>
+          <a:noFill/>
+        </p:spPr>
+        <p:txBody>
+          <a:bodyPr wrap="square" lIns="228600" rIns="228600" tIns="228600" bIns="228600">
+            <a:spAutoFit/>
+          </a:bodyPr>
+          <a:lstStyle/>
+          <a:p>
+            <a:pPr>
+              <a:lnSpc>
+                <a:spcPct val="125000"/>
+              </a:lnSpc>
+              <a:spcAft>
+                <a:spcPts val="600"/>
+              </a:spcAft>
+              <a:defRPr>
+                <a:latin typeface="Microsoft JhengHei"/>
+              </a:defRPr>
+            </a:pPr>
+            <a:r>
+              <a:rPr sz="2000" b="1">
+                <a:solidFill>
+                  <a:srgbClr val="1B1B1F"/>
+                </a:solidFill>
+                <a:latin typeface="Microsoft JhengHei"/>
+              </a:rPr>
+              <a:t>每日學習工作流</a:t>
+            </a:r>
+            <a:r>
+              <a:rPr sz="2000">
+                <a:solidFill>
+                  <a:srgbClr val="1B1B1F"/>
+                </a:solidFill>
+                <a:latin typeface="Microsoft JhengHei"/>
+              </a:rPr>
+              <a:t>：</a:t>
             </a:r>
           </a:p>
           <a:p>
             <a:pPr lvl="1">
-              <a:spcAft>
-                <a:spcPts val="1000"/>
-              </a:spcAft>
-              <a:defRPr sz="1800">
-                <a:solidFill>
-                  <a:srgbClr val="FFFFFF"/>
-                </a:solidFill>
-                <a:latin typeface="Microsoft JhengHei"/>
-              </a:defRPr>
-            </a:pPr>
-            <a:r>
-              <a:t>**上課時** ➡ 使用 Daily Notes 快速記下 Fleeting Notes 或文獻卡</a:t>
+              <a:lnSpc>
+                <a:spcPct val="125000"/>
+              </a:lnSpc>
+              <a:spcAft>
+                <a:spcPts val="600"/>
+              </a:spcAft>
+              <a:defRPr>
+                <a:latin typeface="Microsoft JhengHei"/>
+              </a:defRPr>
+            </a:pPr>
+            <a:r>
+              <a:rPr sz="1800" b="1">
+                <a:solidFill>
+                  <a:srgbClr val="1B1B1F"/>
+                </a:solidFill>
+                <a:latin typeface="Microsoft JhengHei"/>
+              </a:rPr>
+              <a:t>上課時</a:t>
+            </a:r>
+            <a:r>
+              <a:rPr sz="1800">
+                <a:solidFill>
+                  <a:srgbClr val="1B1B1F"/>
+                </a:solidFill>
+                <a:latin typeface="Microsoft JhengHei"/>
+              </a:rPr>
+              <a:t> ➡ 使用 Daily Notes 快速記下 Fleeting Notes 或文獻卡</a:t>
             </a:r>
           </a:p>
           <a:p>
             <a:pPr lvl="1">
-              <a:spcAft>
-                <a:spcPts val="1000"/>
-              </a:spcAft>
-              <a:defRPr sz="1800">
-                <a:solidFill>
-                  <a:srgbClr val="FFFFFF"/>
-                </a:solidFill>
-                <a:latin typeface="Microsoft JhengHei"/>
-              </a:defRPr>
-            </a:pPr>
-            <a:r>
-              <a:t>**下課當天** ➡ 將雜亂的筆記用自己的話整理成永久卡</a:t>
+              <a:lnSpc>
+                <a:spcPct val="125000"/>
+              </a:lnSpc>
+              <a:spcAft>
+                <a:spcPts val="600"/>
+              </a:spcAft>
+              <a:defRPr>
+                <a:latin typeface="Microsoft JhengHei"/>
+              </a:defRPr>
+            </a:pPr>
+            <a:r>
+              <a:rPr sz="1800" b="1">
+                <a:solidFill>
+                  <a:srgbClr val="1B1B1F"/>
+                </a:solidFill>
+                <a:latin typeface="Microsoft JhengHei"/>
+              </a:rPr>
+              <a:t>下課當天</a:t>
+            </a:r>
+            <a:r>
+              <a:rPr sz="1800">
+                <a:solidFill>
+                  <a:srgbClr val="1B1B1F"/>
+                </a:solidFill>
+                <a:latin typeface="Microsoft JhengHei"/>
+              </a:rPr>
+              <a:t> ➡ 將雜亂的筆記用自己的話整理成永久卡</a:t>
             </a:r>
           </a:p>
           <a:p>
             <a:pPr lvl="1">
-              <a:spcAft>
-                <a:spcPts val="1000"/>
-              </a:spcAft>
-              <a:defRPr sz="1800">
-                <a:solidFill>
-                  <a:srgbClr val="FFFFFF"/>
-                </a:solidFill>
-                <a:latin typeface="Microsoft JhengHei"/>
-              </a:defRPr>
-            </a:pPr>
-            <a:r>
-              <a:t>**週末** ➡ 建立雙向連結，更新該科目的 MOC 學習地圖</a:t>
+              <a:lnSpc>
+                <a:spcPct val="125000"/>
+              </a:lnSpc>
+              <a:spcAft>
+                <a:spcPts val="600"/>
+              </a:spcAft>
+              <a:defRPr>
+                <a:latin typeface="Microsoft JhengHei"/>
+              </a:defRPr>
+            </a:pPr>
+            <a:r>
+              <a:rPr sz="1800" b="1">
+                <a:solidFill>
+                  <a:srgbClr val="1B1B1F"/>
+                </a:solidFill>
+                <a:latin typeface="Microsoft JhengHei"/>
+              </a:rPr>
+              <a:t>週末</a:t>
+            </a:r>
+            <a:r>
+              <a:rPr sz="1800">
+                <a:solidFill>
+                  <a:srgbClr val="1B1B1F"/>
+                </a:solidFill>
+                <a:latin typeface="Microsoft JhengHei"/>
+              </a:rPr>
+              <a:t> ➡ 建立雙向連結，更新該科目的 MOC 學習地圖</a:t>
             </a:r>
           </a:p>
           <a:p>
             <a:pPr lvl="1">
-              <a:spcAft>
-                <a:spcPts val="1000"/>
-              </a:spcAft>
-              <a:defRPr sz="1800">
-                <a:solidFill>
-                  <a:srgbClr val="FFFFFF"/>
-                </a:solidFill>
-                <a:latin typeface="Microsoft JhengHei"/>
-              </a:defRPr>
-            </a:pPr>
-            <a:r>
-              <a:t>**段考前** ➡ 打開 MOC 與 Canvas 白板，進行系統化總複習</a:t>
+              <a:lnSpc>
+                <a:spcPct val="125000"/>
+              </a:lnSpc>
+              <a:spcAft>
+                <a:spcPts val="600"/>
+              </a:spcAft>
+              <a:defRPr>
+                <a:latin typeface="Microsoft JhengHei"/>
+              </a:defRPr>
+            </a:pPr>
+            <a:r>
+              <a:rPr sz="1800" b="1">
+                <a:solidFill>
+                  <a:srgbClr val="1B1B1F"/>
+                </a:solidFill>
+                <a:latin typeface="Microsoft JhengHei"/>
+              </a:rPr>
+              <a:t>段考前</a:t>
+            </a:r>
+            <a:r>
+              <a:rPr sz="1800">
+                <a:solidFill>
+                  <a:srgbClr val="1B1B1F"/>
+                </a:solidFill>
+                <a:latin typeface="Microsoft JhengHei"/>
+              </a:rPr>
+              <a:t> ➡ 打開 MOC 與 Canvas 白板，進行系統化總複習</a:t>
             </a:r>
           </a:p>
           <a:p>
             <a:pPr>
-              <a:spcAft>
-                <a:spcPts val="1000"/>
-              </a:spcAft>
-              <a:defRPr sz="2000">
-                <a:solidFill>
-                  <a:srgbClr val="FFFFFF"/>
-                </a:solidFill>
-                <a:latin typeface="Microsoft JhengHei"/>
-              </a:defRPr>
-            </a:pPr>
-            <a:r>
-              <a:t>**安全備份**：使用 **Obsidian Git** 外掛，每天自動將筆記上傳備份至 GitHub，再也不怕電腦壞掉或硬碟受損！</a:t>
+              <a:lnSpc>
+                <a:spcPct val="125000"/>
+              </a:lnSpc>
+              <a:spcAft>
+                <a:spcPts val="600"/>
+              </a:spcAft>
+              <a:defRPr>
+                <a:latin typeface="Microsoft JhengHei"/>
+              </a:defRPr>
+            </a:pPr>
+            <a:r>
+              <a:rPr sz="2000" b="1">
+                <a:solidFill>
+                  <a:srgbClr val="1B1B1F"/>
+                </a:solidFill>
+                <a:latin typeface="Microsoft JhengHei"/>
+              </a:rPr>
+              <a:t>安全備份</a:t>
+            </a:r>
+            <a:r>
+              <a:rPr sz="2000">
+                <a:solidFill>
+                  <a:srgbClr val="1B1B1F"/>
+                </a:solidFill>
+                <a:latin typeface="Microsoft JhengHei"/>
+              </a:rPr>
+              <a:t>：使用 </a:t>
+            </a:r>
+            <a:r>
+              <a:rPr sz="2000" b="1">
+                <a:solidFill>
+                  <a:srgbClr val="1B1B1F"/>
+                </a:solidFill>
+                <a:latin typeface="Microsoft JhengHei"/>
+              </a:rPr>
+              <a:t>Obsidian Git</a:t>
+            </a:r>
+            <a:r>
+              <a:rPr sz="2000">
+                <a:solidFill>
+                  <a:srgbClr val="1B1B1F"/>
+                </a:solidFill>
+                <a:latin typeface="Microsoft JhengHei"/>
+              </a:rPr>
+              <a:t> 外掛，每天自動將筆記上傳備份至 GitHub，再也不怕電腦壞掉或硬碟受損！</a:t>
             </a:r>
           </a:p>
         </p:txBody>
@@ -6710,7 +8226,7 @@
     <p:bg>
       <p:bgPr>
         <a:solidFill>
-          <a:srgbClr val="1E1E24"/>
+          <a:srgbClr val="F5F5F7"/>
         </a:solidFill>
         <a:effectLst/>
       </p:bgPr>
@@ -6724,59 +8240,25 @@
       <p:grpSpPr/>
       <p:sp>
         <p:nvSpPr>
-          <p:cNvPr id="2" name="TextBox 1"/>
-          <p:cNvSpPr txBox="1"/>
-          <p:nvPr/>
-        </p:nvSpPr>
-        <p:spPr>
-          <a:xfrm>
-            <a:off x="731520" y="365760"/>
-            <a:ext cx="10725912" cy="731520"/>
-          </a:xfrm>
-          <a:prstGeom prst="rect">
-            <a:avLst/>
-          </a:prstGeom>
-          <a:noFill/>
-        </p:spPr>
-        <p:txBody>
-          <a:bodyPr wrap="square" lIns="0" tIns="0" rIns="0" bIns="0">
-            <a:spAutoFit/>
-          </a:bodyPr>
-          <a:lstStyle/>
-          <a:p>
-            <a:pPr>
-              <a:defRPr sz="3600" b="1">
-                <a:solidFill>
-                  <a:srgbClr val="00E5FF"/>
-                </a:solidFill>
-                <a:latin typeface="Microsoft JhengHei"/>
-              </a:defRPr>
-            </a:pPr>
-            <a:r>
-              <a:t>今日開始，打造你的第二大腦</a:t>
-            </a:r>
-          </a:p>
-        </p:txBody>
-      </p:sp>
-      <p:sp>
-        <p:nvSpPr>
-          <p:cNvPr id="3" name="Rectangle 2"/>
+          <p:cNvPr id="2" name="Rectangle 1"/>
           <p:cNvSpPr/>
           <p:nvPr/>
         </p:nvSpPr>
         <p:spPr>
           <a:xfrm>
-            <a:off x="731520" y="1371600"/>
-            <a:ext cx="10725912" cy="4754880"/>
+            <a:off x="731520" y="384048"/>
+            <a:ext cx="91440" cy="502920"/>
           </a:xfrm>
           <a:prstGeom prst="rect">
             <a:avLst/>
           </a:prstGeom>
           <a:solidFill>
-            <a:srgbClr val="2D2D35"/>
+            <a:srgbClr val="009688"/>
           </a:solidFill>
           <a:ln>
-            <a:noFill/>
+            <a:solidFill>
+              <a:srgbClr val="009688"/>
+            </a:solidFill>
           </a:ln>
         </p:spPr>
         <p:style>
@@ -6803,14 +8285,14 @@
       </p:sp>
       <p:sp>
         <p:nvSpPr>
-          <p:cNvPr id="4" name="TextBox 3"/>
+          <p:cNvPr id="3" name="TextBox 2"/>
           <p:cNvSpPr txBox="1"/>
           <p:nvPr/>
         </p:nvSpPr>
         <p:spPr>
           <a:xfrm>
-            <a:off x="1097280" y="1645920"/>
-            <a:ext cx="9994392" cy="4206240"/>
+            <a:off x="960120" y="320040"/>
+            <a:ext cx="10497312" cy="731520"/>
           </a:xfrm>
           <a:prstGeom prst="rect">
             <a:avLst/>
@@ -6824,97 +8306,241 @@
           <a:lstStyle/>
           <a:p>
             <a:pPr>
-              <a:spcAft>
-                <a:spcPts val="1000"/>
-              </a:spcAft>
-              <a:defRPr sz="2000">
-                <a:solidFill>
-                  <a:srgbClr val="FFFFFF"/>
-                </a:solidFill>
-                <a:latin typeface="Microsoft JhengHei"/>
-              </a:defRPr>
-            </a:pPr>
-            <a:r>
-              <a:t>知識不是力量，**整理過且能夠靈活連結的知識**才是力量！</a:t>
-            </a:r>
-          </a:p>
+              <a:defRPr sz="3600" b="1">
+                <a:solidFill>
+                  <a:srgbClr val="009688"/>
+                </a:solidFill>
+                <a:latin typeface="Microsoft JhengHei"/>
+              </a:defRPr>
+            </a:pPr>
+            <a:r>
+              <a:t>今日開始，打造你的第二大腦</a:t>
+            </a:r>
+          </a:p>
+        </p:txBody>
+      </p:sp>
+      <p:sp>
+        <p:nvSpPr>
+          <p:cNvPr id="4" name="Rectangle 3"/>
+          <p:cNvSpPr/>
+          <p:nvPr/>
+        </p:nvSpPr>
+        <p:spPr>
+          <a:xfrm>
+            <a:off x="731520" y="1371600"/>
+            <a:ext cx="10725912" cy="4754880"/>
+          </a:xfrm>
+          <a:prstGeom prst="rect">
+            <a:avLst/>
+          </a:prstGeom>
+          <a:solidFill>
+            <a:srgbClr val="FFFFFF"/>
+          </a:solidFill>
+          <a:ln w="19050">
+            <a:solidFill>
+              <a:srgbClr val="DADEE5"/>
+            </a:solidFill>
+          </a:ln>
+        </p:spPr>
+        <p:style>
+          <a:lnRef idx="1">
+            <a:schemeClr val="accent1"/>
+          </a:lnRef>
+          <a:fillRef idx="3">
+            <a:schemeClr val="accent1"/>
+          </a:fillRef>
+          <a:effectRef idx="2">
+            <a:schemeClr val="accent1"/>
+          </a:effectRef>
+          <a:fontRef idx="minor">
+            <a:schemeClr val="lt1"/>
+          </a:fontRef>
+        </p:style>
+        <p:txBody>
+          <a:bodyPr rtlCol="0" anchor="ctr"/>
+          <a:lstStyle/>
+          <a:p>
+            <a:pPr algn="ctr"/>
+          </a:p>
+        </p:txBody>
+      </p:sp>
+      <p:sp>
+        <p:nvSpPr>
+          <p:cNvPr id="5" name="TextBox 4"/>
+          <p:cNvSpPr txBox="1"/>
+          <p:nvPr/>
+        </p:nvSpPr>
+        <p:spPr>
+          <a:xfrm>
+            <a:off x="1097280" y="1645920"/>
+            <a:ext cx="9994392" cy="4206240"/>
+          </a:xfrm>
+          <a:prstGeom prst="rect">
+            <a:avLst/>
+          </a:prstGeom>
+          <a:noFill/>
+        </p:spPr>
+        <p:txBody>
+          <a:bodyPr wrap="square" lIns="228600" rIns="228600" tIns="228600" bIns="228600">
+            <a:spAutoFit/>
+          </a:bodyPr>
+          <a:lstStyle/>
           <a:p>
             <a:pPr>
-              <a:spcAft>
-                <a:spcPts val="1000"/>
-              </a:spcAft>
-              <a:defRPr sz="2000">
-                <a:solidFill>
-                  <a:srgbClr val="FFFFFF"/>
-                </a:solidFill>
-                <a:latin typeface="Microsoft JhengHei"/>
-              </a:defRPr>
-            </a:pPr>
-            <a:r>
+              <a:lnSpc>
+                <a:spcPct val="125000"/>
+              </a:lnSpc>
+              <a:spcAft>
+                <a:spcPts val="600"/>
+              </a:spcAft>
+              <a:defRPr>
+                <a:latin typeface="Microsoft JhengHei"/>
+              </a:defRPr>
+            </a:pPr>
+            <a:r>
+              <a:rPr sz="2000">
+                <a:solidFill>
+                  <a:srgbClr val="1B1B1F"/>
+                </a:solidFill>
+                <a:latin typeface="Microsoft JhengHei"/>
+              </a:rPr>
+              <a:t>知識不是力量，</a:t>
+            </a:r>
+            <a:r>
+              <a:rPr sz="2000" b="1">
+                <a:solidFill>
+                  <a:srgbClr val="1B1B1F"/>
+                </a:solidFill>
+                <a:latin typeface="Microsoft JhengHei"/>
+              </a:rPr>
+              <a:t>整理過且能夠靈活連結的知識</a:t>
+            </a:r>
+            <a:r>
+              <a:rPr sz="2000">
+                <a:solidFill>
+                  <a:srgbClr val="1B1B1F"/>
+                </a:solidFill>
+                <a:latin typeface="Microsoft JhengHei"/>
+              </a:rPr>
+              <a:t>才是力量！</a:t>
+            </a:r>
+          </a:p>
+          <a:p>
+            <a:pPr>
+              <a:lnSpc>
+                <a:spcPct val="125000"/>
+              </a:lnSpc>
+              <a:spcAft>
+                <a:spcPts val="600"/>
+              </a:spcAft>
+              <a:defRPr>
+                <a:latin typeface="Microsoft JhengHei"/>
+              </a:defRPr>
+            </a:pPr>
+            <a:r>
+              <a:rPr sz="2000">
+                <a:solidFill>
+                  <a:srgbClr val="1B1B1F"/>
+                </a:solidFill>
+                <a:latin typeface="Microsoft JhengHei"/>
+              </a:rPr>
               <a:t>今日回家就做這三件事：</a:t>
             </a:r>
           </a:p>
           <a:p>
             <a:pPr lvl="1">
-              <a:spcAft>
-                <a:spcPts val="1000"/>
-              </a:spcAft>
-              <a:defRPr sz="1800">
-                <a:solidFill>
-                  <a:srgbClr val="FFFFFF"/>
-                </a:solidFill>
-                <a:latin typeface="Microsoft JhengHei"/>
-              </a:defRPr>
-            </a:pPr>
-            <a:r>
-              <a:t>**1. 下載安裝 Obsidian** 並建立名為「我的學習筆記」的 Vault</a:t>
+              <a:lnSpc>
+                <a:spcPct val="125000"/>
+              </a:lnSpc>
+              <a:spcAft>
+                <a:spcPts val="600"/>
+              </a:spcAft>
+              <a:defRPr>
+                <a:latin typeface="Microsoft JhengHei"/>
+              </a:defRPr>
+            </a:pPr>
+            <a:r>
+              <a:rPr sz="1800" b="1">
+                <a:solidFill>
+                  <a:srgbClr val="1B1B1F"/>
+                </a:solidFill>
+                <a:latin typeface="Microsoft JhengHei"/>
+              </a:rPr>
+              <a:t>1. 下載安裝 Obsidian</a:t>
+            </a:r>
+            <a:r>
+              <a:rPr sz="1800">
+                <a:solidFill>
+                  <a:srgbClr val="1B1B1F"/>
+                </a:solidFill>
+                <a:latin typeface="Microsoft JhengHei"/>
+              </a:rPr>
+              <a:t> 並建立名為「我的學習筆記」的 Vault</a:t>
             </a:r>
           </a:p>
           <a:p>
             <a:pPr lvl="1">
-              <a:spcAft>
-                <a:spcPts val="1000"/>
-              </a:spcAft>
-              <a:defRPr sz="1800">
-                <a:solidFill>
-                  <a:srgbClr val="FFFFFF"/>
-                </a:solidFill>
-                <a:latin typeface="Microsoft JhengHei"/>
-              </a:defRPr>
-            </a:pPr>
-            <a:r>
-              <a:t>**2. 建立 PARA 四大資料夾結構**</a:t>
+              <a:lnSpc>
+                <a:spcPct val="125000"/>
+              </a:lnSpc>
+              <a:spcAft>
+                <a:spcPts val="600"/>
+              </a:spcAft>
+              <a:defRPr>
+                <a:latin typeface="Microsoft JhengHei"/>
+              </a:defRPr>
+            </a:pPr>
+            <a:r>
+              <a:rPr sz="1800" b="1">
+                <a:solidFill>
+                  <a:srgbClr val="1B1B1F"/>
+                </a:solidFill>
+                <a:latin typeface="Microsoft JhengHei"/>
+              </a:rPr>
+              <a:t>2. 建立 PARA 四大資料夾結構</a:t>
             </a:r>
           </a:p>
           <a:p>
             <a:pPr lvl="1">
-              <a:spcAft>
-                <a:spcPts val="1000"/>
-              </a:spcAft>
-              <a:defRPr sz="1800">
-                <a:solidFill>
-                  <a:srgbClr val="FFFFFF"/>
-                </a:solidFill>
-                <a:latin typeface="Microsoft JhengHei"/>
-              </a:defRPr>
-            </a:pPr>
-            <a:r>
-              <a:t>**3. 寫下第一篇課堂筆記，並建立第一個雙向連結**</a:t>
+              <a:lnSpc>
+                <a:spcPct val="125000"/>
+              </a:lnSpc>
+              <a:spcAft>
+                <a:spcPts val="600"/>
+              </a:spcAft>
+              <a:defRPr>
+                <a:latin typeface="Microsoft JhengHei"/>
+              </a:defRPr>
+            </a:pPr>
+            <a:r>
+              <a:rPr sz="1800" b="1">
+                <a:solidFill>
+                  <a:srgbClr val="1B1B1F"/>
+                </a:solidFill>
+                <a:latin typeface="Microsoft JhengHei"/>
+              </a:rPr>
+              <a:t>3. 寫下第一篇課堂筆記，並建立第一個雙向連結</a:t>
             </a:r>
           </a:p>
           <a:p>
             <a:pPr>
-              <a:spcAft>
-                <a:spcPts val="1000"/>
-              </a:spcAft>
-              <a:defRPr sz="2000">
-                <a:solidFill>
-                  <a:srgbClr val="FFFFFF"/>
-                </a:solidFill>
-                <a:latin typeface="Microsoft JhengHei"/>
-              </a:defRPr>
-            </a:pPr>
-            <a:r>
+              <a:lnSpc>
+                <a:spcPct val="125000"/>
+              </a:lnSpc>
+              <a:spcAft>
+                <a:spcPts val="600"/>
+              </a:spcAft>
+              <a:defRPr>
+                <a:latin typeface="Microsoft JhengHei"/>
+              </a:defRPr>
+            </a:pPr>
+            <a:r>
+              <a:rPr sz="2000">
+                <a:solidFill>
+                  <a:srgbClr val="1B1B1F"/>
+                </a:solidFill>
+                <a:latin typeface="Microsoft JhengHei"/>
+              </a:rPr>
               <a:t>十年後的你，會感謝今天開始整理的自己。祝您學習愉快！🎉</a:t>
             </a:r>
           </a:p>
@@ -6934,7 +8560,7 @@
     <p:bg>
       <p:bgPr>
         <a:solidFill>
-          <a:srgbClr val="1E1E24"/>
+          <a:srgbClr val="F5F5F7"/>
         </a:solidFill>
         <a:effectLst/>
       </p:bgPr>
@@ -6948,59 +8574,25 @@
       <p:grpSpPr/>
       <p:sp>
         <p:nvSpPr>
-          <p:cNvPr id="2" name="TextBox 1"/>
-          <p:cNvSpPr txBox="1"/>
-          <p:nvPr/>
-        </p:nvSpPr>
-        <p:spPr>
-          <a:xfrm>
-            <a:off x="731520" y="365760"/>
-            <a:ext cx="10725912" cy="731520"/>
-          </a:xfrm>
-          <a:prstGeom prst="rect">
-            <a:avLst/>
-          </a:prstGeom>
-          <a:noFill/>
-        </p:spPr>
-        <p:txBody>
-          <a:bodyPr wrap="square" lIns="0" tIns="0" rIns="0" bIns="0">
-            <a:spAutoFit/>
-          </a:bodyPr>
-          <a:lstStyle/>
-          <a:p>
-            <a:pPr>
-              <a:defRPr sz="3600" b="1">
-                <a:solidFill>
-                  <a:srgbClr val="00E5FF"/>
-                </a:solidFill>
-                <a:latin typeface="Microsoft JhengHei"/>
-              </a:defRPr>
-            </a:pPr>
-            <a:r>
-              <a:t>什麼是第二大腦與 CODE 法則？</a:t>
-            </a:r>
-          </a:p>
-        </p:txBody>
-      </p:sp>
-      <p:sp>
-        <p:nvSpPr>
-          <p:cNvPr id="3" name="Rectangle 2"/>
+          <p:cNvPr id="2" name="Rectangle 1"/>
           <p:cNvSpPr/>
           <p:nvPr/>
         </p:nvSpPr>
         <p:spPr>
           <a:xfrm>
-            <a:off x="731520" y="1371600"/>
-            <a:ext cx="10725912" cy="4754880"/>
+            <a:off x="731520" y="384048"/>
+            <a:ext cx="91440" cy="502920"/>
           </a:xfrm>
           <a:prstGeom prst="rect">
             <a:avLst/>
           </a:prstGeom>
           <a:solidFill>
-            <a:srgbClr val="2D2D35"/>
+            <a:srgbClr val="009688"/>
           </a:solidFill>
           <a:ln>
-            <a:noFill/>
+            <a:solidFill>
+              <a:srgbClr val="009688"/>
+            </a:solidFill>
           </a:ln>
         </p:spPr>
         <p:style>
@@ -7027,14 +8619,14 @@
       </p:sp>
       <p:sp>
         <p:nvSpPr>
-          <p:cNvPr id="4" name="TextBox 3"/>
+          <p:cNvPr id="3" name="TextBox 2"/>
           <p:cNvSpPr txBox="1"/>
           <p:nvPr/>
         </p:nvSpPr>
         <p:spPr>
           <a:xfrm>
-            <a:off x="1097280" y="1645920"/>
-            <a:ext cx="9994392" cy="4206240"/>
+            <a:off x="960120" y="320040"/>
+            <a:ext cx="10497312" cy="731520"/>
           </a:xfrm>
           <a:prstGeom prst="rect">
             <a:avLst/>
@@ -7048,98 +8640,260 @@
           <a:lstStyle/>
           <a:p>
             <a:pPr>
-              <a:spcAft>
-                <a:spcPts val="1000"/>
-              </a:spcAft>
-              <a:defRPr sz="2000">
-                <a:solidFill>
-                  <a:srgbClr val="FFFFFF"/>
-                </a:solidFill>
-                <a:latin typeface="Microsoft JhengHei"/>
-              </a:defRPr>
-            </a:pPr>
-            <a:r>
+              <a:defRPr sz="3600" b="1">
+                <a:solidFill>
+                  <a:srgbClr val="009688"/>
+                </a:solidFill>
+                <a:latin typeface="Microsoft JhengHei"/>
+              </a:defRPr>
+            </a:pPr>
+            <a:r>
+              <a:t>什麼是第二大腦與 CODE 法則？</a:t>
+            </a:r>
+          </a:p>
+        </p:txBody>
+      </p:sp>
+      <p:sp>
+        <p:nvSpPr>
+          <p:cNvPr id="4" name="Rectangle 3"/>
+          <p:cNvSpPr/>
+          <p:nvPr/>
+        </p:nvSpPr>
+        <p:spPr>
+          <a:xfrm>
+            <a:off x="731520" y="1371600"/>
+            <a:ext cx="10725912" cy="4754880"/>
+          </a:xfrm>
+          <a:prstGeom prst="rect">
+            <a:avLst/>
+          </a:prstGeom>
+          <a:solidFill>
+            <a:srgbClr val="FFFFFF"/>
+          </a:solidFill>
+          <a:ln w="19050">
+            <a:solidFill>
+              <a:srgbClr val="DADEE5"/>
+            </a:solidFill>
+          </a:ln>
+        </p:spPr>
+        <p:style>
+          <a:lnRef idx="1">
+            <a:schemeClr val="accent1"/>
+          </a:lnRef>
+          <a:fillRef idx="3">
+            <a:schemeClr val="accent1"/>
+          </a:fillRef>
+          <a:effectRef idx="2">
+            <a:schemeClr val="accent1"/>
+          </a:effectRef>
+          <a:fontRef idx="minor">
+            <a:schemeClr val="lt1"/>
+          </a:fontRef>
+        </p:style>
+        <p:txBody>
+          <a:bodyPr rtlCol="0" anchor="ctr"/>
+          <a:lstStyle/>
+          <a:p>
+            <a:pPr algn="ctr"/>
+          </a:p>
+        </p:txBody>
+      </p:sp>
+      <p:sp>
+        <p:nvSpPr>
+          <p:cNvPr id="5" name="TextBox 4"/>
+          <p:cNvSpPr txBox="1"/>
+          <p:nvPr/>
+        </p:nvSpPr>
+        <p:spPr>
+          <a:xfrm>
+            <a:off x="1097280" y="1645920"/>
+            <a:ext cx="9994392" cy="4206240"/>
+          </a:xfrm>
+          <a:prstGeom prst="rect">
+            <a:avLst/>
+          </a:prstGeom>
+          <a:noFill/>
+        </p:spPr>
+        <p:txBody>
+          <a:bodyPr wrap="square" lIns="228600" rIns="228600" tIns="228600" bIns="228600">
+            <a:spAutoFit/>
+          </a:bodyPr>
+          <a:lstStyle/>
+          <a:p>
+            <a:pPr>
+              <a:lnSpc>
+                <a:spcPct val="125000"/>
+              </a:lnSpc>
+              <a:spcAft>
+                <a:spcPts val="600"/>
+              </a:spcAft>
+              <a:defRPr>
+                <a:latin typeface="Microsoft JhengHei"/>
+              </a:defRPr>
+            </a:pPr>
+            <a:r>
+              <a:rPr sz="2000">
+                <a:solidFill>
+                  <a:srgbClr val="1B1B1F"/>
+                </a:solidFill>
+                <a:latin typeface="Microsoft JhengHei"/>
+              </a:rPr>
               <a:t>第二大腦是個人化的數位思考外掛與系統，幫助我們管理知識與生活</a:t>
             </a:r>
           </a:p>
           <a:p>
             <a:pPr>
-              <a:spcAft>
-                <a:spcPts val="1000"/>
-              </a:spcAft>
-              <a:defRPr sz="2000">
-                <a:solidFill>
-                  <a:srgbClr val="FFFFFF"/>
-                </a:solidFill>
-                <a:latin typeface="Microsoft JhengHei"/>
-              </a:defRPr>
-            </a:pPr>
-            <a:r>
-              <a:t>**CODE 法則的四個步驟**：</a:t>
+              <a:lnSpc>
+                <a:spcPct val="125000"/>
+              </a:lnSpc>
+              <a:spcAft>
+                <a:spcPts val="600"/>
+              </a:spcAft>
+              <a:defRPr>
+                <a:latin typeface="Microsoft JhengHei"/>
+              </a:defRPr>
+            </a:pPr>
+            <a:r>
+              <a:rPr sz="2000" b="1">
+                <a:solidFill>
+                  <a:srgbClr val="1B1B1F"/>
+                </a:solidFill>
+                <a:latin typeface="Microsoft JhengHei"/>
+              </a:rPr>
+              <a:t>CODE 法則的四個步驟</a:t>
+            </a:r>
+            <a:r>
+              <a:rPr sz="2000">
+                <a:solidFill>
+                  <a:srgbClr val="1B1B1F"/>
+                </a:solidFill>
+                <a:latin typeface="Microsoft JhengHei"/>
+              </a:rPr>
+              <a:t>：</a:t>
             </a:r>
           </a:p>
           <a:p>
             <a:pPr lvl="1">
-              <a:spcAft>
-                <a:spcPts val="1000"/>
-              </a:spcAft>
-              <a:defRPr sz="1800">
-                <a:solidFill>
-                  <a:srgbClr val="FFFFFF"/>
-                </a:solidFill>
-                <a:latin typeface="Microsoft JhengHei"/>
-              </a:defRPr>
-            </a:pPr>
-            <a:r>
-              <a:t>**Capture (捕捉)**: 快速記錄有價值的靈感與課堂資料</a:t>
+              <a:lnSpc>
+                <a:spcPct val="125000"/>
+              </a:lnSpc>
+              <a:spcAft>
+                <a:spcPts val="600"/>
+              </a:spcAft>
+              <a:defRPr>
+                <a:latin typeface="Microsoft JhengHei"/>
+              </a:defRPr>
+            </a:pPr>
+            <a:r>
+              <a:rPr sz="1800" b="1">
+                <a:solidFill>
+                  <a:srgbClr val="1B1B1F"/>
+                </a:solidFill>
+                <a:latin typeface="Microsoft JhengHei"/>
+              </a:rPr>
+              <a:t>Capture (捕捉)</a:t>
+            </a:r>
+            <a:r>
+              <a:rPr sz="1800">
+                <a:solidFill>
+                  <a:srgbClr val="1B1B1F"/>
+                </a:solidFill>
+                <a:latin typeface="Microsoft JhengHei"/>
+              </a:rPr>
+              <a:t>: 快速記錄有價值的靈感與課堂資料</a:t>
             </a:r>
           </a:p>
           <a:p>
             <a:pPr lvl="1">
-              <a:spcAft>
-                <a:spcPts val="1000"/>
-              </a:spcAft>
-              <a:defRPr sz="1800">
-                <a:solidFill>
-                  <a:srgbClr val="FFFFFF"/>
-                </a:solidFill>
-                <a:latin typeface="Microsoft JhengHei"/>
-              </a:defRPr>
-            </a:pPr>
-            <a:r>
-              <a:t>**Organize (整理)**: 將收集來的資訊分類歸檔，便於未來存取</a:t>
+              <a:lnSpc>
+                <a:spcPct val="125000"/>
+              </a:lnSpc>
+              <a:spcAft>
+                <a:spcPts val="600"/>
+              </a:spcAft>
+              <a:defRPr>
+                <a:latin typeface="Microsoft JhengHei"/>
+              </a:defRPr>
+            </a:pPr>
+            <a:r>
+              <a:rPr sz="1800" b="1">
+                <a:solidFill>
+                  <a:srgbClr val="1B1B1F"/>
+                </a:solidFill>
+                <a:latin typeface="Microsoft JhengHei"/>
+              </a:rPr>
+              <a:t>Organize (整理)</a:t>
+            </a:r>
+            <a:r>
+              <a:rPr sz="1800">
+                <a:solidFill>
+                  <a:srgbClr val="1B1B1F"/>
+                </a:solidFill>
+                <a:latin typeface="Microsoft JhengHei"/>
+              </a:rPr>
+              <a:t>: 將收集來的資訊分類歸檔，便於未來存取</a:t>
             </a:r>
           </a:p>
           <a:p>
             <a:pPr lvl="1">
-              <a:spcAft>
-                <a:spcPts val="1000"/>
-              </a:spcAft>
-              <a:defRPr sz="1800">
-                <a:solidFill>
-                  <a:srgbClr val="FFFFFF"/>
-                </a:solidFill>
-                <a:latin typeface="Microsoft JhengHei"/>
-              </a:defRPr>
-            </a:pPr>
-            <a:r>
-              <a:t>**Distill (萃取)**: 提煉文章或課堂的精華重點與核心觀念</a:t>
+              <a:lnSpc>
+                <a:spcPct val="125000"/>
+              </a:lnSpc>
+              <a:spcAft>
+                <a:spcPts val="600"/>
+              </a:spcAft>
+              <a:defRPr>
+                <a:latin typeface="Microsoft JhengHei"/>
+              </a:defRPr>
+            </a:pPr>
+            <a:r>
+              <a:rPr sz="1800" b="1">
+                <a:solidFill>
+                  <a:srgbClr val="1B1B1F"/>
+                </a:solidFill>
+                <a:latin typeface="Microsoft JhengHei"/>
+              </a:rPr>
+              <a:t>Distill (萃取)</a:t>
+            </a:r>
+            <a:r>
+              <a:rPr sz="1800">
+                <a:solidFill>
+                  <a:srgbClr val="1B1B1F"/>
+                </a:solidFill>
+                <a:latin typeface="Microsoft JhengHei"/>
+              </a:rPr>
+              <a:t>: 提煉文章或課堂的精華重點與核心觀念</a:t>
             </a:r>
           </a:p>
           <a:p>
             <a:pPr lvl="1">
-              <a:spcAft>
-                <a:spcPts val="1000"/>
-              </a:spcAft>
-              <a:defRPr sz="1800">
-                <a:solidFill>
-                  <a:srgbClr val="FFFFFF"/>
-                </a:solidFill>
-                <a:latin typeface="Microsoft JhengHei"/>
-              </a:defRPr>
-            </a:pPr>
-            <a:r>
-              <a:t>**Express (表達)**: 整合所學，產出期末報告、簡報或作文</a:t>
+              <a:lnSpc>
+                <a:spcPct val="125000"/>
+              </a:lnSpc>
+              <a:spcAft>
+                <a:spcPts val="600"/>
+              </a:spcAft>
+              <a:defRPr>
+                <a:latin typeface="Microsoft JhengHei"/>
+              </a:defRPr>
+            </a:pPr>
+            <a:r>
+              <a:rPr sz="1800" b="1">
+                <a:solidFill>
+                  <a:srgbClr val="1B1B1F"/>
+                </a:solidFill>
+                <a:latin typeface="Microsoft JhengHei"/>
+              </a:rPr>
+              <a:t>Express (表達)</a:t>
+            </a:r>
+            <a:r>
+              <a:rPr sz="1800">
+                <a:solidFill>
+                  <a:srgbClr val="1B1B1F"/>
+                </a:solidFill>
+                <a:latin typeface="Microsoft JhengHei"/>
+              </a:rPr>
+              <a:t>: 整合所學，產出期末報告、簡報或作文</a:t>
             </a:r>
           </a:p>
         </p:txBody>
@@ -7158,7 +8912,7 @@
     <p:bg>
       <p:bgPr>
         <a:solidFill>
-          <a:srgbClr val="1E1E24"/>
+          <a:srgbClr val="F5F5F7"/>
         </a:solidFill>
         <a:effectLst/>
       </p:bgPr>
@@ -7172,59 +8926,25 @@
       <p:grpSpPr/>
       <p:sp>
         <p:nvSpPr>
-          <p:cNvPr id="2" name="TextBox 1"/>
-          <p:cNvSpPr txBox="1"/>
-          <p:nvPr/>
-        </p:nvSpPr>
-        <p:spPr>
-          <a:xfrm>
-            <a:off x="731520" y="365760"/>
-            <a:ext cx="10725912" cy="731520"/>
-          </a:xfrm>
-          <a:prstGeom prst="rect">
-            <a:avLst/>
-          </a:prstGeom>
-          <a:noFill/>
-        </p:spPr>
-        <p:txBody>
-          <a:bodyPr wrap="square" lIns="0" tIns="0" rIns="0" bIns="0">
-            <a:spAutoFit/>
-          </a:bodyPr>
-          <a:lstStyle/>
-          <a:p>
-            <a:pPr>
-              <a:defRPr sz="3600" b="1">
-                <a:solidFill>
-                  <a:srgbClr val="00E5FF"/>
-                </a:solidFill>
-                <a:latin typeface="Microsoft JhengHei"/>
-              </a:defRPr>
-            </a:pPr>
-            <a:r>
-              <a:t>Obsidian 的三大核心堅持</a:t>
-            </a:r>
-          </a:p>
-        </p:txBody>
-      </p:sp>
-      <p:sp>
-        <p:nvSpPr>
-          <p:cNvPr id="3" name="Rectangle 2"/>
+          <p:cNvPr id="2" name="Rectangle 1"/>
           <p:cNvSpPr/>
           <p:nvPr/>
         </p:nvSpPr>
         <p:spPr>
           <a:xfrm>
-            <a:off x="731520" y="1371600"/>
-            <a:ext cx="10725912" cy="4754880"/>
+            <a:off x="731520" y="384048"/>
+            <a:ext cx="91440" cy="502920"/>
           </a:xfrm>
           <a:prstGeom prst="rect">
             <a:avLst/>
           </a:prstGeom>
           <a:solidFill>
-            <a:srgbClr val="2D2D35"/>
+            <a:srgbClr val="009688"/>
           </a:solidFill>
           <a:ln>
-            <a:noFill/>
+            <a:solidFill>
+              <a:srgbClr val="009688"/>
+            </a:solidFill>
           </a:ln>
         </p:spPr>
         <p:style>
@@ -7251,14 +8971,14 @@
       </p:sp>
       <p:sp>
         <p:nvSpPr>
-          <p:cNvPr id="4" name="TextBox 3"/>
+          <p:cNvPr id="3" name="TextBox 2"/>
           <p:cNvSpPr txBox="1"/>
           <p:nvPr/>
         </p:nvSpPr>
         <p:spPr>
           <a:xfrm>
-            <a:off x="1097280" y="1645920"/>
-            <a:ext cx="9994392" cy="4206240"/>
+            <a:off x="960120" y="320040"/>
+            <a:ext cx="10497312" cy="731520"/>
           </a:xfrm>
           <a:prstGeom prst="rect">
             <a:avLst/>
@@ -7272,97 +8992,232 @@
           <a:lstStyle/>
           <a:p>
             <a:pPr>
-              <a:spcAft>
-                <a:spcPts val="1000"/>
-              </a:spcAft>
-              <a:defRPr sz="2000">
-                <a:solidFill>
-                  <a:srgbClr val="FFFFFF"/>
-                </a:solidFill>
-                <a:latin typeface="Microsoft JhengHei"/>
-              </a:defRPr>
-            </a:pPr>
-            <a:r>
-              <a:t>**1. 本地優先 (Local-first)**</a:t>
+              <a:defRPr sz="3600" b="1">
+                <a:solidFill>
+                  <a:srgbClr val="009688"/>
+                </a:solidFill>
+                <a:latin typeface="Microsoft JhengHei"/>
+              </a:defRPr>
+            </a:pPr>
+            <a:r>
+              <a:t>Obsidian 的三大核心堅持</a:t>
+            </a:r>
+          </a:p>
+        </p:txBody>
+      </p:sp>
+      <p:sp>
+        <p:nvSpPr>
+          <p:cNvPr id="4" name="Rectangle 3"/>
+          <p:cNvSpPr/>
+          <p:nvPr/>
+        </p:nvSpPr>
+        <p:spPr>
+          <a:xfrm>
+            <a:off x="731520" y="1371600"/>
+            <a:ext cx="10725912" cy="4754880"/>
+          </a:xfrm>
+          <a:prstGeom prst="rect">
+            <a:avLst/>
+          </a:prstGeom>
+          <a:solidFill>
+            <a:srgbClr val="FFFFFF"/>
+          </a:solidFill>
+          <a:ln w="19050">
+            <a:solidFill>
+              <a:srgbClr val="DADEE5"/>
+            </a:solidFill>
+          </a:ln>
+        </p:spPr>
+        <p:style>
+          <a:lnRef idx="1">
+            <a:schemeClr val="accent1"/>
+          </a:lnRef>
+          <a:fillRef idx="3">
+            <a:schemeClr val="accent1"/>
+          </a:fillRef>
+          <a:effectRef idx="2">
+            <a:schemeClr val="accent1"/>
+          </a:effectRef>
+          <a:fontRef idx="minor">
+            <a:schemeClr val="lt1"/>
+          </a:fontRef>
+        </p:style>
+        <p:txBody>
+          <a:bodyPr rtlCol="0" anchor="ctr"/>
+          <a:lstStyle/>
+          <a:p>
+            <a:pPr algn="ctr"/>
+          </a:p>
+        </p:txBody>
+      </p:sp>
+      <p:sp>
+        <p:nvSpPr>
+          <p:cNvPr id="5" name="TextBox 4"/>
+          <p:cNvSpPr txBox="1"/>
+          <p:nvPr/>
+        </p:nvSpPr>
+        <p:spPr>
+          <a:xfrm>
+            <a:off x="1097280" y="1645920"/>
+            <a:ext cx="9994392" cy="4206240"/>
+          </a:xfrm>
+          <a:prstGeom prst="rect">
+            <a:avLst/>
+          </a:prstGeom>
+          <a:noFill/>
+        </p:spPr>
+        <p:txBody>
+          <a:bodyPr wrap="square" lIns="228600" rIns="228600" tIns="228600" bIns="228600">
+            <a:spAutoFit/>
+          </a:bodyPr>
+          <a:lstStyle/>
+          <a:p>
+            <a:pPr>
+              <a:lnSpc>
+                <a:spcPct val="125000"/>
+              </a:lnSpc>
+              <a:spcAft>
+                <a:spcPts val="600"/>
+              </a:spcAft>
+              <a:defRPr>
+                <a:latin typeface="Microsoft JhengHei"/>
+              </a:defRPr>
+            </a:pPr>
+            <a:r>
+              <a:rPr sz="2000" b="1">
+                <a:solidFill>
+                  <a:srgbClr val="1B1B1F"/>
+                </a:solidFill>
+                <a:latin typeface="Microsoft JhengHei"/>
+              </a:rPr>
+              <a:t>1. 本地優先 (Local-first)</a:t>
             </a:r>
           </a:p>
           <a:p>
             <a:pPr lvl="1">
-              <a:spcAft>
-                <a:spcPts val="1000"/>
-              </a:spcAft>
-              <a:defRPr sz="1800">
-                <a:solidFill>
-                  <a:srgbClr val="FFFFFF"/>
-                </a:solidFill>
-                <a:latin typeface="Microsoft JhengHei"/>
-              </a:defRPr>
-            </a:pPr>
-            <a:r>
+              <a:lnSpc>
+                <a:spcPct val="125000"/>
+              </a:lnSpc>
+              <a:spcAft>
+                <a:spcPts val="600"/>
+              </a:spcAft>
+              <a:defRPr>
+                <a:latin typeface="Microsoft JhengHei"/>
+              </a:defRPr>
+            </a:pPr>
+            <a:r>
+              <a:rPr sz="1800">
+                <a:solidFill>
+                  <a:srgbClr val="1B1B1F"/>
+                </a:solidFill>
+                <a:latin typeface="Microsoft JhengHei"/>
+              </a:rPr>
               <a:t>所有筆記檔案直接儲存在你的本機電腦，安全、私密且完全離線可用</a:t>
             </a:r>
           </a:p>
           <a:p>
             <a:pPr>
-              <a:spcAft>
-                <a:spcPts val="1000"/>
-              </a:spcAft>
-              <a:defRPr sz="2000">
-                <a:solidFill>
-                  <a:srgbClr val="FFFFFF"/>
-                </a:solidFill>
-                <a:latin typeface="Microsoft JhengHei"/>
-              </a:defRPr>
-            </a:pPr>
-            <a:r>
-              <a:t>**2. 純文字檔案 (Markdown)**</a:t>
+              <a:lnSpc>
+                <a:spcPct val="125000"/>
+              </a:lnSpc>
+              <a:spcAft>
+                <a:spcPts val="600"/>
+              </a:spcAft>
+              <a:defRPr>
+                <a:latin typeface="Microsoft JhengHei"/>
+              </a:defRPr>
+            </a:pPr>
+            <a:r>
+              <a:rPr sz="2000" b="1">
+                <a:solidFill>
+                  <a:srgbClr val="1B1B1F"/>
+                </a:solidFill>
+                <a:latin typeface="Microsoft JhengHei"/>
+              </a:rPr>
+              <a:t>2. 純文字檔案 (Markdown)</a:t>
             </a:r>
           </a:p>
           <a:p>
             <a:pPr lvl="1">
-              <a:spcAft>
-                <a:spcPts val="1000"/>
-              </a:spcAft>
-              <a:defRPr sz="1800">
-                <a:solidFill>
-                  <a:srgbClr val="FFFFFF"/>
-                </a:solidFill>
-                <a:latin typeface="Microsoft JhengHei"/>
-              </a:defRPr>
-            </a:pPr>
-            <a:r>
-              <a:t>筆記採用標準的 `.md` 格式，不用擔心軟體倒閉，50 年後依然能打開</a:t>
+              <a:lnSpc>
+                <a:spcPct val="125000"/>
+              </a:lnSpc>
+              <a:spcAft>
+                <a:spcPts val="600"/>
+              </a:spcAft>
+              <a:defRPr>
+                <a:latin typeface="Microsoft JhengHei"/>
+              </a:defRPr>
+            </a:pPr>
+            <a:r>
+              <a:rPr sz="1800">
+                <a:solidFill>
+                  <a:srgbClr val="1B1B1F"/>
+                </a:solidFill>
+                <a:latin typeface="Microsoft JhengHei"/>
+              </a:rPr>
+              <a:t>筆記採用標準的 </a:t>
+            </a:r>
+            <a:r>
+              <a:rPr sz="1800" b="1">
+                <a:solidFill>
+                  <a:srgbClr val="673AB7"/>
+                </a:solidFill>
+                <a:latin typeface="Consolas"/>
+              </a:rPr>
+              <a:t>.md</a:t>
+            </a:r>
+            <a:r>
+              <a:rPr sz="1800">
+                <a:solidFill>
+                  <a:srgbClr val="1B1B1F"/>
+                </a:solidFill>
+                <a:latin typeface="Microsoft JhengHei"/>
+              </a:rPr>
+              <a:t> 格式，不用擔心軟體倒閉，50 年後依然能打開</a:t>
             </a:r>
           </a:p>
           <a:p>
             <a:pPr>
-              <a:spcAft>
-                <a:spcPts val="1000"/>
-              </a:spcAft>
-              <a:defRPr sz="2000">
-                <a:solidFill>
-                  <a:srgbClr val="FFFFFF"/>
-                </a:solidFill>
-                <a:latin typeface="Microsoft JhengHei"/>
-              </a:defRPr>
-            </a:pPr>
-            <a:r>
-              <a:t>**3. 雙向連結 (Networked)**</a:t>
+              <a:lnSpc>
+                <a:spcPct val="125000"/>
+              </a:lnSpc>
+              <a:spcAft>
+                <a:spcPts val="600"/>
+              </a:spcAft>
+              <a:defRPr>
+                <a:latin typeface="Microsoft JhengHei"/>
+              </a:defRPr>
+            </a:pPr>
+            <a:r>
+              <a:rPr sz="2000" b="1">
+                <a:solidFill>
+                  <a:srgbClr val="1B1B1F"/>
+                </a:solidFill>
+                <a:latin typeface="Microsoft JhengHei"/>
+              </a:rPr>
+              <a:t>3. 雙向連結 (Networked)</a:t>
             </a:r>
           </a:p>
           <a:p>
             <a:pPr lvl="1">
-              <a:spcAft>
-                <a:spcPts val="1000"/>
-              </a:spcAft>
-              <a:defRPr sz="1800">
-                <a:solidFill>
-                  <a:srgbClr val="FFFFFF"/>
-                </a:solidFill>
-                <a:latin typeface="Microsoft JhengHei"/>
-              </a:defRPr>
-            </a:pPr>
-            <a:r>
+              <a:lnSpc>
+                <a:spcPct val="125000"/>
+              </a:lnSpc>
+              <a:spcAft>
+                <a:spcPts val="600"/>
+              </a:spcAft>
+              <a:defRPr>
+                <a:latin typeface="Microsoft JhengHei"/>
+              </a:defRPr>
+            </a:pPr>
+            <a:r>
+              <a:rPr sz="1800">
+                <a:solidFill>
+                  <a:srgbClr val="1B1B1F"/>
+                </a:solidFill>
+                <a:latin typeface="Microsoft JhengHei"/>
+              </a:rPr>
               <a:t>筆記之間能互相串連，模擬大腦神經元，以網狀連結取代古板的樹狀資料夾</a:t>
             </a:r>
           </a:p>
@@ -7382,7 +9237,7 @@
     <p:bg>
       <p:bgPr>
         <a:solidFill>
-          <a:srgbClr val="1E1E24"/>
+          <a:srgbClr val="F5F5F7"/>
         </a:solidFill>
         <a:effectLst/>
       </p:bgPr>
@@ -7396,59 +9251,25 @@
       <p:grpSpPr/>
       <p:sp>
         <p:nvSpPr>
-          <p:cNvPr id="2" name="TextBox 1"/>
-          <p:cNvSpPr txBox="1"/>
-          <p:nvPr/>
-        </p:nvSpPr>
-        <p:spPr>
-          <a:xfrm>
-            <a:off x="731520" y="365760"/>
-            <a:ext cx="10725912" cy="731520"/>
-          </a:xfrm>
-          <a:prstGeom prst="rect">
-            <a:avLst/>
-          </a:prstGeom>
-          <a:noFill/>
-        </p:spPr>
-        <p:txBody>
-          <a:bodyPr wrap="square" lIns="0" tIns="0" rIns="0" bIns="0">
-            <a:spAutoFit/>
-          </a:bodyPr>
-          <a:lstStyle/>
-          <a:p>
-            <a:pPr>
-              <a:defRPr sz="3600" b="1">
-                <a:solidFill>
-                  <a:srgbClr val="00E5FF"/>
-                </a:solidFill>
-                <a:latin typeface="Microsoft JhengHei"/>
-              </a:defRPr>
-            </a:pPr>
-            <a:r>
-              <a:t>主流筆記工具大比拼</a:t>
-            </a:r>
-          </a:p>
-        </p:txBody>
-      </p:sp>
-      <p:sp>
-        <p:nvSpPr>
-          <p:cNvPr id="3" name="Rectangle 2"/>
+          <p:cNvPr id="2" name="Rectangle 1"/>
           <p:cNvSpPr/>
           <p:nvPr/>
         </p:nvSpPr>
         <p:spPr>
           <a:xfrm>
-            <a:off x="731520" y="1371600"/>
-            <a:ext cx="5120640" cy="4754880"/>
+            <a:off x="731520" y="384048"/>
+            <a:ext cx="91440" cy="502920"/>
           </a:xfrm>
           <a:prstGeom prst="rect">
             <a:avLst/>
           </a:prstGeom>
           <a:solidFill>
-            <a:srgbClr val="2D2D35"/>
+            <a:srgbClr val="009688"/>
           </a:solidFill>
           <a:ln>
-            <a:noFill/>
+            <a:solidFill>
+              <a:srgbClr val="009688"/>
+            </a:solidFill>
           </a:ln>
         </p:spPr>
         <p:style>
@@ -7475,14 +9296,14 @@
       </p:sp>
       <p:sp>
         <p:nvSpPr>
-          <p:cNvPr id="4" name="TextBox 3"/>
+          <p:cNvPr id="3" name="TextBox 2"/>
           <p:cNvSpPr txBox="1"/>
           <p:nvPr/>
         </p:nvSpPr>
         <p:spPr>
           <a:xfrm>
-            <a:off x="1005840" y="1554480"/>
-            <a:ext cx="4572000" cy="548640"/>
+            <a:off x="960120" y="320040"/>
+            <a:ext cx="10497312" cy="731520"/>
           </a:xfrm>
           <a:prstGeom prst="rect">
             <a:avLst/>
@@ -7490,131 +9311,46 @@
           <a:noFill/>
         </p:spPr>
         <p:txBody>
-          <a:bodyPr wrap="none">
-            <a:spAutoFit/>
-          </a:bodyPr>
-          <a:lstStyle/>
-          <a:p>
-            <a:pPr>
-              <a:defRPr sz="2200" b="1">
-                <a:solidFill>
-                  <a:srgbClr val="7C4DFF"/>
-                </a:solidFill>
-                <a:latin typeface="Microsoft JhengHei"/>
-              </a:defRPr>
-            </a:pPr>
-            <a:r>
-              <a:t>Obsidian (推薦選擇)</a:t>
-            </a:r>
-          </a:p>
-        </p:txBody>
-      </p:sp>
-      <p:sp>
-        <p:nvSpPr>
-          <p:cNvPr id="5" name="TextBox 4"/>
-          <p:cNvSpPr txBox="1"/>
-          <p:nvPr/>
-        </p:nvSpPr>
-        <p:spPr>
-          <a:xfrm>
-            <a:off x="1005840" y="2194560"/>
-            <a:ext cx="4572000" cy="3657600"/>
-          </a:xfrm>
-          <a:prstGeom prst="rect">
-            <a:avLst/>
-          </a:prstGeom>
-          <a:noFill/>
-        </p:spPr>
-        <p:txBody>
           <a:bodyPr wrap="square" lIns="0" tIns="0" rIns="0" bIns="0">
             <a:spAutoFit/>
           </a:bodyPr>
           <a:lstStyle/>
           <a:p>
             <a:pPr>
-              <a:spcAft>
-                <a:spcPts val="1000"/>
-              </a:spcAft>
-              <a:defRPr sz="1600">
-                <a:solidFill>
-                  <a:srgbClr val="FFFFFF"/>
-                </a:solidFill>
-                <a:latin typeface="Microsoft JhengHei"/>
-              </a:defRPr>
-            </a:pPr>
-            <a:r>
-              <a:t>完全免費且可離線使用</a:t>
-            </a:r>
-          </a:p>
-          <a:p>
-            <a:pPr>
-              <a:spcAft>
-                <a:spcPts val="1000"/>
-              </a:spcAft>
-              <a:defRPr sz="1600">
-                <a:solidFill>
-                  <a:srgbClr val="FFFFFF"/>
-                </a:solidFill>
-                <a:latin typeface="Microsoft JhengHei"/>
-              </a:defRPr>
-            </a:pPr>
-            <a:r>
-              <a:t>雙向連結與視覺化知識圖譜</a:t>
-            </a:r>
-          </a:p>
-          <a:p>
-            <a:pPr>
-              <a:spcAft>
-                <a:spcPts val="1000"/>
-              </a:spcAft>
-              <a:defRPr sz="1600">
-                <a:solidFill>
-                  <a:srgbClr val="FFFFFF"/>
-                </a:solidFill>
-                <a:latin typeface="Microsoft JhengHei"/>
-              </a:defRPr>
-            </a:pPr>
-            <a:r>
-              <a:t>檔案存在本地，完全擁有自主權</a:t>
-            </a:r>
-          </a:p>
-          <a:p>
-            <a:pPr>
-              <a:spcAft>
-                <a:spcPts val="1000"/>
-              </a:spcAft>
-              <a:defRPr sz="1600">
-                <a:solidFill>
-                  <a:srgbClr val="FFFFFF"/>
-                </a:solidFill>
-                <a:latin typeface="Microsoft JhengHei"/>
-              </a:defRPr>
-            </a:pPr>
-            <a:r>
-              <a:t>大量開源社群外掛，可任意擴充功能</a:t>
-            </a:r>
-          </a:p>
-        </p:txBody>
-      </p:sp>
-      <p:sp>
-        <p:nvSpPr>
-          <p:cNvPr id="6" name="Rectangle 5"/>
+              <a:defRPr sz="3600" b="1">
+                <a:solidFill>
+                  <a:srgbClr val="009688"/>
+                </a:solidFill>
+                <a:latin typeface="Microsoft JhengHei"/>
+              </a:defRPr>
+            </a:pPr>
+            <a:r>
+              <a:t>主流筆記工具大比拼</a:t>
+            </a:r>
+          </a:p>
+        </p:txBody>
+      </p:sp>
+      <p:sp>
+        <p:nvSpPr>
+          <p:cNvPr id="4" name="Rectangle 3"/>
           <p:cNvSpPr/>
           <p:nvPr/>
         </p:nvSpPr>
         <p:spPr>
           <a:xfrm>
-            <a:off x="6217920" y="1371600"/>
-            <a:ext cx="5212080" cy="4754880"/>
+            <a:off x="731520" y="1371600"/>
+            <a:ext cx="5120640" cy="4754880"/>
           </a:xfrm>
           <a:prstGeom prst="rect">
             <a:avLst/>
           </a:prstGeom>
           <a:solidFill>
-            <a:srgbClr val="2D2D35"/>
+            <a:srgbClr val="FFFFFF"/>
           </a:solidFill>
-          <a:ln>
-            <a:noFill/>
+          <a:ln w="19050">
+            <a:solidFill>
+              <a:srgbClr val="DADEE5"/>
+            </a:solidFill>
           </a:ln>
         </p:spPr>
         <p:style>
@@ -7641,14 +9377,14 @@
       </p:sp>
       <p:sp>
         <p:nvSpPr>
-          <p:cNvPr id="7" name="TextBox 6"/>
+          <p:cNvPr id="5" name="TextBox 4"/>
           <p:cNvSpPr txBox="1"/>
           <p:nvPr/>
         </p:nvSpPr>
         <p:spPr>
           <a:xfrm>
-            <a:off x="6492240" y="1554480"/>
-            <a:ext cx="4663440" cy="548640"/>
+            <a:off x="1005840" y="1554480"/>
+            <a:ext cx="4572000" cy="548640"/>
           </a:xfrm>
           <a:prstGeom prst="rect">
             <a:avLst/>
@@ -7664,27 +9400,27 @@
             <a:pPr>
               <a:defRPr sz="2200" b="1">
                 <a:solidFill>
-                  <a:srgbClr val="D1C4E9"/>
-                </a:solidFill>
-                <a:latin typeface="Microsoft JhengHei"/>
-              </a:defRPr>
-            </a:pPr>
-            <a:r>
-              <a:t>其他筆記軟體</a:t>
-            </a:r>
-          </a:p>
-        </p:txBody>
-      </p:sp>
-      <p:sp>
-        <p:nvSpPr>
-          <p:cNvPr id="8" name="TextBox 7"/>
+                  <a:srgbClr val="673AB7"/>
+                </a:solidFill>
+                <a:latin typeface="Microsoft JhengHei"/>
+              </a:defRPr>
+            </a:pPr>
+            <a:r>
+              <a:t>Obsidian (推薦選擇)</a:t>
+            </a:r>
+          </a:p>
+        </p:txBody>
+      </p:sp>
+      <p:sp>
+        <p:nvSpPr>
+          <p:cNvPr id="6" name="TextBox 5"/>
           <p:cNvSpPr txBox="1"/>
           <p:nvPr/>
         </p:nvSpPr>
         <p:spPr>
           <a:xfrm>
-            <a:off x="6492240" y="2194560"/>
-            <a:ext cx="4663440" cy="3657600"/>
+            <a:off x="1005840" y="2194560"/>
+            <a:ext cx="4572000" cy="3657600"/>
           </a:xfrm>
           <a:prstGeom prst="rect">
             <a:avLst/>
@@ -7692,55 +9428,265 @@
           <a:noFill/>
         </p:spPr>
         <p:txBody>
-          <a:bodyPr wrap="square" lIns="0" tIns="0" rIns="0" bIns="0">
+          <a:bodyPr wrap="square" lIns="228600" rIns="228600" tIns="228600" bIns="228600">
             <a:spAutoFit/>
           </a:bodyPr>
           <a:lstStyle/>
           <a:p>
             <a:pPr>
-              <a:spcAft>
-                <a:spcPts val="1000"/>
-              </a:spcAft>
-              <a:defRPr sz="1600">
-                <a:solidFill>
-                  <a:srgbClr val="FFFFFF"/>
-                </a:solidFill>
-                <a:latin typeface="Microsoft JhengHei"/>
-              </a:defRPr>
-            </a:pPr>
-            <a:r>
+              <a:lnSpc>
+                <a:spcPct val="125000"/>
+              </a:lnSpc>
+              <a:spcAft>
+                <a:spcPts val="600"/>
+              </a:spcAft>
+              <a:defRPr>
+                <a:latin typeface="Microsoft JhengHei"/>
+              </a:defRPr>
+            </a:pPr>
+            <a:r>
+              <a:rPr sz="1600">
+                <a:solidFill>
+                  <a:srgbClr val="1B1B1F"/>
+                </a:solidFill>
+                <a:latin typeface="Microsoft JhengHei"/>
+              </a:rPr>
+              <a:t>完全免費且可離線使用</a:t>
+            </a:r>
+          </a:p>
+          <a:p>
+            <a:pPr>
+              <a:lnSpc>
+                <a:spcPct val="125000"/>
+              </a:lnSpc>
+              <a:spcAft>
+                <a:spcPts val="600"/>
+              </a:spcAft>
+              <a:defRPr>
+                <a:latin typeface="Microsoft JhengHei"/>
+              </a:defRPr>
+            </a:pPr>
+            <a:r>
+              <a:rPr sz="1600">
+                <a:solidFill>
+                  <a:srgbClr val="1B1B1F"/>
+                </a:solidFill>
+                <a:latin typeface="Microsoft JhengHei"/>
+              </a:rPr>
+              <a:t>雙向連結與視覺化知識圖譜</a:t>
+            </a:r>
+          </a:p>
+          <a:p>
+            <a:pPr>
+              <a:lnSpc>
+                <a:spcPct val="125000"/>
+              </a:lnSpc>
+              <a:spcAft>
+                <a:spcPts val="600"/>
+              </a:spcAft>
+              <a:defRPr>
+                <a:latin typeface="Microsoft JhengHei"/>
+              </a:defRPr>
+            </a:pPr>
+            <a:r>
+              <a:rPr sz="1600">
+                <a:solidFill>
+                  <a:srgbClr val="1B1B1F"/>
+                </a:solidFill>
+                <a:latin typeface="Microsoft JhengHei"/>
+              </a:rPr>
+              <a:t>檔案存在本地，完全擁有自主權</a:t>
+            </a:r>
+          </a:p>
+          <a:p>
+            <a:pPr>
+              <a:lnSpc>
+                <a:spcPct val="125000"/>
+              </a:lnSpc>
+              <a:spcAft>
+                <a:spcPts val="600"/>
+              </a:spcAft>
+              <a:defRPr>
+                <a:latin typeface="Microsoft JhengHei"/>
+              </a:defRPr>
+            </a:pPr>
+            <a:r>
+              <a:rPr sz="1600">
+                <a:solidFill>
+                  <a:srgbClr val="1B1B1F"/>
+                </a:solidFill>
+                <a:latin typeface="Microsoft JhengHei"/>
+              </a:rPr>
+              <a:t>大量開源社群外掛，可任意擴充功能</a:t>
+            </a:r>
+          </a:p>
+        </p:txBody>
+      </p:sp>
+      <p:sp>
+        <p:nvSpPr>
+          <p:cNvPr id="7" name="Rectangle 6"/>
+          <p:cNvSpPr/>
+          <p:nvPr/>
+        </p:nvSpPr>
+        <p:spPr>
+          <a:xfrm>
+            <a:off x="6217920" y="1371600"/>
+            <a:ext cx="5212080" cy="4754880"/>
+          </a:xfrm>
+          <a:prstGeom prst="rect">
+            <a:avLst/>
+          </a:prstGeom>
+          <a:solidFill>
+            <a:srgbClr val="FFFFFF"/>
+          </a:solidFill>
+          <a:ln w="19050">
+            <a:solidFill>
+              <a:srgbClr val="DADEE5"/>
+            </a:solidFill>
+          </a:ln>
+        </p:spPr>
+        <p:style>
+          <a:lnRef idx="1">
+            <a:schemeClr val="accent1"/>
+          </a:lnRef>
+          <a:fillRef idx="3">
+            <a:schemeClr val="accent1"/>
+          </a:fillRef>
+          <a:effectRef idx="2">
+            <a:schemeClr val="accent1"/>
+          </a:effectRef>
+          <a:fontRef idx="minor">
+            <a:schemeClr val="lt1"/>
+          </a:fontRef>
+        </p:style>
+        <p:txBody>
+          <a:bodyPr rtlCol="0" anchor="ctr"/>
+          <a:lstStyle/>
+          <a:p>
+            <a:pPr algn="ctr"/>
+          </a:p>
+        </p:txBody>
+      </p:sp>
+      <p:sp>
+        <p:nvSpPr>
+          <p:cNvPr id="8" name="TextBox 7"/>
+          <p:cNvSpPr txBox="1"/>
+          <p:nvPr/>
+        </p:nvSpPr>
+        <p:spPr>
+          <a:xfrm>
+            <a:off x="6492240" y="1554480"/>
+            <a:ext cx="4663440" cy="548640"/>
+          </a:xfrm>
+          <a:prstGeom prst="rect">
+            <a:avLst/>
+          </a:prstGeom>
+          <a:noFill/>
+        </p:spPr>
+        <p:txBody>
+          <a:bodyPr wrap="none">
+            <a:spAutoFit/>
+          </a:bodyPr>
+          <a:lstStyle/>
+          <a:p>
+            <a:pPr>
+              <a:defRPr sz="2200" b="1">
+                <a:solidFill>
+                  <a:srgbClr val="656575"/>
+                </a:solidFill>
+                <a:latin typeface="Microsoft JhengHei"/>
+              </a:defRPr>
+            </a:pPr>
+            <a:r>
+              <a:t>其他筆記軟體</a:t>
+            </a:r>
+          </a:p>
+        </p:txBody>
+      </p:sp>
+      <p:sp>
+        <p:nvSpPr>
+          <p:cNvPr id="9" name="TextBox 8"/>
+          <p:cNvSpPr txBox="1"/>
+          <p:nvPr/>
+        </p:nvSpPr>
+        <p:spPr>
+          <a:xfrm>
+            <a:off x="6492240" y="2194560"/>
+            <a:ext cx="4663440" cy="3657600"/>
+          </a:xfrm>
+          <a:prstGeom prst="rect">
+            <a:avLst/>
+          </a:prstGeom>
+          <a:noFill/>
+        </p:spPr>
+        <p:txBody>
+          <a:bodyPr wrap="square" lIns="228600" rIns="228600" tIns="228600" bIns="228600">
+            <a:spAutoFit/>
+          </a:bodyPr>
+          <a:lstStyle/>
+          <a:p>
+            <a:pPr>
+              <a:lnSpc>
+                <a:spcPct val="125000"/>
+              </a:lnSpc>
+              <a:spcAft>
+                <a:spcPts val="600"/>
+              </a:spcAft>
+              <a:defRPr>
+                <a:latin typeface="Microsoft JhengHei"/>
+              </a:defRPr>
+            </a:pPr>
+            <a:r>
+              <a:rPr sz="1600">
+                <a:solidFill>
+                  <a:srgbClr val="1B1B1F"/>
+                </a:solidFill>
+                <a:latin typeface="Microsoft JhengHei"/>
+              </a:rPr>
               <a:t>Notion: 資料庫功能強大，但過於複雜且必須連網</a:t>
             </a:r>
           </a:p>
           <a:p>
             <a:pPr>
-              <a:spcAft>
-                <a:spcPts val="1000"/>
-              </a:spcAft>
-              <a:defRPr sz="1600">
-                <a:solidFill>
-                  <a:srgbClr val="FFFFFF"/>
-                </a:solidFill>
-                <a:latin typeface="Microsoft JhengHei"/>
-              </a:defRPr>
-            </a:pPr>
-            <a:r>
+              <a:lnSpc>
+                <a:spcPct val="125000"/>
+              </a:lnSpc>
+              <a:spcAft>
+                <a:spcPts val="600"/>
+              </a:spcAft>
+              <a:defRPr>
+                <a:latin typeface="Microsoft JhengHei"/>
+              </a:defRPr>
+            </a:pPr>
+            <a:r>
+              <a:rPr sz="1600">
+                <a:solidFill>
+                  <a:srgbClr val="1B1B1F"/>
+                </a:solidFill>
+                <a:latin typeface="Microsoft JhengHei"/>
+              </a:rPr>
               <a:t>Evernote: 封閉格式、歷史冗長，且收費營運面臨挑戰</a:t>
             </a:r>
           </a:p>
           <a:p>
             <a:pPr>
-              <a:spcAft>
-                <a:spcPts val="1000"/>
-              </a:spcAft>
-              <a:defRPr sz="1600">
-                <a:solidFill>
-                  <a:srgbClr val="FFFFFF"/>
-                </a:solidFill>
-                <a:latin typeface="Microsoft JhengHei"/>
-              </a:defRPr>
-            </a:pPr>
-            <a:r>
+              <a:lnSpc>
+                <a:spcPct val="125000"/>
+              </a:lnSpc>
+              <a:spcAft>
+                <a:spcPts val="600"/>
+              </a:spcAft>
+              <a:defRPr>
+                <a:latin typeface="Microsoft JhengHei"/>
+              </a:defRPr>
+            </a:pPr>
+            <a:r>
+              <a:rPr sz="1600">
+                <a:solidFill>
+                  <a:srgbClr val="1B1B1F"/>
+                </a:solidFill>
+                <a:latin typeface="Microsoft JhengHei"/>
+              </a:rPr>
               <a:t>Apple Notes: 功能極簡，不適合做跨領域知識的關聯</a:t>
             </a:r>
           </a:p>
@@ -7760,7 +9706,7 @@
     <p:bg>
       <p:bgPr>
         <a:solidFill>
-          <a:srgbClr val="1E1E24"/>
+          <a:srgbClr val="F5F5F7"/>
         </a:solidFill>
         <a:effectLst/>
       </p:bgPr>
@@ -7774,59 +9720,25 @@
       <p:grpSpPr/>
       <p:sp>
         <p:nvSpPr>
-          <p:cNvPr id="2" name="TextBox 1"/>
-          <p:cNvSpPr txBox="1"/>
-          <p:nvPr/>
-        </p:nvSpPr>
-        <p:spPr>
-          <a:xfrm>
-            <a:off x="731520" y="365760"/>
-            <a:ext cx="10725912" cy="731520"/>
-          </a:xfrm>
-          <a:prstGeom prst="rect">
-            <a:avLst/>
-          </a:prstGeom>
-          <a:noFill/>
-        </p:spPr>
-        <p:txBody>
-          <a:bodyPr wrap="square" lIns="0" tIns="0" rIns="0" bIns="0">
-            <a:spAutoFit/>
-          </a:bodyPr>
-          <a:lstStyle/>
-          <a:p>
-            <a:pPr>
-              <a:defRPr sz="3600" b="1">
-                <a:solidFill>
-                  <a:srgbClr val="00E5FF"/>
-                </a:solidFill>
-                <a:latin typeface="Microsoft JhengHei"/>
-              </a:defRPr>
-            </a:pPr>
-            <a:r>
-              <a:t>開始第一步：建立 Vault</a:t>
-            </a:r>
-          </a:p>
-        </p:txBody>
-      </p:sp>
-      <p:sp>
-        <p:nvSpPr>
-          <p:cNvPr id="3" name="Rectangle 2"/>
+          <p:cNvPr id="2" name="Rectangle 1"/>
           <p:cNvSpPr/>
           <p:nvPr/>
         </p:nvSpPr>
         <p:spPr>
           <a:xfrm>
-            <a:off x="731520" y="1371600"/>
-            <a:ext cx="10725912" cy="4754880"/>
+            <a:off x="731520" y="384048"/>
+            <a:ext cx="91440" cy="502920"/>
           </a:xfrm>
           <a:prstGeom prst="rect">
             <a:avLst/>
           </a:prstGeom>
           <a:solidFill>
-            <a:srgbClr val="2D2D35"/>
+            <a:srgbClr val="009688"/>
           </a:solidFill>
           <a:ln>
-            <a:noFill/>
+            <a:solidFill>
+              <a:srgbClr val="009688"/>
+            </a:solidFill>
           </a:ln>
         </p:spPr>
         <p:style>
@@ -7853,14 +9765,14 @@
       </p:sp>
       <p:sp>
         <p:nvSpPr>
-          <p:cNvPr id="4" name="TextBox 3"/>
+          <p:cNvPr id="3" name="TextBox 2"/>
           <p:cNvSpPr txBox="1"/>
           <p:nvPr/>
         </p:nvSpPr>
         <p:spPr>
           <a:xfrm>
-            <a:off x="1097280" y="1645920"/>
-            <a:ext cx="9994392" cy="4206240"/>
+            <a:off x="960120" y="320040"/>
+            <a:ext cx="10497312" cy="731520"/>
           </a:xfrm>
           <a:prstGeom prst="rect">
             <a:avLst/>
@@ -7874,113 +9786,263 @@
           <a:lstStyle/>
           <a:p>
             <a:pPr>
-              <a:spcAft>
-                <a:spcPts val="1000"/>
-              </a:spcAft>
-              <a:defRPr sz="2000">
-                <a:solidFill>
-                  <a:srgbClr val="FFFFFF"/>
-                </a:solidFill>
-                <a:latin typeface="Microsoft JhengHei"/>
-              </a:defRPr>
-            </a:pPr>
-            <a:r>
-              <a:t>**什麼是 Vault (儲存庫)？**</a:t>
+              <a:defRPr sz="3600" b="1">
+                <a:solidFill>
+                  <a:srgbClr val="009688"/>
+                </a:solidFill>
+                <a:latin typeface="Microsoft JhengHei"/>
+              </a:defRPr>
+            </a:pPr>
+            <a:r>
+              <a:t>開始第一步：建立 Vault</a:t>
+            </a:r>
+          </a:p>
+        </p:txBody>
+      </p:sp>
+      <p:sp>
+        <p:nvSpPr>
+          <p:cNvPr id="4" name="Rectangle 3"/>
+          <p:cNvSpPr/>
+          <p:nvPr/>
+        </p:nvSpPr>
+        <p:spPr>
+          <a:xfrm>
+            <a:off x="731520" y="1371600"/>
+            <a:ext cx="10725912" cy="4754880"/>
+          </a:xfrm>
+          <a:prstGeom prst="rect">
+            <a:avLst/>
+          </a:prstGeom>
+          <a:solidFill>
+            <a:srgbClr val="FFFFFF"/>
+          </a:solidFill>
+          <a:ln w="19050">
+            <a:solidFill>
+              <a:srgbClr val="DADEE5"/>
+            </a:solidFill>
+          </a:ln>
+        </p:spPr>
+        <p:style>
+          <a:lnRef idx="1">
+            <a:schemeClr val="accent1"/>
+          </a:lnRef>
+          <a:fillRef idx="3">
+            <a:schemeClr val="accent1"/>
+          </a:fillRef>
+          <a:effectRef idx="2">
+            <a:schemeClr val="accent1"/>
+          </a:effectRef>
+          <a:fontRef idx="minor">
+            <a:schemeClr val="lt1"/>
+          </a:fontRef>
+        </p:style>
+        <p:txBody>
+          <a:bodyPr rtlCol="0" anchor="ctr"/>
+          <a:lstStyle/>
+          <a:p>
+            <a:pPr algn="ctr"/>
+          </a:p>
+        </p:txBody>
+      </p:sp>
+      <p:sp>
+        <p:nvSpPr>
+          <p:cNvPr id="5" name="TextBox 4"/>
+          <p:cNvSpPr txBox="1"/>
+          <p:nvPr/>
+        </p:nvSpPr>
+        <p:spPr>
+          <a:xfrm>
+            <a:off x="1097280" y="1645920"/>
+            <a:ext cx="9994392" cy="4206240"/>
+          </a:xfrm>
+          <a:prstGeom prst="rect">
+            <a:avLst/>
+          </a:prstGeom>
+          <a:noFill/>
+        </p:spPr>
+        <p:txBody>
+          <a:bodyPr wrap="square" lIns="228600" rIns="228600" tIns="228600" bIns="228600">
+            <a:spAutoFit/>
+          </a:bodyPr>
+          <a:lstStyle/>
+          <a:p>
+            <a:pPr>
+              <a:lnSpc>
+                <a:spcPct val="125000"/>
+              </a:lnSpc>
+              <a:spcAft>
+                <a:spcPts val="600"/>
+              </a:spcAft>
+              <a:defRPr>
+                <a:latin typeface="Microsoft JhengHei"/>
+              </a:defRPr>
+            </a:pPr>
+            <a:r>
+              <a:rPr sz="2000" b="1">
+                <a:solidFill>
+                  <a:srgbClr val="1B1B1F"/>
+                </a:solidFill>
+                <a:latin typeface="Microsoft JhengHei"/>
+              </a:rPr>
+              <a:t>什麼是 Vault (儲存庫)？</a:t>
             </a:r>
           </a:p>
           <a:p>
             <a:pPr lvl="1">
-              <a:spcAft>
-                <a:spcPts val="1000"/>
-              </a:spcAft>
-              <a:defRPr sz="1800">
-                <a:solidFill>
-                  <a:srgbClr val="FFFFFF"/>
-                </a:solidFill>
-                <a:latin typeface="Microsoft JhengHei"/>
-              </a:defRPr>
-            </a:pPr>
-            <a:r>
+              <a:lnSpc>
+                <a:spcPct val="125000"/>
+              </a:lnSpc>
+              <a:spcAft>
+                <a:spcPts val="600"/>
+              </a:spcAft>
+              <a:defRPr>
+                <a:latin typeface="Microsoft JhengHei"/>
+              </a:defRPr>
+            </a:pPr>
+            <a:r>
+              <a:rPr sz="1800">
+                <a:solidFill>
+                  <a:srgbClr val="1B1B1F"/>
+                </a:solidFill>
+                <a:latin typeface="Microsoft JhengHei"/>
+              </a:rPr>
               <a:t>在 Obsidian 中，一個 Vault 就是電腦上的一個一般資料夾</a:t>
             </a:r>
           </a:p>
           <a:p>
             <a:pPr>
-              <a:spcAft>
-                <a:spcPts val="1000"/>
-              </a:spcAft>
-              <a:defRPr sz="2000">
-                <a:solidFill>
-                  <a:srgbClr val="FFFFFF"/>
-                </a:solidFill>
-                <a:latin typeface="Microsoft JhengHei"/>
-              </a:defRPr>
-            </a:pPr>
-            <a:r>
-              <a:t>**建立步驟**：</a:t>
+              <a:lnSpc>
+                <a:spcPct val="125000"/>
+              </a:lnSpc>
+              <a:spcAft>
+                <a:spcPts val="600"/>
+              </a:spcAft>
+              <a:defRPr>
+                <a:latin typeface="Microsoft JhengHei"/>
+              </a:defRPr>
+            </a:pPr>
+            <a:r>
+              <a:rPr sz="2000" b="1">
+                <a:solidFill>
+                  <a:srgbClr val="1B1B1F"/>
+                </a:solidFill>
+                <a:latin typeface="Microsoft JhengHei"/>
+              </a:rPr>
+              <a:t>建立步驟</a:t>
+            </a:r>
+            <a:r>
+              <a:rPr sz="2000">
+                <a:solidFill>
+                  <a:srgbClr val="1B1B1F"/>
+                </a:solidFill>
+                <a:latin typeface="Microsoft JhengHei"/>
+              </a:rPr>
+              <a:t>：</a:t>
             </a:r>
           </a:p>
           <a:p>
             <a:pPr lvl="1">
-              <a:spcAft>
-                <a:spcPts val="1000"/>
-              </a:spcAft>
-              <a:defRPr sz="1800">
-                <a:solidFill>
-                  <a:srgbClr val="FFFFFF"/>
-                </a:solidFill>
-                <a:latin typeface="Microsoft JhengHei"/>
-              </a:defRPr>
-            </a:pPr>
-            <a:r>
-              <a:t>前往官網 `https://obsidian.md` 下載安裝檔</a:t>
+              <a:lnSpc>
+                <a:spcPct val="125000"/>
+              </a:lnSpc>
+              <a:spcAft>
+                <a:spcPts val="600"/>
+              </a:spcAft>
+              <a:defRPr>
+                <a:latin typeface="Microsoft JhengHei"/>
+              </a:defRPr>
+            </a:pPr>
+            <a:r>
+              <a:rPr sz="1800">
+                <a:solidFill>
+                  <a:srgbClr val="1B1B1F"/>
+                </a:solidFill>
+                <a:latin typeface="Microsoft JhengHei"/>
+              </a:rPr>
+              <a:t>前往官網 </a:t>
+            </a:r>
+            <a:r>
+              <a:rPr sz="1800" b="1">
+                <a:solidFill>
+                  <a:srgbClr val="673AB7"/>
+                </a:solidFill>
+                <a:latin typeface="Consolas"/>
+              </a:rPr>
+              <a:t>https://obsidian.md</a:t>
+            </a:r>
+            <a:r>
+              <a:rPr sz="1800">
+                <a:solidFill>
+                  <a:srgbClr val="1B1B1F"/>
+                </a:solidFill>
+                <a:latin typeface="Microsoft JhengHei"/>
+              </a:rPr>
+              <a:t> 下載安裝檔</a:t>
             </a:r>
           </a:p>
           <a:p>
             <a:pPr lvl="1">
-              <a:spcAft>
-                <a:spcPts val="1000"/>
-              </a:spcAft>
-              <a:defRPr sz="1800">
-                <a:solidFill>
-                  <a:srgbClr val="FFFFFF"/>
-                </a:solidFill>
-                <a:latin typeface="Microsoft JhengHei"/>
-              </a:defRPr>
-            </a:pPr>
-            <a:r>
+              <a:lnSpc>
+                <a:spcPct val="125000"/>
+              </a:lnSpc>
+              <a:spcAft>
+                <a:spcPts val="600"/>
+              </a:spcAft>
+              <a:defRPr>
+                <a:latin typeface="Microsoft JhengHei"/>
+              </a:defRPr>
+            </a:pPr>
+            <a:r>
+              <a:rPr sz="1800">
+                <a:solidFill>
+                  <a:srgbClr val="1B1B1F"/>
+                </a:solidFill>
+                <a:latin typeface="Microsoft JhengHei"/>
+              </a:rPr>
               <a:t>打開後切換成繁體中文語言</a:t>
             </a:r>
           </a:p>
           <a:p>
             <a:pPr lvl="1">
-              <a:spcAft>
-                <a:spcPts val="1000"/>
-              </a:spcAft>
-              <a:defRPr sz="1800">
-                <a:solidFill>
-                  <a:srgbClr val="FFFFFF"/>
-                </a:solidFill>
-                <a:latin typeface="Microsoft JhengHei"/>
-              </a:defRPr>
-            </a:pPr>
-            <a:r>
+              <a:lnSpc>
+                <a:spcPct val="125000"/>
+              </a:lnSpc>
+              <a:spcAft>
+                <a:spcPts val="600"/>
+              </a:spcAft>
+              <a:defRPr>
+                <a:latin typeface="Microsoft JhengHei"/>
+              </a:defRPr>
+            </a:pPr>
+            <a:r>
+              <a:rPr sz="1800">
+                <a:solidFill>
+                  <a:srgbClr val="1B1B1F"/>
+                </a:solidFill>
+                <a:latin typeface="Microsoft JhengHei"/>
+              </a:rPr>
               <a:t>點擊「建立新儲存庫」，命名為「我的學習筆記」</a:t>
             </a:r>
           </a:p>
           <a:p>
             <a:pPr lvl="1">
-              <a:spcAft>
-                <a:spcPts val="1000"/>
-              </a:spcAft>
-              <a:defRPr sz="1800">
-                <a:solidFill>
-                  <a:srgbClr val="FFFFFF"/>
-                </a:solidFill>
-                <a:latin typeface="Microsoft JhengHei"/>
-              </a:defRPr>
-            </a:pPr>
-            <a:r>
+              <a:lnSpc>
+                <a:spcPct val="125000"/>
+              </a:lnSpc>
+              <a:spcAft>
+                <a:spcPts val="600"/>
+              </a:spcAft>
+              <a:defRPr>
+                <a:latin typeface="Microsoft JhengHei"/>
+              </a:defRPr>
+            </a:pPr>
+            <a:r>
+              <a:rPr sz="1800">
+                <a:solidFill>
+                  <a:srgbClr val="1B1B1F"/>
+                </a:solidFill>
+                <a:latin typeface="Microsoft JhengHei"/>
+              </a:rPr>
               <a:t>選擇放在桌面或文件等您容易找到的位置</a:t>
             </a:r>
           </a:p>
@@ -8000,7 +10062,7 @@
     <p:bg>
       <p:bgPr>
         <a:solidFill>
-          <a:srgbClr val="1E1E24"/>
+          <a:srgbClr val="F5F5F7"/>
         </a:solidFill>
         <a:effectLst/>
       </p:bgPr>
@@ -8014,59 +10076,25 @@
       <p:grpSpPr/>
       <p:sp>
         <p:nvSpPr>
-          <p:cNvPr id="2" name="TextBox 1"/>
-          <p:cNvSpPr txBox="1"/>
-          <p:nvPr/>
-        </p:nvSpPr>
-        <p:spPr>
-          <a:xfrm>
-            <a:off x="731520" y="365760"/>
-            <a:ext cx="10725912" cy="731520"/>
-          </a:xfrm>
-          <a:prstGeom prst="rect">
-            <a:avLst/>
-          </a:prstGeom>
-          <a:noFill/>
-        </p:spPr>
-        <p:txBody>
-          <a:bodyPr wrap="square" lIns="0" tIns="0" rIns="0" bIns="0">
-            <a:spAutoFit/>
-          </a:bodyPr>
-          <a:lstStyle/>
-          <a:p>
-            <a:pPr>
-              <a:defRPr sz="3600" b="1">
-                <a:solidFill>
-                  <a:srgbClr val="00E5FF"/>
-                </a:solidFill>
-                <a:latin typeface="Microsoft JhengHei"/>
-              </a:defRPr>
-            </a:pPr>
-            <a:r>
-              <a:t>Markdown 語法：標題與粗斜體</a:t>
-            </a:r>
-          </a:p>
-        </p:txBody>
-      </p:sp>
-      <p:sp>
-        <p:nvSpPr>
-          <p:cNvPr id="3" name="Rectangle 2"/>
+          <p:cNvPr id="2" name="Rectangle 1"/>
           <p:cNvSpPr/>
           <p:nvPr/>
         </p:nvSpPr>
         <p:spPr>
           <a:xfrm>
-            <a:off x="731520" y="1371600"/>
-            <a:ext cx="10725912" cy="4754880"/>
+            <a:off x="731520" y="384048"/>
+            <a:ext cx="91440" cy="502920"/>
           </a:xfrm>
           <a:prstGeom prst="rect">
             <a:avLst/>
           </a:prstGeom>
           <a:solidFill>
-            <a:srgbClr val="2D2D35"/>
+            <a:srgbClr val="009688"/>
           </a:solidFill>
           <a:ln>
-            <a:noFill/>
+            <a:solidFill>
+              <a:srgbClr val="009688"/>
+            </a:solidFill>
           </a:ln>
         </p:spPr>
         <p:style>
@@ -8093,14 +10121,14 @@
       </p:sp>
       <p:sp>
         <p:nvSpPr>
-          <p:cNvPr id="4" name="TextBox 3"/>
+          <p:cNvPr id="3" name="TextBox 2"/>
           <p:cNvSpPr txBox="1"/>
           <p:nvPr/>
         </p:nvSpPr>
         <p:spPr>
           <a:xfrm>
-            <a:off x="1097280" y="1645920"/>
-            <a:ext cx="9994392" cy="4206240"/>
+            <a:off x="960120" y="320040"/>
+            <a:ext cx="10497312" cy="731520"/>
           </a:xfrm>
           <a:prstGeom prst="rect">
             <a:avLst/>
@@ -8114,130 +10142,466 @@
           <a:lstStyle/>
           <a:p>
             <a:pPr>
-              <a:spcAft>
-                <a:spcPts val="1000"/>
-              </a:spcAft>
-              <a:defRPr sz="2000">
-                <a:solidFill>
-                  <a:srgbClr val="FFFFFF"/>
-                </a:solidFill>
-                <a:latin typeface="Microsoft JhengHei"/>
-              </a:defRPr>
-            </a:pPr>
-            <a:r>
+              <a:defRPr sz="3600" b="1">
+                <a:solidFill>
+                  <a:srgbClr val="009688"/>
+                </a:solidFill>
+                <a:latin typeface="Microsoft JhengHei"/>
+              </a:defRPr>
+            </a:pPr>
+            <a:r>
+              <a:t>Markdown 語法：標題與粗斜體</a:t>
+            </a:r>
+          </a:p>
+        </p:txBody>
+      </p:sp>
+      <p:sp>
+        <p:nvSpPr>
+          <p:cNvPr id="4" name="Rectangle 3"/>
+          <p:cNvSpPr/>
+          <p:nvPr/>
+        </p:nvSpPr>
+        <p:spPr>
+          <a:xfrm>
+            <a:off x="731520" y="1371600"/>
+            <a:ext cx="10725912" cy="4754880"/>
+          </a:xfrm>
+          <a:prstGeom prst="rect">
+            <a:avLst/>
+          </a:prstGeom>
+          <a:solidFill>
+            <a:srgbClr val="FFFFFF"/>
+          </a:solidFill>
+          <a:ln w="19050">
+            <a:solidFill>
+              <a:srgbClr val="DADEE5"/>
+            </a:solidFill>
+          </a:ln>
+        </p:spPr>
+        <p:style>
+          <a:lnRef idx="1">
+            <a:schemeClr val="accent1"/>
+          </a:lnRef>
+          <a:fillRef idx="3">
+            <a:schemeClr val="accent1"/>
+          </a:fillRef>
+          <a:effectRef idx="2">
+            <a:schemeClr val="accent1"/>
+          </a:effectRef>
+          <a:fontRef idx="minor">
+            <a:schemeClr val="lt1"/>
+          </a:fontRef>
+        </p:style>
+        <p:txBody>
+          <a:bodyPr rtlCol="0" anchor="ctr"/>
+          <a:lstStyle/>
+          <a:p>
+            <a:pPr algn="ctr"/>
+          </a:p>
+        </p:txBody>
+      </p:sp>
+      <p:sp>
+        <p:nvSpPr>
+          <p:cNvPr id="5" name="TextBox 4"/>
+          <p:cNvSpPr txBox="1"/>
+          <p:nvPr/>
+        </p:nvSpPr>
+        <p:spPr>
+          <a:xfrm>
+            <a:off x="1097280" y="1645920"/>
+            <a:ext cx="9994392" cy="4206240"/>
+          </a:xfrm>
+          <a:prstGeom prst="rect">
+            <a:avLst/>
+          </a:prstGeom>
+          <a:noFill/>
+        </p:spPr>
+        <p:txBody>
+          <a:bodyPr wrap="square" lIns="228600" rIns="228600" tIns="228600" bIns="228600">
+            <a:spAutoFit/>
+          </a:bodyPr>
+          <a:lstStyle/>
+          <a:p>
+            <a:pPr>
+              <a:lnSpc>
+                <a:spcPct val="125000"/>
+              </a:lnSpc>
+              <a:spcAft>
+                <a:spcPts val="600"/>
+              </a:spcAft>
+              <a:defRPr>
+                <a:latin typeface="Microsoft JhengHei"/>
+              </a:defRPr>
+            </a:pPr>
+            <a:r>
+              <a:rPr sz="2000">
+                <a:solidFill>
+                  <a:srgbClr val="1B1B1F"/>
+                </a:solidFill>
+                <a:latin typeface="Microsoft JhengHei"/>
+              </a:rPr>
               <a:t>Markdown 讓您不需要使用滑鼠點擊工具列，只靠鍵盤符號就能排版：</a:t>
             </a:r>
           </a:p>
           <a:p>
             <a:pPr lvl="1">
-              <a:spcAft>
-                <a:spcPts val="1000"/>
-              </a:spcAft>
-              <a:defRPr sz="1800">
-                <a:solidFill>
-                  <a:srgbClr val="FFFFFF"/>
-                </a:solidFill>
-                <a:latin typeface="Microsoft JhengHei"/>
-              </a:defRPr>
-            </a:pPr>
-            <a:r>
-              <a:t>**標題**：使用 `#` 加上空格，`#` 越多標題越小。例如：</a:t>
+              <a:lnSpc>
+                <a:spcPct val="125000"/>
+              </a:lnSpc>
+              <a:spcAft>
+                <a:spcPts val="600"/>
+              </a:spcAft>
+              <a:defRPr>
+                <a:latin typeface="Microsoft JhengHei"/>
+              </a:defRPr>
+            </a:pPr>
+            <a:r>
+              <a:rPr sz="1800" b="1">
+                <a:solidFill>
+                  <a:srgbClr val="1B1B1F"/>
+                </a:solidFill>
+                <a:latin typeface="Microsoft JhengHei"/>
+              </a:rPr>
+              <a:t>標題</a:t>
+            </a:r>
+            <a:r>
+              <a:rPr sz="1800">
+                <a:solidFill>
+                  <a:srgbClr val="1B1B1F"/>
+                </a:solidFill>
+                <a:latin typeface="Microsoft JhengHei"/>
+              </a:rPr>
+              <a:t>：使用 </a:t>
+            </a:r>
+            <a:r>
+              <a:rPr sz="1800" b="1">
+                <a:solidFill>
+                  <a:srgbClr val="673AB7"/>
+                </a:solidFill>
+                <a:latin typeface="Consolas"/>
+              </a:rPr>
+              <a:t>#</a:t>
+            </a:r>
+            <a:r>
+              <a:rPr sz="1800">
+                <a:solidFill>
+                  <a:srgbClr val="1B1B1F"/>
+                </a:solidFill>
+                <a:latin typeface="Microsoft JhengHei"/>
+              </a:rPr>
+              <a:t> 加上空格，</a:t>
+            </a:r>
+            <a:r>
+              <a:rPr sz="1800" b="1">
+                <a:solidFill>
+                  <a:srgbClr val="673AB7"/>
+                </a:solidFill>
+                <a:latin typeface="Consolas"/>
+              </a:rPr>
+              <a:t>#</a:t>
+            </a:r>
+            <a:r>
+              <a:rPr sz="1800">
+                <a:solidFill>
+                  <a:srgbClr val="1B1B1F"/>
+                </a:solidFill>
+                <a:latin typeface="Microsoft JhengHei"/>
+              </a:rPr>
+              <a:t> 越多標題越小。例如：</a:t>
             </a:r>
           </a:p>
           <a:p>
             <a:pPr lvl="2">
-              <a:spcAft>
-                <a:spcPts val="1000"/>
-              </a:spcAft>
-              <a:defRPr sz="1600">
-                <a:solidFill>
-                  <a:srgbClr val="FFFFFF"/>
-                </a:solidFill>
-                <a:latin typeface="Microsoft JhengHei"/>
-              </a:defRPr>
-            </a:pPr>
-            <a:r>
-              <a:t>`# 一級標題` (文章主標題)</a:t>
+              <a:lnSpc>
+                <a:spcPct val="125000"/>
+              </a:lnSpc>
+              <a:spcAft>
+                <a:spcPts val="600"/>
+              </a:spcAft>
+              <a:defRPr>
+                <a:latin typeface="Microsoft JhengHei"/>
+              </a:defRPr>
+            </a:pPr>
+            <a:r>
+              <a:rPr sz="1600" b="1">
+                <a:solidFill>
+                  <a:srgbClr val="673AB7"/>
+                </a:solidFill>
+                <a:latin typeface="Consolas"/>
+              </a:rPr>
+              <a:t># 一級標題</a:t>
+            </a:r>
+            <a:r>
+              <a:rPr sz="1600">
+                <a:solidFill>
+                  <a:srgbClr val="1B1B1F"/>
+                </a:solidFill>
+                <a:latin typeface="Microsoft JhengHei"/>
+              </a:rPr>
+              <a:t> (文章主標題)</a:t>
             </a:r>
           </a:p>
           <a:p>
             <a:pPr lvl="2">
-              <a:spcAft>
-                <a:spcPts val="1000"/>
-              </a:spcAft>
-              <a:defRPr sz="1600">
-                <a:solidFill>
-                  <a:srgbClr val="FFFFFF"/>
-                </a:solidFill>
-                <a:latin typeface="Microsoft JhengHei"/>
-              </a:defRPr>
-            </a:pPr>
-            <a:r>
-              <a:t>`## 二級標題` (章節大標)</a:t>
+              <a:lnSpc>
+                <a:spcPct val="125000"/>
+              </a:lnSpc>
+              <a:spcAft>
+                <a:spcPts val="600"/>
+              </a:spcAft>
+              <a:defRPr>
+                <a:latin typeface="Microsoft JhengHei"/>
+              </a:defRPr>
+            </a:pPr>
+            <a:r>
+              <a:rPr sz="1600" b="1">
+                <a:solidFill>
+                  <a:srgbClr val="673AB7"/>
+                </a:solidFill>
+                <a:latin typeface="Consolas"/>
+              </a:rPr>
+              <a:t>## 二級標題</a:t>
+            </a:r>
+            <a:r>
+              <a:rPr sz="1600">
+                <a:solidFill>
+                  <a:srgbClr val="1B1B1F"/>
+                </a:solidFill>
+                <a:latin typeface="Microsoft JhengHei"/>
+              </a:rPr>
+              <a:t> (章節大標)</a:t>
             </a:r>
           </a:p>
           <a:p>
             <a:pPr lvl="2">
-              <a:spcAft>
-                <a:spcPts val="1000"/>
-              </a:spcAft>
-              <a:defRPr sz="1600">
-                <a:solidFill>
-                  <a:srgbClr val="FFFFFF"/>
-                </a:solidFill>
-                <a:latin typeface="Microsoft JhengHei"/>
-              </a:defRPr>
-            </a:pPr>
-            <a:r>
-              <a:t>`### 三級標題` (小節標題)</a:t>
+              <a:lnSpc>
+                <a:spcPct val="125000"/>
+              </a:lnSpc>
+              <a:spcAft>
+                <a:spcPts val="600"/>
+              </a:spcAft>
+              <a:defRPr>
+                <a:latin typeface="Microsoft JhengHei"/>
+              </a:defRPr>
+            </a:pPr>
+            <a:r>
+              <a:rPr sz="1600" b="1">
+                <a:solidFill>
+                  <a:srgbClr val="673AB7"/>
+                </a:solidFill>
+                <a:latin typeface="Consolas"/>
+              </a:rPr>
+              <a:t>### 三級標題</a:t>
+            </a:r>
+            <a:r>
+              <a:rPr sz="1600">
+                <a:solidFill>
+                  <a:srgbClr val="1B1B1F"/>
+                </a:solidFill>
+                <a:latin typeface="Microsoft JhengHei"/>
+              </a:rPr>
+              <a:t> (小節標題)</a:t>
             </a:r>
           </a:p>
           <a:p>
             <a:pPr lvl="1">
-              <a:spcAft>
-                <a:spcPts val="1000"/>
-              </a:spcAft>
-              <a:defRPr sz="1800">
-                <a:solidFill>
-                  <a:srgbClr val="FFFFFF"/>
-                </a:solidFill>
-                <a:latin typeface="Microsoft JhengHei"/>
-              </a:defRPr>
-            </a:pPr>
-            <a:r>
-              <a:t>**粗體**：在文字前後包覆 `**`，例如：`**重要**` ➡ **重要**</a:t>
+              <a:lnSpc>
+                <a:spcPct val="125000"/>
+              </a:lnSpc>
+              <a:spcAft>
+                <a:spcPts val="600"/>
+              </a:spcAft>
+              <a:defRPr>
+                <a:latin typeface="Microsoft JhengHei"/>
+              </a:defRPr>
+            </a:pPr>
+            <a:r>
+              <a:rPr sz="1800" b="1">
+                <a:solidFill>
+                  <a:srgbClr val="1B1B1F"/>
+                </a:solidFill>
+                <a:latin typeface="Microsoft JhengHei"/>
+              </a:rPr>
+              <a:t>粗體</a:t>
+            </a:r>
+            <a:r>
+              <a:rPr sz="1800">
+                <a:solidFill>
+                  <a:srgbClr val="1B1B1F"/>
+                </a:solidFill>
+                <a:latin typeface="Microsoft JhengHei"/>
+              </a:rPr>
+              <a:t>：在文字前後包覆 </a:t>
+            </a:r>
+            <a:r>
+              <a:rPr sz="1800" b="1">
+                <a:solidFill>
+                  <a:srgbClr val="673AB7"/>
+                </a:solidFill>
+                <a:latin typeface="Consolas"/>
+              </a:rPr>
+              <a:t>**</a:t>
+            </a:r>
+            <a:r>
+              <a:rPr sz="1800">
+                <a:solidFill>
+                  <a:srgbClr val="1B1B1F"/>
+                </a:solidFill>
+                <a:latin typeface="Microsoft JhengHei"/>
+              </a:rPr>
+              <a:t>，例如：</a:t>
+            </a:r>
+            <a:r>
+              <a:rPr sz="1800" b="1">
+                <a:solidFill>
+                  <a:srgbClr val="673AB7"/>
+                </a:solidFill>
+                <a:latin typeface="Consolas"/>
+              </a:rPr>
+              <a:t>**重要**</a:t>
+            </a:r>
+            <a:r>
+              <a:rPr sz="1800">
+                <a:solidFill>
+                  <a:srgbClr val="1B1B1F"/>
+                </a:solidFill>
+                <a:latin typeface="Microsoft JhengHei"/>
+              </a:rPr>
+              <a:t> ➡ </a:t>
+            </a:r>
+            <a:r>
+              <a:rPr sz="1800" b="1">
+                <a:solidFill>
+                  <a:srgbClr val="1B1B1F"/>
+                </a:solidFill>
+                <a:latin typeface="Microsoft JhengHei"/>
+              </a:rPr>
+              <a:t>重要</a:t>
             </a:r>
           </a:p>
           <a:p>
             <a:pPr lvl="1">
-              <a:spcAft>
-                <a:spcPts val="1000"/>
-              </a:spcAft>
-              <a:defRPr sz="1800">
-                <a:solidFill>
-                  <a:srgbClr val="FFFFFF"/>
-                </a:solidFill>
-                <a:latin typeface="Microsoft JhengHei"/>
-              </a:defRPr>
-            </a:pPr>
-            <a:r>
-              <a:t>**斜體**：在文字前後包覆 `*`，例如：`*強調*` ➡ *強調*</a:t>
+              <a:lnSpc>
+                <a:spcPct val="125000"/>
+              </a:lnSpc>
+              <a:spcAft>
+                <a:spcPts val="600"/>
+              </a:spcAft>
+              <a:defRPr>
+                <a:latin typeface="Microsoft JhengHei"/>
+              </a:defRPr>
+            </a:pPr>
+            <a:r>
+              <a:rPr sz="1800" b="1">
+                <a:solidFill>
+                  <a:srgbClr val="1B1B1F"/>
+                </a:solidFill>
+                <a:latin typeface="Microsoft JhengHei"/>
+              </a:rPr>
+              <a:t>斜體</a:t>
+            </a:r>
+            <a:r>
+              <a:rPr sz="1800">
+                <a:solidFill>
+                  <a:srgbClr val="1B1B1F"/>
+                </a:solidFill>
+                <a:latin typeface="Microsoft JhengHei"/>
+              </a:rPr>
+              <a:t>：在文字前後包覆 </a:t>
+            </a:r>
+            <a:r>
+              <a:rPr sz="1800" b="1">
+                <a:solidFill>
+                  <a:srgbClr val="673AB7"/>
+                </a:solidFill>
+                <a:latin typeface="Consolas"/>
+              </a:rPr>
+              <a:t>*</a:t>
+            </a:r>
+            <a:r>
+              <a:rPr sz="1800">
+                <a:solidFill>
+                  <a:srgbClr val="1B1B1F"/>
+                </a:solidFill>
+                <a:latin typeface="Microsoft JhengHei"/>
+              </a:rPr>
+              <a:t>，例如：</a:t>
+            </a:r>
+            <a:r>
+              <a:rPr sz="1800" b="1">
+                <a:solidFill>
+                  <a:srgbClr val="673AB7"/>
+                </a:solidFill>
+                <a:latin typeface="Consolas"/>
+              </a:rPr>
+              <a:t>*強調*</a:t>
+            </a:r>
+            <a:r>
+              <a:rPr sz="1800">
+                <a:solidFill>
+                  <a:srgbClr val="1B1B1F"/>
+                </a:solidFill>
+                <a:latin typeface="Microsoft JhengHei"/>
+              </a:rPr>
+              <a:t> ➡ *強調*</a:t>
             </a:r>
           </a:p>
           <a:p>
             <a:pPr lvl="1">
-              <a:spcAft>
-                <a:spcPts val="1000"/>
-              </a:spcAft>
-              <a:defRPr sz="1800">
-                <a:solidFill>
-                  <a:srgbClr val="FFFFFF"/>
-                </a:solidFill>
-                <a:latin typeface="Microsoft JhengHei"/>
-              </a:defRPr>
-            </a:pPr>
-            <a:r>
-              <a:t>**刪除線**：在文字前後包覆 `~~`，例如：`~~寫錯的內容~~`</a:t>
+              <a:lnSpc>
+                <a:spcPct val="125000"/>
+              </a:lnSpc>
+              <a:spcAft>
+                <a:spcPts val="600"/>
+              </a:spcAft>
+              <a:defRPr>
+                <a:latin typeface="Microsoft JhengHei"/>
+              </a:defRPr>
+            </a:pPr>
+            <a:r>
+              <a:rPr sz="1800" b="1">
+                <a:solidFill>
+                  <a:srgbClr val="1B1B1F"/>
+                </a:solidFill>
+                <a:latin typeface="Microsoft JhengHei"/>
+              </a:rPr>
+              <a:t>刪除線</a:t>
+            </a:r>
+            <a:r>
+              <a:rPr sz="1800">
+                <a:solidFill>
+                  <a:srgbClr val="1B1B1F"/>
+                </a:solidFill>
+                <a:latin typeface="Microsoft JhengHei"/>
+              </a:rPr>
+              <a:t>：在文字前後包覆 </a:t>
+            </a:r>
+            <a:r>
+              <a:rPr sz="1800" b="1">
+                <a:solidFill>
+                  <a:srgbClr val="673AB7"/>
+                </a:solidFill>
+                <a:latin typeface="Consolas"/>
+              </a:rPr>
+              <a:t>~~</a:t>
+            </a:r>
+            <a:r>
+              <a:rPr sz="1800">
+                <a:solidFill>
+                  <a:srgbClr val="1B1B1F"/>
+                </a:solidFill>
+                <a:latin typeface="Microsoft JhengHei"/>
+              </a:rPr>
+              <a:t>，例如：</a:t>
+            </a:r>
+            <a:r>
+              <a:rPr sz="1800" b="1">
+                <a:solidFill>
+                  <a:srgbClr val="673AB7"/>
+                </a:solidFill>
+                <a:latin typeface="Consolas"/>
+              </a:rPr>
+              <a:t>~~寫錯的內容~~</a:t>
             </a:r>
           </a:p>
         </p:txBody>
@@ -8256,7 +10620,7 @@
     <p:bg>
       <p:bgPr>
         <a:solidFill>
-          <a:srgbClr val="1E1E24"/>
+          <a:srgbClr val="F5F5F7"/>
         </a:solidFill>
         <a:effectLst/>
       </p:bgPr>
@@ -8270,59 +10634,25 @@
       <p:grpSpPr/>
       <p:sp>
         <p:nvSpPr>
-          <p:cNvPr id="2" name="TextBox 1"/>
-          <p:cNvSpPr txBox="1"/>
-          <p:nvPr/>
-        </p:nvSpPr>
-        <p:spPr>
-          <a:xfrm>
-            <a:off x="731520" y="365760"/>
-            <a:ext cx="10725912" cy="731520"/>
-          </a:xfrm>
-          <a:prstGeom prst="rect">
-            <a:avLst/>
-          </a:prstGeom>
-          <a:noFill/>
-        </p:spPr>
-        <p:txBody>
-          <a:bodyPr wrap="square" lIns="0" tIns="0" rIns="0" bIns="0">
-            <a:spAutoFit/>
-          </a:bodyPr>
-          <a:lstStyle/>
-          <a:p>
-            <a:pPr>
-              <a:defRPr sz="3600" b="1">
-                <a:solidFill>
-                  <a:srgbClr val="00E5FF"/>
-                </a:solidFill>
-                <a:latin typeface="Microsoft JhengHei"/>
-              </a:defRPr>
-            </a:pPr>
-            <a:r>
-              <a:t>Markdown 語法：清單與待辦任務</a:t>
-            </a:r>
-          </a:p>
-        </p:txBody>
-      </p:sp>
-      <p:sp>
-        <p:nvSpPr>
-          <p:cNvPr id="3" name="Rectangle 2"/>
+          <p:cNvPr id="2" name="Rectangle 1"/>
           <p:cNvSpPr/>
           <p:nvPr/>
         </p:nvSpPr>
         <p:spPr>
           <a:xfrm>
-            <a:off x="731520" y="1371600"/>
-            <a:ext cx="10725912" cy="4754880"/>
+            <a:off x="731520" y="384048"/>
+            <a:ext cx="91440" cy="502920"/>
           </a:xfrm>
           <a:prstGeom prst="rect">
             <a:avLst/>
           </a:prstGeom>
           <a:solidFill>
-            <a:srgbClr val="2D2D35"/>
+            <a:srgbClr val="009688"/>
           </a:solidFill>
           <a:ln>
-            <a:noFill/>
+            <a:solidFill>
+              <a:srgbClr val="009688"/>
+            </a:solidFill>
           </a:ln>
         </p:spPr>
         <p:style>
@@ -8349,14 +10679,14 @@
       </p:sp>
       <p:sp>
         <p:nvSpPr>
-          <p:cNvPr id="4" name="TextBox 3"/>
+          <p:cNvPr id="3" name="TextBox 2"/>
           <p:cNvSpPr txBox="1"/>
           <p:nvPr/>
         </p:nvSpPr>
         <p:spPr>
           <a:xfrm>
-            <a:off x="1097280" y="1645920"/>
-            <a:ext cx="9994392" cy="4206240"/>
+            <a:off x="960120" y="320040"/>
+            <a:ext cx="10497312" cy="731520"/>
           </a:xfrm>
           <a:prstGeom prst="rect">
             <a:avLst/>
@@ -8370,98 +10700,395 @@
           <a:lstStyle/>
           <a:p>
             <a:pPr>
-              <a:spcAft>
-                <a:spcPts val="1000"/>
-              </a:spcAft>
-              <a:defRPr sz="2000">
-                <a:solidFill>
-                  <a:srgbClr val="FFFFFF"/>
-                </a:solidFill>
-                <a:latin typeface="Microsoft JhengHei"/>
-              </a:defRPr>
-            </a:pPr>
-            <a:r>
+              <a:defRPr sz="3600" b="1">
+                <a:solidFill>
+                  <a:srgbClr val="009688"/>
+                </a:solidFill>
+                <a:latin typeface="Microsoft JhengHei"/>
+              </a:defRPr>
+            </a:pPr>
+            <a:r>
+              <a:t>Markdown 語法：清單與待辦任務</a:t>
+            </a:r>
+          </a:p>
+        </p:txBody>
+      </p:sp>
+      <p:sp>
+        <p:nvSpPr>
+          <p:cNvPr id="4" name="Rectangle 3"/>
+          <p:cNvSpPr/>
+          <p:nvPr/>
+        </p:nvSpPr>
+        <p:spPr>
+          <a:xfrm>
+            <a:off x="731520" y="1371600"/>
+            <a:ext cx="10725912" cy="4754880"/>
+          </a:xfrm>
+          <a:prstGeom prst="rect">
+            <a:avLst/>
+          </a:prstGeom>
+          <a:solidFill>
+            <a:srgbClr val="FFFFFF"/>
+          </a:solidFill>
+          <a:ln w="19050">
+            <a:solidFill>
+              <a:srgbClr val="DADEE5"/>
+            </a:solidFill>
+          </a:ln>
+        </p:spPr>
+        <p:style>
+          <a:lnRef idx="1">
+            <a:schemeClr val="accent1"/>
+          </a:lnRef>
+          <a:fillRef idx="3">
+            <a:schemeClr val="accent1"/>
+          </a:fillRef>
+          <a:effectRef idx="2">
+            <a:schemeClr val="accent1"/>
+          </a:effectRef>
+          <a:fontRef idx="minor">
+            <a:schemeClr val="lt1"/>
+          </a:fontRef>
+        </p:style>
+        <p:txBody>
+          <a:bodyPr rtlCol="0" anchor="ctr"/>
+          <a:lstStyle/>
+          <a:p>
+            <a:pPr algn="ctr"/>
+          </a:p>
+        </p:txBody>
+      </p:sp>
+      <p:sp>
+        <p:nvSpPr>
+          <p:cNvPr id="5" name="TextBox 4"/>
+          <p:cNvSpPr txBox="1"/>
+          <p:nvPr/>
+        </p:nvSpPr>
+        <p:spPr>
+          <a:xfrm>
+            <a:off x="1097280" y="1645920"/>
+            <a:ext cx="9994392" cy="4206240"/>
+          </a:xfrm>
+          <a:prstGeom prst="rect">
+            <a:avLst/>
+          </a:prstGeom>
+          <a:noFill/>
+        </p:spPr>
+        <p:txBody>
+          <a:bodyPr wrap="square" lIns="228600" rIns="228600" tIns="228600" bIns="228600">
+            <a:spAutoFit/>
+          </a:bodyPr>
+          <a:lstStyle/>
+          <a:p>
+            <a:pPr>
+              <a:lnSpc>
+                <a:spcPct val="125000"/>
+              </a:lnSpc>
+              <a:spcAft>
+                <a:spcPts val="600"/>
+              </a:spcAft>
+              <a:defRPr>
+                <a:latin typeface="Microsoft JhengHei"/>
+              </a:defRPr>
+            </a:pPr>
+            <a:r>
+              <a:rPr sz="2000">
+                <a:solidFill>
+                  <a:srgbClr val="1B1B1F"/>
+                </a:solidFill>
+                <a:latin typeface="Microsoft JhengHei"/>
+              </a:rPr>
               <a:t>清單能幫助筆記化繁為簡：</a:t>
             </a:r>
           </a:p>
           <a:p>
             <a:pPr lvl="1">
-              <a:spcAft>
-                <a:spcPts val="1000"/>
-              </a:spcAft>
-              <a:defRPr sz="1800">
-                <a:solidFill>
-                  <a:srgbClr val="FFFFFF"/>
-                </a:solidFill>
-                <a:latin typeface="Microsoft JhengHei"/>
-              </a:defRPr>
-            </a:pPr>
-            <a:r>
-              <a:t>**無序清單 (圓點)**：使用 `-` 加空格。例如：`- 蘋果`</a:t>
+              <a:lnSpc>
+                <a:spcPct val="125000"/>
+              </a:lnSpc>
+              <a:spcAft>
+                <a:spcPts val="600"/>
+              </a:spcAft>
+              <a:defRPr>
+                <a:latin typeface="Microsoft JhengHei"/>
+              </a:defRPr>
+            </a:pPr>
+            <a:r>
+              <a:rPr sz="1800" b="1">
+                <a:solidFill>
+                  <a:srgbClr val="1B1B1F"/>
+                </a:solidFill>
+                <a:latin typeface="Microsoft JhengHei"/>
+              </a:rPr>
+              <a:t>無序清單 (圓點)</a:t>
+            </a:r>
+            <a:r>
+              <a:rPr sz="1800">
+                <a:solidFill>
+                  <a:srgbClr val="1B1B1F"/>
+                </a:solidFill>
+                <a:latin typeface="Microsoft JhengHei"/>
+              </a:rPr>
+              <a:t>：使用 </a:t>
+            </a:r>
+            <a:r>
+              <a:rPr sz="1800" b="1">
+                <a:solidFill>
+                  <a:srgbClr val="673AB7"/>
+                </a:solidFill>
+                <a:latin typeface="Consolas"/>
+              </a:rPr>
+              <a:t>-</a:t>
+            </a:r>
+            <a:r>
+              <a:rPr sz="1800">
+                <a:solidFill>
+                  <a:srgbClr val="1B1B1F"/>
+                </a:solidFill>
+                <a:latin typeface="Microsoft JhengHei"/>
+              </a:rPr>
+              <a:t> 加空格。例如：</a:t>
+            </a:r>
+            <a:r>
+              <a:rPr sz="1800" b="1">
+                <a:solidFill>
+                  <a:srgbClr val="673AB7"/>
+                </a:solidFill>
+                <a:latin typeface="Consolas"/>
+              </a:rPr>
+              <a:t>- 蘋果</a:t>
             </a:r>
           </a:p>
           <a:p>
             <a:pPr lvl="1">
-              <a:spcAft>
-                <a:spcPts val="1000"/>
-              </a:spcAft>
-              <a:defRPr sz="1800">
-                <a:solidFill>
-                  <a:srgbClr val="FFFFFF"/>
-                </a:solidFill>
-                <a:latin typeface="Microsoft JhengHei"/>
-              </a:defRPr>
-            </a:pPr>
-            <a:r>
-              <a:t>**有序清單 (數字)**：使用 `1.` 加空格。例如：`1. 第一步`</a:t>
+              <a:lnSpc>
+                <a:spcPct val="125000"/>
+              </a:lnSpc>
+              <a:spcAft>
+                <a:spcPts val="600"/>
+              </a:spcAft>
+              <a:defRPr>
+                <a:latin typeface="Microsoft JhengHei"/>
+              </a:defRPr>
+            </a:pPr>
+            <a:r>
+              <a:rPr sz="1800" b="1">
+                <a:solidFill>
+                  <a:srgbClr val="1B1B1F"/>
+                </a:solidFill>
+                <a:latin typeface="Microsoft JhengHei"/>
+              </a:rPr>
+              <a:t>有序清單 (數字)</a:t>
+            </a:r>
+            <a:r>
+              <a:rPr sz="1800">
+                <a:solidFill>
+                  <a:srgbClr val="1B1B1F"/>
+                </a:solidFill>
+                <a:latin typeface="Microsoft JhengHei"/>
+              </a:rPr>
+              <a:t>：使用 </a:t>
+            </a:r>
+            <a:r>
+              <a:rPr sz="1800" b="1">
+                <a:solidFill>
+                  <a:srgbClr val="673AB7"/>
+                </a:solidFill>
+                <a:latin typeface="Consolas"/>
+              </a:rPr>
+              <a:t>1.</a:t>
+            </a:r>
+            <a:r>
+              <a:rPr sz="1800">
+                <a:solidFill>
+                  <a:srgbClr val="1B1B1F"/>
+                </a:solidFill>
+                <a:latin typeface="Microsoft JhengHei"/>
+              </a:rPr>
+              <a:t> 加空格。例如：</a:t>
+            </a:r>
+            <a:r>
+              <a:rPr sz="1800" b="1">
+                <a:solidFill>
+                  <a:srgbClr val="673AB7"/>
+                </a:solidFill>
+                <a:latin typeface="Consolas"/>
+              </a:rPr>
+              <a:t>1. 第一步</a:t>
             </a:r>
           </a:p>
           <a:p>
             <a:pPr lvl="1">
-              <a:spcAft>
-                <a:spcPts val="1000"/>
-              </a:spcAft>
-              <a:defRPr sz="1800">
-                <a:solidFill>
-                  <a:srgbClr val="FFFFFF"/>
-                </a:solidFill>
-                <a:latin typeface="Microsoft JhengHei"/>
-              </a:defRPr>
-            </a:pPr>
-            <a:r>
-              <a:t>**縮排**：按 `Tab` 可以將列表縮排，按 `Shift + Tab` 可以縮回上一層</a:t>
+              <a:lnSpc>
+                <a:spcPct val="125000"/>
+              </a:lnSpc>
+              <a:spcAft>
+                <a:spcPts val="600"/>
+              </a:spcAft>
+              <a:defRPr>
+                <a:latin typeface="Microsoft JhengHei"/>
+              </a:defRPr>
+            </a:pPr>
+            <a:r>
+              <a:rPr sz="1800" b="1">
+                <a:solidFill>
+                  <a:srgbClr val="1B1B1F"/>
+                </a:solidFill>
+                <a:latin typeface="Microsoft JhengHei"/>
+              </a:rPr>
+              <a:t>縮排</a:t>
+            </a:r>
+            <a:r>
+              <a:rPr sz="1800">
+                <a:solidFill>
+                  <a:srgbClr val="1B1B1F"/>
+                </a:solidFill>
+                <a:latin typeface="Microsoft JhengHei"/>
+              </a:rPr>
+              <a:t>：按 </a:t>
+            </a:r>
+            <a:r>
+              <a:rPr sz="1800" b="1">
+                <a:solidFill>
+                  <a:srgbClr val="673AB7"/>
+                </a:solidFill>
+                <a:latin typeface="Consolas"/>
+              </a:rPr>
+              <a:t>Tab</a:t>
+            </a:r>
+            <a:r>
+              <a:rPr sz="1800">
+                <a:solidFill>
+                  <a:srgbClr val="1B1B1F"/>
+                </a:solidFill>
+                <a:latin typeface="Microsoft JhengHei"/>
+              </a:rPr>
+              <a:t> 可以將列表縮排，按 </a:t>
+            </a:r>
+            <a:r>
+              <a:rPr sz="1800" b="1">
+                <a:solidFill>
+                  <a:srgbClr val="673AB7"/>
+                </a:solidFill>
+                <a:latin typeface="Consolas"/>
+              </a:rPr>
+              <a:t>Shift + Tab</a:t>
+            </a:r>
+            <a:r>
+              <a:rPr sz="1800">
+                <a:solidFill>
+                  <a:srgbClr val="1B1B1F"/>
+                </a:solidFill>
+                <a:latin typeface="Microsoft JhengHei"/>
+              </a:rPr>
+              <a:t> 可以縮回上一層</a:t>
             </a:r>
           </a:p>
           <a:p>
             <a:pPr lvl="1">
-              <a:spcAft>
-                <a:spcPts val="1000"/>
-              </a:spcAft>
-              <a:defRPr sz="1800">
-                <a:solidFill>
-                  <a:srgbClr val="FFFFFF"/>
-                </a:solidFill>
-                <a:latin typeface="Microsoft JhengHei"/>
-              </a:defRPr>
-            </a:pPr>
-            <a:r>
-              <a:t>**任務清單 (打勾待辦)**：使用 `- [ ]` (未完成) 與 `- [x]` (已完成)</a:t>
+              <a:lnSpc>
+                <a:spcPct val="125000"/>
+              </a:lnSpc>
+              <a:spcAft>
+                <a:spcPts val="600"/>
+              </a:spcAft>
+              <a:defRPr>
+                <a:latin typeface="Microsoft JhengHei"/>
+              </a:defRPr>
+            </a:pPr>
+            <a:r>
+              <a:rPr sz="1800" b="1">
+                <a:solidFill>
+                  <a:srgbClr val="1B1B1F"/>
+                </a:solidFill>
+                <a:latin typeface="Microsoft JhengHei"/>
+              </a:rPr>
+              <a:t>任務清單 (打勾待辦)</a:t>
+            </a:r>
+            <a:r>
+              <a:rPr sz="1800">
+                <a:solidFill>
+                  <a:srgbClr val="1B1B1F"/>
+                </a:solidFill>
+                <a:latin typeface="Microsoft JhengHei"/>
+              </a:rPr>
+              <a:t>：使用 </a:t>
+            </a:r>
+            <a:r>
+              <a:rPr sz="1800" b="1">
+                <a:solidFill>
+                  <a:srgbClr val="673AB7"/>
+                </a:solidFill>
+                <a:latin typeface="Consolas"/>
+              </a:rPr>
+              <a:t>- [ ]</a:t>
+            </a:r>
+            <a:r>
+              <a:rPr sz="1800">
+                <a:solidFill>
+                  <a:srgbClr val="1B1B1F"/>
+                </a:solidFill>
+                <a:latin typeface="Microsoft JhengHei"/>
+              </a:rPr>
+              <a:t> (未完成) 與 </a:t>
+            </a:r>
+            <a:r>
+              <a:rPr sz="1800" b="1">
+                <a:solidFill>
+                  <a:srgbClr val="673AB7"/>
+                </a:solidFill>
+                <a:latin typeface="Consolas"/>
+              </a:rPr>
+              <a:t>- [x]</a:t>
+            </a:r>
+            <a:r>
+              <a:rPr sz="1800">
+                <a:solidFill>
+                  <a:srgbClr val="1B1B1F"/>
+                </a:solidFill>
+                <a:latin typeface="Microsoft JhengHei"/>
+              </a:rPr>
+              <a:t> (已完成)</a:t>
             </a:r>
           </a:p>
           <a:p>
             <a:pPr lvl="2">
-              <a:spcAft>
-                <a:spcPts val="1000"/>
-              </a:spcAft>
-              <a:defRPr sz="1600">
-                <a:solidFill>
-                  <a:srgbClr val="FFFFFF"/>
-                </a:solidFill>
-                <a:latin typeface="Microsoft JhengHei"/>
-              </a:defRPr>
-            </a:pPr>
-            <a:r>
-              <a:t>*小技巧*：按 `Ctrl + Enter` 可在編輯時快速切換任務打勾狀態</a:t>
+              <a:lnSpc>
+                <a:spcPct val="125000"/>
+              </a:lnSpc>
+              <a:spcAft>
+                <a:spcPts val="600"/>
+              </a:spcAft>
+              <a:defRPr>
+                <a:latin typeface="Microsoft JhengHei"/>
+              </a:defRPr>
+            </a:pPr>
+            <a:r>
+              <a:rPr sz="1600">
+                <a:solidFill>
+                  <a:srgbClr val="1B1B1F"/>
+                </a:solidFill>
+                <a:latin typeface="Microsoft JhengHei"/>
+              </a:rPr>
+              <a:t>*小技巧*：按 </a:t>
+            </a:r>
+            <a:r>
+              <a:rPr sz="1600" b="1">
+                <a:solidFill>
+                  <a:srgbClr val="673AB7"/>
+                </a:solidFill>
+                <a:latin typeface="Consolas"/>
+              </a:rPr>
+              <a:t>Ctrl + Enter</a:t>
+            </a:r>
+            <a:r>
+              <a:rPr sz="1600">
+                <a:solidFill>
+                  <a:srgbClr val="1B1B1F"/>
+                </a:solidFill>
+                <a:latin typeface="Microsoft JhengHei"/>
+              </a:rPr>
+              <a:t> 可在編輯時快速切換任務打勾狀態</a:t>
             </a:r>
           </a:p>
         </p:txBody>
@@ -8480,7 +11107,7 @@
     <p:bg>
       <p:bgPr>
         <a:solidFill>
-          <a:srgbClr val="1E1E24"/>
+          <a:srgbClr val="F5F5F7"/>
         </a:solidFill>
         <a:effectLst/>
       </p:bgPr>
@@ -8494,59 +11121,25 @@
       <p:grpSpPr/>
       <p:sp>
         <p:nvSpPr>
-          <p:cNvPr id="2" name="TextBox 1"/>
-          <p:cNvSpPr txBox="1"/>
-          <p:nvPr/>
-        </p:nvSpPr>
-        <p:spPr>
-          <a:xfrm>
-            <a:off x="731520" y="365760"/>
-            <a:ext cx="10725912" cy="731520"/>
-          </a:xfrm>
-          <a:prstGeom prst="rect">
-            <a:avLst/>
-          </a:prstGeom>
-          <a:noFill/>
-        </p:spPr>
-        <p:txBody>
-          <a:bodyPr wrap="square" lIns="0" tIns="0" rIns="0" bIns="0">
-            <a:spAutoFit/>
-          </a:bodyPr>
-          <a:lstStyle/>
-          <a:p>
-            <a:pPr>
-              <a:defRPr sz="3600" b="1">
-                <a:solidFill>
-                  <a:srgbClr val="00E5FF"/>
-                </a:solidFill>
-                <a:latin typeface="Microsoft JhengHei"/>
-              </a:defRPr>
-            </a:pPr>
-            <a:r>
-              <a:t>Markdown 語法：引用與 Callout</a:t>
-            </a:r>
-          </a:p>
-        </p:txBody>
-      </p:sp>
-      <p:sp>
-        <p:nvSpPr>
-          <p:cNvPr id="3" name="Rectangle 2"/>
+          <p:cNvPr id="2" name="Rectangle 1"/>
           <p:cNvSpPr/>
           <p:nvPr/>
         </p:nvSpPr>
         <p:spPr>
           <a:xfrm>
-            <a:off x="731520" y="1371600"/>
-            <a:ext cx="10725912" cy="4754880"/>
+            <a:off x="731520" y="384048"/>
+            <a:ext cx="91440" cy="502920"/>
           </a:xfrm>
           <a:prstGeom prst="rect">
             <a:avLst/>
           </a:prstGeom>
           <a:solidFill>
-            <a:srgbClr val="2D2D35"/>
+            <a:srgbClr val="009688"/>
           </a:solidFill>
           <a:ln>
-            <a:noFill/>
+            <a:solidFill>
+              <a:srgbClr val="009688"/>
+            </a:solidFill>
           </a:ln>
         </p:spPr>
         <p:style>
@@ -8573,14 +11166,14 @@
       </p:sp>
       <p:sp>
         <p:nvSpPr>
-          <p:cNvPr id="4" name="TextBox 3"/>
+          <p:cNvPr id="3" name="TextBox 2"/>
           <p:cNvSpPr txBox="1"/>
           <p:nvPr/>
         </p:nvSpPr>
         <p:spPr>
           <a:xfrm>
-            <a:off x="1097280" y="1645920"/>
-            <a:ext cx="9994392" cy="4206240"/>
+            <a:off x="960120" y="320040"/>
+            <a:ext cx="10497312" cy="731520"/>
           </a:xfrm>
           <a:prstGeom prst="rect">
             <a:avLst/>
@@ -8594,114 +11187,345 @@
           <a:lstStyle/>
           <a:p>
             <a:pPr>
-              <a:spcAft>
-                <a:spcPts val="1000"/>
-              </a:spcAft>
-              <a:defRPr sz="2000">
-                <a:solidFill>
-                  <a:srgbClr val="FFFFFF"/>
-                </a:solidFill>
-                <a:latin typeface="Microsoft JhengHei"/>
-              </a:defRPr>
-            </a:pPr>
-            <a:r>
-              <a:t>**引用區塊**：在開頭輸入 `&gt;` 代表引用名言。例如：`&gt; 知識就是力量。`</a:t>
-            </a:r>
-          </a:p>
+              <a:defRPr sz="3600" b="1">
+                <a:solidFill>
+                  <a:srgbClr val="009688"/>
+                </a:solidFill>
+                <a:latin typeface="Microsoft JhengHei"/>
+              </a:defRPr>
+            </a:pPr>
+            <a:r>
+              <a:t>Markdown 語法：引用與 Callout</a:t>
+            </a:r>
+          </a:p>
+        </p:txBody>
+      </p:sp>
+      <p:sp>
+        <p:nvSpPr>
+          <p:cNvPr id="4" name="Rectangle 3"/>
+          <p:cNvSpPr/>
+          <p:nvPr/>
+        </p:nvSpPr>
+        <p:spPr>
+          <a:xfrm>
+            <a:off x="731520" y="1371600"/>
+            <a:ext cx="10725912" cy="4754880"/>
+          </a:xfrm>
+          <a:prstGeom prst="rect">
+            <a:avLst/>
+          </a:prstGeom>
+          <a:solidFill>
+            <a:srgbClr val="FFFFFF"/>
+          </a:solidFill>
+          <a:ln w="19050">
+            <a:solidFill>
+              <a:srgbClr val="DADEE5"/>
+            </a:solidFill>
+          </a:ln>
+        </p:spPr>
+        <p:style>
+          <a:lnRef idx="1">
+            <a:schemeClr val="accent1"/>
+          </a:lnRef>
+          <a:fillRef idx="3">
+            <a:schemeClr val="accent1"/>
+          </a:fillRef>
+          <a:effectRef idx="2">
+            <a:schemeClr val="accent1"/>
+          </a:effectRef>
+          <a:fontRef idx="minor">
+            <a:schemeClr val="lt1"/>
+          </a:fontRef>
+        </p:style>
+        <p:txBody>
+          <a:bodyPr rtlCol="0" anchor="ctr"/>
+          <a:lstStyle/>
+          <a:p>
+            <a:pPr algn="ctr"/>
+          </a:p>
+        </p:txBody>
+      </p:sp>
+      <p:sp>
+        <p:nvSpPr>
+          <p:cNvPr id="5" name="TextBox 4"/>
+          <p:cNvSpPr txBox="1"/>
+          <p:nvPr/>
+        </p:nvSpPr>
+        <p:spPr>
+          <a:xfrm>
+            <a:off x="1097280" y="1645920"/>
+            <a:ext cx="9994392" cy="4206240"/>
+          </a:xfrm>
+          <a:prstGeom prst="rect">
+            <a:avLst/>
+          </a:prstGeom>
+          <a:noFill/>
+        </p:spPr>
+        <p:txBody>
+          <a:bodyPr wrap="square" lIns="228600" rIns="228600" tIns="228600" bIns="228600">
+            <a:spAutoFit/>
+          </a:bodyPr>
+          <a:lstStyle/>
           <a:p>
             <a:pPr>
-              <a:spcAft>
-                <a:spcPts val="1000"/>
-              </a:spcAft>
-              <a:defRPr sz="2000">
-                <a:solidFill>
-                  <a:srgbClr val="FFFFFF"/>
-                </a:solidFill>
-                <a:latin typeface="Microsoft JhengHei"/>
-              </a:defRPr>
-            </a:pPr>
-            <a:r>
-              <a:t>**Callout 彩色提示框**：Obsidian 特有的精美排版框：</a:t>
+              <a:lnSpc>
+                <a:spcPct val="125000"/>
+              </a:lnSpc>
+              <a:spcAft>
+                <a:spcPts val="600"/>
+              </a:spcAft>
+              <a:defRPr>
+                <a:latin typeface="Microsoft JhengHei"/>
+              </a:defRPr>
+            </a:pPr>
+            <a:r>
+              <a:rPr sz="2000" b="1">
+                <a:solidFill>
+                  <a:srgbClr val="1B1B1F"/>
+                </a:solidFill>
+                <a:latin typeface="Microsoft JhengHei"/>
+              </a:rPr>
+              <a:t>引用區塊</a:t>
+            </a:r>
+            <a:r>
+              <a:rPr sz="2000">
+                <a:solidFill>
+                  <a:srgbClr val="1B1B1F"/>
+                </a:solidFill>
+                <a:latin typeface="Microsoft JhengHei"/>
+              </a:rPr>
+              <a:t>：在開頭輸入 </a:t>
+            </a:r>
+            <a:r>
+              <a:rPr sz="2000" b="1">
+                <a:solidFill>
+                  <a:srgbClr val="673AB7"/>
+                </a:solidFill>
+                <a:latin typeface="Consolas"/>
+              </a:rPr>
+              <a:t>&gt;</a:t>
+            </a:r>
+            <a:r>
+              <a:rPr sz="2000">
+                <a:solidFill>
+                  <a:srgbClr val="1B1B1F"/>
+                </a:solidFill>
+                <a:latin typeface="Microsoft JhengHei"/>
+              </a:rPr>
+              <a:t> 代表引用名言。例如：</a:t>
+            </a:r>
+            <a:r>
+              <a:rPr sz="2000" b="1">
+                <a:solidFill>
+                  <a:srgbClr val="673AB7"/>
+                </a:solidFill>
+                <a:latin typeface="Consolas"/>
+              </a:rPr>
+              <a:t>&gt; 知識就是力量。</a:t>
+            </a:r>
+          </a:p>
+          <a:p>
+            <a:pPr>
+              <a:lnSpc>
+                <a:spcPct val="125000"/>
+              </a:lnSpc>
+              <a:spcAft>
+                <a:spcPts val="600"/>
+              </a:spcAft>
+              <a:defRPr>
+                <a:latin typeface="Microsoft JhengHei"/>
+              </a:defRPr>
+            </a:pPr>
+            <a:r>
+              <a:rPr sz="2000" b="1">
+                <a:solidFill>
+                  <a:srgbClr val="1B1B1F"/>
+                </a:solidFill>
+                <a:latin typeface="Microsoft JhengHei"/>
+              </a:rPr>
+              <a:t>Callout 彩色提示框</a:t>
+            </a:r>
+            <a:r>
+              <a:rPr sz="2000">
+                <a:solidFill>
+                  <a:srgbClr val="1B1B1F"/>
+                </a:solidFill>
+                <a:latin typeface="Microsoft JhengHei"/>
+              </a:rPr>
+              <a:t>：Obsidian 特有的精美排版框：</a:t>
             </a:r>
           </a:p>
           <a:p>
             <a:pPr lvl="1">
-              <a:spcAft>
-                <a:spcPts val="1000"/>
-              </a:spcAft>
-              <a:defRPr sz="1800">
-                <a:solidFill>
-                  <a:srgbClr val="FFFFFF"/>
-                </a:solidFill>
-                <a:latin typeface="Microsoft JhengHei"/>
-              </a:defRPr>
-            </a:pPr>
-            <a:r>
-              <a:t>`&gt; [!NOTE]` ➡ 藍色一般提示框</a:t>
+              <a:lnSpc>
+                <a:spcPct val="125000"/>
+              </a:lnSpc>
+              <a:spcAft>
+                <a:spcPts val="600"/>
+              </a:spcAft>
+              <a:defRPr>
+                <a:latin typeface="Microsoft JhengHei"/>
+              </a:defRPr>
+            </a:pPr>
+            <a:r>
+              <a:rPr sz="1800" b="1">
+                <a:solidFill>
+                  <a:srgbClr val="673AB7"/>
+                </a:solidFill>
+                <a:latin typeface="Consolas"/>
+              </a:rPr>
+              <a:t>&gt; [!NOTE]</a:t>
+            </a:r>
+            <a:r>
+              <a:rPr sz="1800">
+                <a:solidFill>
+                  <a:srgbClr val="1B1B1F"/>
+                </a:solidFill>
+                <a:latin typeface="Microsoft JhengHei"/>
+              </a:rPr>
+              <a:t> ➡ 藍色一般提示框</a:t>
             </a:r>
           </a:p>
           <a:p>
             <a:pPr lvl="1">
-              <a:spcAft>
-                <a:spcPts val="1000"/>
-              </a:spcAft>
-              <a:defRPr sz="1800">
-                <a:solidFill>
-                  <a:srgbClr val="FFFFFF"/>
-                </a:solidFill>
-                <a:latin typeface="Microsoft JhengHei"/>
-              </a:defRPr>
-            </a:pPr>
-            <a:r>
-              <a:t>`&gt; [!WARNING]` ➡ 黃色警告框</a:t>
+              <a:lnSpc>
+                <a:spcPct val="125000"/>
+              </a:lnSpc>
+              <a:spcAft>
+                <a:spcPts val="600"/>
+              </a:spcAft>
+              <a:defRPr>
+                <a:latin typeface="Microsoft JhengHei"/>
+              </a:defRPr>
+            </a:pPr>
+            <a:r>
+              <a:rPr sz="1800" b="1">
+                <a:solidFill>
+                  <a:srgbClr val="673AB7"/>
+                </a:solidFill>
+                <a:latin typeface="Consolas"/>
+              </a:rPr>
+              <a:t>&gt; [!WARNING]</a:t>
+            </a:r>
+            <a:r>
+              <a:rPr sz="1800">
+                <a:solidFill>
+                  <a:srgbClr val="1B1B1F"/>
+                </a:solidFill>
+                <a:latin typeface="Microsoft JhengHei"/>
+              </a:rPr>
+              <a:t> ➡ 黃色警告框</a:t>
             </a:r>
           </a:p>
           <a:p>
             <a:pPr lvl="1">
-              <a:spcAft>
-                <a:spcPts val="1000"/>
-              </a:spcAft>
-              <a:defRPr sz="1800">
-                <a:solidFill>
-                  <a:srgbClr val="FFFFFF"/>
-                </a:solidFill>
-                <a:latin typeface="Microsoft JhengHei"/>
-              </a:defRPr>
-            </a:pPr>
-            <a:r>
-              <a:t>`&gt; [!TIP]` ➡ 綠色技巧提示框</a:t>
+              <a:lnSpc>
+                <a:spcPct val="125000"/>
+              </a:lnSpc>
+              <a:spcAft>
+                <a:spcPts val="600"/>
+              </a:spcAft>
+              <a:defRPr>
+                <a:latin typeface="Microsoft JhengHei"/>
+              </a:defRPr>
+            </a:pPr>
+            <a:r>
+              <a:rPr sz="1800" b="1">
+                <a:solidFill>
+                  <a:srgbClr val="673AB7"/>
+                </a:solidFill>
+                <a:latin typeface="Consolas"/>
+              </a:rPr>
+              <a:t>&gt; [!TIP]</a:t>
+            </a:r>
+            <a:r>
+              <a:rPr sz="1800">
+                <a:solidFill>
+                  <a:srgbClr val="1B1B1F"/>
+                </a:solidFill>
+                <a:latin typeface="Microsoft JhengHei"/>
+              </a:rPr>
+              <a:t> ➡ 綠色技巧提示框</a:t>
             </a:r>
           </a:p>
           <a:p>
             <a:pPr lvl="1">
-              <a:spcAft>
-                <a:spcPts val="1000"/>
-              </a:spcAft>
-              <a:defRPr sz="1800">
-                <a:solidFill>
-                  <a:srgbClr val="FFFFFF"/>
-                </a:solidFill>
-                <a:latin typeface="Microsoft JhengHei"/>
-              </a:defRPr>
-            </a:pPr>
-            <a:r>
-              <a:t>`&gt; [!DANGER]` ➡ 紅色危險標記框</a:t>
+              <a:lnSpc>
+                <a:spcPct val="125000"/>
+              </a:lnSpc>
+              <a:spcAft>
+                <a:spcPts val="600"/>
+              </a:spcAft>
+              <a:defRPr>
+                <a:latin typeface="Microsoft JhengHei"/>
+              </a:defRPr>
+            </a:pPr>
+            <a:r>
+              <a:rPr sz="1800" b="1">
+                <a:solidFill>
+                  <a:srgbClr val="673AB7"/>
+                </a:solidFill>
+                <a:latin typeface="Consolas"/>
+              </a:rPr>
+              <a:t>&gt; [!DANGER]</a:t>
+            </a:r>
+            <a:r>
+              <a:rPr sz="1800">
+                <a:solidFill>
+                  <a:srgbClr val="1B1B1F"/>
+                </a:solidFill>
+                <a:latin typeface="Microsoft JhengHei"/>
+              </a:rPr>
+              <a:t> ➡ 紅色危險標記框</a:t>
             </a:r>
           </a:p>
           <a:p>
             <a:pPr>
-              <a:spcAft>
-                <a:spcPts val="1000"/>
-              </a:spcAft>
-              <a:defRPr sz="2000">
-                <a:solidFill>
-                  <a:srgbClr val="FFFFFF"/>
-                </a:solidFill>
-                <a:latin typeface="Microsoft JhengHei"/>
-              </a:defRPr>
-            </a:pPr>
-            <a:r>
-              <a:t>**水平分隔線**：輸入三個減號 `---` 即可產生一條水平線切分版面</a:t>
+              <a:lnSpc>
+                <a:spcPct val="125000"/>
+              </a:lnSpc>
+              <a:spcAft>
+                <a:spcPts val="600"/>
+              </a:spcAft>
+              <a:defRPr>
+                <a:latin typeface="Microsoft JhengHei"/>
+              </a:defRPr>
+            </a:pPr>
+            <a:r>
+              <a:rPr sz="2000" b="1">
+                <a:solidFill>
+                  <a:srgbClr val="1B1B1F"/>
+                </a:solidFill>
+                <a:latin typeface="Microsoft JhengHei"/>
+              </a:rPr>
+              <a:t>水平分隔線</a:t>
+            </a:r>
+            <a:r>
+              <a:rPr sz="2000">
+                <a:solidFill>
+                  <a:srgbClr val="1B1B1F"/>
+                </a:solidFill>
+                <a:latin typeface="Microsoft JhengHei"/>
+              </a:rPr>
+              <a:t>：輸入三個減號 </a:t>
+            </a:r>
+            <a:r>
+              <a:rPr sz="2000" b="1">
+                <a:solidFill>
+                  <a:srgbClr val="673AB7"/>
+                </a:solidFill>
+                <a:latin typeface="Consolas"/>
+              </a:rPr>
+              <a:t>---</a:t>
+            </a:r>
+            <a:r>
+              <a:rPr sz="2000">
+                <a:solidFill>
+                  <a:srgbClr val="1B1B1F"/>
+                </a:solidFill>
+                <a:latin typeface="Microsoft JhengHei"/>
+              </a:rPr>
+              <a:t> 即可產生一條水平線切分版面</a:t>
             </a:r>
           </a:p>
         </p:txBody>
